--- a/答辩材料/龙泳江20260906学位答辩.pptx
+++ b/答辩材料/龙泳江20260906学位答辩.pptx
@@ -536,16 +536,28 @@
           <a:lstStyle/>
           <a:p>
             <a:r>
+              <a:rPr>
+                <a:latin typeface="Calibri"/>
+                <a:ea typeface="微软雅黑"/>
+              </a:rPr>
               <a:t>各位专家好，我是龙泳江，我的导师是苏中根教授，我来自工程师学院的数据科学与工程专业。</a:t>
             </a:r>
           </a:p>
           <a:p>
             <a:r>
+              <a:rPr>
+                <a:latin typeface="Calibri"/>
+                <a:ea typeface="微软雅黑"/>
+              </a:rPr>
               <a:t>我的学位论文题目是《基于机器学习的固态硬盘故障预测与寿命提升方法研究》。</a:t>
             </a:r>
           </a:p>
           <a:p>
             <a:r>
+              <a:rPr>
+                <a:latin typeface="Calibri"/>
+                <a:ea typeface="微软雅黑"/>
+              </a:rPr>
               <a:t>感谢各位在百忙之中来参加我的答辩。</a:t>
             </a:r>
           </a:p>
@@ -616,16 +628,28 @@
           <a:lstStyle/>
           <a:p>
             <a:r>
+              <a:rPr>
+                <a:latin typeface="Calibri"/>
+                <a:ea typeface="微软雅黑"/>
+              </a:rPr>
               <a:t>错误比特产生之后，固态盘不可能什么都不做，会在软件层做容错。比如用 LDPC 校验码来编码——添加额外的校验位，读出来有一定数量的比特错了，可以通过校验码校验回来。超过容错上限就无法复原了。</a:t>
             </a:r>
           </a:p>
           <a:p>
             <a:r>
+              <a:rPr>
+                <a:latin typeface="Calibri"/>
+                <a:ea typeface="微软雅黑"/>
+              </a:rPr>
               <a:t>这些软件容错方案会产生通用的监控指标，就是 SMART 指标，比如温度、备用块数量、通电时间。第三章用的就是 SMART 指标作为特征。</a:t>
             </a:r>
           </a:p>
           <a:p>
             <a:r>
+              <a:rPr>
+                <a:latin typeface="Calibri"/>
+                <a:ea typeface="微软雅黑"/>
+              </a:rPr>
               <a:t>第四章则不同——直接用错误比特本身来建模，预测块的寿命。</a:t>
             </a:r>
           </a:p>
@@ -696,36 +720,64 @@
           <a:lstStyle/>
           <a:p>
             <a:r>
+              <a:rPr>
+                <a:latin typeface="Calibri"/>
+                <a:ea typeface="微软雅黑"/>
+              </a:rPr>
               <a:t>前面是特征的来源，右边是我们使用的建模技术。</a:t>
             </a:r>
           </a:p>
           <a:p>
             <a:r>
+              <a:rPr>
+                <a:latin typeface="Calibri"/>
+                <a:ea typeface="微软雅黑"/>
+              </a:rPr>
               <a:t>本文选用三种异构模型做互补。</a:t>
             </a:r>
           </a:p>
           <a:p>
             <a:r>
+              <a:rPr>
+                <a:latin typeface="Calibri"/>
+                <a:ea typeface="微软雅黑"/>
+              </a:rPr>
               <a:t>左边是随机森林——同一份数据用不同子集训练多棵树，最后投票表决，单个模型的偏差互相抵消，结果更稳定。</a:t>
             </a:r>
           </a:p>
           <a:p>
             <a:r>
+              <a:rPr>
+                <a:latin typeface="Calibri"/>
+                <a:ea typeface="微软雅黑"/>
+              </a:rPr>
               <a:t>右边是 Boosting 系列——XGBoost 和 LightGBM，它们每一轮都在修正上一轮犯过的错，逐步提升精度。</a:t>
             </a:r>
           </a:p>
           <a:p>
             <a:r>
+              <a:rPr>
+                <a:latin typeface="Calibri"/>
+                <a:ea typeface="微软雅黑"/>
+              </a:rPr>
               <a:t>三者各有所长，随机森林稳、Boosting 精度高，异构集成实现互补。</a:t>
             </a:r>
           </a:p>
           <a:p>
             <a:r>
+              <a:rPr>
+                <a:latin typeface="Calibri"/>
+                <a:ea typeface="微软雅黑"/>
+              </a:rPr>
               <a:t>至于为什么不用深度学习——我们的正负样本比例大约是 1 比 700 到 1 比 1000，深度学习在这种极端不平衡下梯度全被健康样本主导，训练出来的模型只会判健康。</a:t>
             </a:r>
           </a:p>
           <a:p>
             <a:r>
+              <a:rPr>
+                <a:latin typeface="Calibri"/>
+                <a:ea typeface="微软雅黑"/>
+              </a:rPr>
               <a:t>树模型基于特征分裂，天然对样本比例不敏感，在这个场景下更稳。</a:t>
             </a:r>
           </a:p>
@@ -796,6 +848,10 @@
           <a:lstStyle/>
           <a:p>
             <a:r>
+              <a:rPr>
+                <a:latin typeface="Calibri"/>
+                <a:ea typeface="微软雅黑"/>
+              </a:rPr>
               <a:t>前面的背景和技术都讲清楚了，进入第三章，盘级故障预测。</a:t>
             </a:r>
           </a:p>
@@ -866,26 +922,46 @@
           <a:lstStyle/>
           <a:p>
             <a:r>
+              <a:rPr>
+                <a:latin typeface="Calibri"/>
+                <a:ea typeface="微软雅黑"/>
+              </a:rPr>
               <a:t>请看这张总体流程图。SMART 日级日志经过预处理和 A/B 归纳后分三路并行处理。</a:t>
             </a:r>
           </a:p>
           <a:p>
             <a:r>
+              <a:rPr>
+                <a:latin typeface="Calibri"/>
+                <a:ea typeface="微软雅黑"/>
+              </a:rPr>
               <a:t>第一路是混合标注模块，提供降噪后的监督信号。</a:t>
             </a:r>
           </a:p>
           <a:p>
             <a:r>
+              <a:rPr>
+                <a:latin typeface="Calibri"/>
+                <a:ea typeface="微软雅黑"/>
+              </a:rPr>
               <a:t>第二路是突变特征构造，捕捉故障近端的短期跳变。</a:t>
             </a:r>
           </a:p>
           <a:p>
             <a:r>
+              <a:rPr>
+                <a:latin typeface="Calibri"/>
+                <a:ea typeface="微软雅黑"/>
+              </a:rPr>
               <a:t>第三路是异构集成预测，RF、XGBoost、LightGBM 三路并行后经 Attention 融合。</a:t>
             </a:r>
           </a:p>
           <a:p>
             <a:r>
+              <a:rPr>
+                <a:latin typeface="Calibri"/>
+                <a:ea typeface="微软雅黑"/>
+              </a:rPr>
               <a:t>最终输出样本级故障概率，聚合为盘级最早告警评估。</a:t>
             </a:r>
           </a:p>
@@ -956,26 +1032,46 @@
           <a:lstStyle/>
           <a:p>
             <a:r>
+              <a:rPr>
+                <a:latin typeface="Calibri"/>
+                <a:ea typeface="微软雅黑"/>
+              </a:rPr>
               <a:t>这是我们使用的数据。</a:t>
             </a:r>
           </a:p>
           <a:p>
             <a:r>
+              <a:rPr>
+                <a:latin typeface="Calibri"/>
+                <a:ea typeface="微软雅黑"/>
+              </a:rPr>
               <a:t>实验使用阿里云公开的 SMART 数据集，涵盖五座数据中心、2018 年 1 月到 2019 年 12 月的日级日志。</a:t>
             </a:r>
           </a:p>
           <a:p>
             <a:r>
+              <a:rPr>
+                <a:latin typeface="Calibri"/>
+                <a:ea typeface="微软雅黑"/>
+              </a:rPr>
               <a:t>原始数据合计 9.3 万块盘，经过清洗后保留约 8 万块。移除了前五个月故障极少且第六个月异常激增的非稳态时段，也移除了观测期过短的盘。</a:t>
             </a:r>
           </a:p>
           <a:p>
             <a:r>
+              <a:rPr>
+                <a:latin typeface="Calibri"/>
+                <a:ea typeface="微软雅黑"/>
+              </a:rPr>
               <a:t>MB1 和 MB2 均为 MLC-SSD，故障率构成高、低信噪比对照。</a:t>
             </a:r>
           </a:p>
           <a:p>
             <a:r>
+              <a:rPr>
+                <a:latin typeface="Calibri"/>
+                <a:ea typeface="微软雅黑"/>
+              </a:rPr>
               <a:t>102 列 SMART 属性经过空值过滤、零方差剔除和 Spearman 冗余筛选三步，保留了核心特征。</a:t>
             </a:r>
           </a:p>
@@ -1046,16 +1142,28 @@
           <a:lstStyle/>
           <a:p>
             <a:r>
+              <a:rPr>
+                <a:latin typeface="Calibri"/>
+                <a:ea typeface="微软雅黑"/>
+              </a:rPr>
               <a:t>这里就是它的故障分布和缺失模式。</a:t>
             </a:r>
           </a:p>
           <a:p>
             <a:r>
+              <a:rPr>
+                <a:latin typeface="Calibri"/>
+                <a:ea typeface="微软雅黑"/>
+              </a:rPr>
               <a:t>左图是 MB1 和 MB2 的月度故障计数。MB1 的故障高峰集中在 2018 年中和 2019 年末，MB2 故障率更低但分布更均匀。</a:t>
             </a:r>
           </a:p>
           <a:p>
             <a:r>
+              <a:rPr>
+                <a:latin typeface="Calibri"/>
+                <a:ea typeface="微软雅黑"/>
+              </a:rPr>
               <a:t>右图展示了 SMART 数据的缺失模式。可以看到部分 SMART 属性存在系统性缺失，这不是随机丢失的，因此在预处理阶段需要针对性地补全，否则会引入偏差。</a:t>
             </a:r>
           </a:p>
@@ -1126,36 +1234,64 @@
           <a:lstStyle/>
           <a:p>
             <a:r>
+              <a:rPr>
+                <a:latin typeface="Calibri"/>
+                <a:ea typeface="微软雅黑"/>
+              </a:rPr>
               <a:t>基于清洗完的数据集做了补全之后，在上面做了一个分析。</a:t>
             </a:r>
           </a:p>
           <a:p>
             <a:r>
+              <a:rPr>
+                <a:latin typeface="Calibri"/>
+                <a:ea typeface="微软雅黑"/>
+              </a:rPr>
               <a:t>我们把 SMART 属性按故障相关性分为 A 组和 B 组。简单来说，A 组是一直在缓慢变化的，B 组是平时不动、出错才动的。</a:t>
             </a:r>
           </a:p>
           <a:p>
             <a:r>
+              <a:rPr>
+                <a:latin typeface="Calibri"/>
+                <a:ea typeface="微软雅黑"/>
+              </a:rPr>
               <a:t>B 组是像备用块计数、错误计数这类属性——一般都是零，出了错变成 1，再出错变成 2，单调递增。</a:t>
             </a:r>
           </a:p>
           <a:p>
             <a:r>
+              <a:rPr>
+                <a:latin typeface="Calibri"/>
+                <a:ea typeface="微软雅黑"/>
+              </a:rPr>
               <a:t>这类属性在故障前 1 到 3 天会呈现明显的阶跃式突变。</a:t>
             </a:r>
           </a:p>
           <a:p>
             <a:r>
+              <a:rPr>
+                <a:latin typeface="Calibri"/>
+                <a:ea typeface="微软雅黑"/>
+              </a:rPr>
               <a:t>请看左图 MB1 的六块故障盘，时序曲线都呈现一致的突变模式。A 组磨损计数则是缓慢平稳增长，没有这种近端跳变。</a:t>
             </a:r>
           </a:p>
           <a:p>
             <a:r>
+              <a:rPr>
+                <a:latin typeface="Calibri"/>
+                <a:ea typeface="微软雅黑"/>
+              </a:rPr>
               <a:t>右图 MB2 验证了这个发现——即使在低故障率场景下，突变信号仍然可以辨识。不过低信噪比确实对模型的检出能力构成了挑战。</a:t>
             </a:r>
           </a:p>
           <a:p>
             <a:r>
+              <a:rPr>
+                <a:latin typeface="Calibri"/>
+                <a:ea typeface="微软雅黑"/>
+              </a:rPr>
               <a:t>这一发现表明——长窗口特征可能并非必要，故障信号高度集中在近端 1 到 3 天。</a:t>
             </a:r>
           </a:p>
@@ -1226,31 +1362,55 @@
           <a:lstStyle/>
           <a:p>
             <a:r>
+              <a:rPr>
+                <a:latin typeface="Calibri"/>
+                <a:ea typeface="微软雅黑"/>
+              </a:rPr>
               <a:t>对这个跳变做了一个更细的统计。</a:t>
             </a:r>
           </a:p>
           <a:p>
             <a:r>
+              <a:rPr>
+                <a:latin typeface="Calibri"/>
+                <a:ea typeface="微软雅黑"/>
+              </a:rPr>
               <a:t>请看这张 B 组属性首次非零跳变时间的 PMF 分布图。</a:t>
             </a:r>
           </a:p>
           <a:p>
             <a:r>
+              <a:rPr>
+                <a:latin typeface="Calibri"/>
+                <a:ea typeface="微软雅黑"/>
+              </a:rPr>
               <a:t>MB1 的峰值落在故障前 1 天，约占六成；3 天内累计超过六成。</a:t>
             </a:r>
           </a:p>
           <a:p>
             <a:r>
+              <a:rPr>
+                <a:latin typeface="Calibri"/>
+                <a:ea typeface="微软雅黑"/>
+              </a:rPr>
               <a:t>还要注意，约 30% 的故障盘在整个 30 天窗口内完全没有跳变——我们叫它们静默盘。这类盘没有任何软件容错指标的变动，只有开机时间在递增、温度在波动，和健康盘无法区分，是最难检出的。</a:t>
             </a:r>
           </a:p>
           <a:p>
             <a:r>
+              <a:rPr>
+                <a:latin typeface="Calibri"/>
+                <a:ea typeface="微软雅黑"/>
+              </a:rPr>
               <a:t>对有跳变的盘，首跳时间点有重要意义——它为混合标注的正样本下界提供了统计依据。</a:t>
             </a:r>
           </a:p>
           <a:p>
             <a:r>
+              <a:rPr>
+                <a:latin typeface="Calibri"/>
+                <a:ea typeface="微软雅黑"/>
+              </a:rPr>
               <a:t>我们把正样本限制在短窗 k 等于 2 天与首跳的交集区间，从而消除静默段的标签噪声。</a:t>
             </a:r>
           </a:p>
@@ -1321,16 +1481,28 @@
           <a:lstStyle/>
           <a:p>
             <a:r>
+              <a:rPr>
+                <a:latin typeface="Calibri"/>
+                <a:ea typeface="微软雅黑"/>
+              </a:rPr>
               <a:t>为什么要设计标签策略？因为故障盘从健康到故障有一个变化过程，在突变前它和健康盘其实没什么区别。如果说我们把突变前的阶段也标成故障样本，那就是引入了一个非常大的误差。</a:t>
             </a:r>
           </a:p>
           <a:p>
             <a:r>
+              <a:rPr>
+                <a:latin typeface="Calibri"/>
+                <a:ea typeface="微软雅黑"/>
+              </a:rPr>
               <a:t>如果只用故障当天标注，会丢失前 1 到 2 天的信号；用 3 到 5 天短窗，噪声减少但仍有；用 30 天长窗，突变前与正常无异的部分全标为故障，噪声最大。</a:t>
             </a:r>
           </a:p>
           <a:p>
             <a:r>
+              <a:rPr>
+                <a:latin typeface="Calibri"/>
+                <a:ea typeface="微软雅黑"/>
+              </a:rPr>
               <a:t>所以我们做了一个混合策略——用一个可配置的固定窗口加上跳变时间做交集，同时命中这两个规则的才标记为正样本。</a:t>
             </a:r>
           </a:p>
@@ -1401,26 +1573,46 @@
           <a:lstStyle/>
           <a:p>
             <a:r>
+              <a:rPr>
+                <a:latin typeface="Calibri"/>
+                <a:ea typeface="微软雅黑"/>
+              </a:rPr>
               <a:t>右边就是具体的实现技术。</a:t>
             </a:r>
           </a:p>
           <a:p>
             <a:r>
+              <a:rPr>
+                <a:latin typeface="Calibri"/>
+                <a:ea typeface="微软雅黑"/>
+              </a:rPr>
               <a:t>左图是集成模型架构。RF 提供稳定基线，XGBoost 精度高，LightGBM 速度快效率好。</a:t>
             </a:r>
           </a:p>
           <a:p>
             <a:r>
+              <a:rPr>
+                <a:latin typeface="Calibri"/>
+                <a:ea typeface="微软雅黑"/>
+              </a:rPr>
               <a:t>三路并行输出故障概率后，由 Attention 模块做样本级自适应加权融合。</a:t>
             </a:r>
           </a:p>
           <a:p>
             <a:r>
+              <a:rPr>
+                <a:latin typeface="Calibri"/>
+                <a:ea typeface="微软雅黑"/>
+              </a:rPr>
               <a:t>做集成的原因很直接——单个模型没办法在 MB1 和 MB2 上同时表现不错，集成可以让结果更稳定。</a:t>
             </a:r>
           </a:p>
           <a:p>
             <a:r>
+              <a:rPr>
+                <a:latin typeface="Calibri"/>
+                <a:ea typeface="微软雅黑"/>
+              </a:rPr>
               <a:t>每个样本的权重是自适应学习的，融合效果优于任意单一模型。</a:t>
             </a:r>
           </a:p>
@@ -1491,26 +1683,46 @@
           <a:lstStyle/>
           <a:p>
             <a:r>
+              <a:rPr>
+                <a:latin typeface="Calibri"/>
+                <a:ea typeface="微软雅黑"/>
+              </a:rPr>
               <a:t>接下来是答辩的具体内容。</a:t>
             </a:r>
           </a:p>
           <a:p>
             <a:r>
+              <a:rPr>
+                <a:latin typeface="Calibri"/>
+                <a:ea typeface="微软雅黑"/>
+              </a:rPr>
               <a:t>报告围绕盘级预测、块级优化、系统落地三个核心问题展开。</a:t>
             </a:r>
           </a:p>
           <a:p>
             <a:r>
+              <a:rPr>
+                <a:latin typeface="Calibri"/>
+                <a:ea typeface="微软雅黑"/>
+              </a:rPr>
               <a:t>第一，盘级故障预测——如何提前 30 天、低误报地检出 SSD 故障？目标是在检出能力持平的前提下显著降低误报率。</a:t>
             </a:r>
           </a:p>
           <a:p>
             <a:r>
+              <a:rPr>
+                <a:latin typeface="Calibri"/>
+                <a:ea typeface="微软雅黑"/>
+              </a:rPr>
               <a:t>第二，块级寿命优化——SSD 内部有很多块，每个块的使用耐久不一样，我们怎样充分利用它们的寿命？通过区分强弱块来提升整体写入量。</a:t>
             </a:r>
           </a:p>
           <a:p>
             <a:r>
+              <a:rPr>
+                <a:latin typeface="Calibri"/>
+                <a:ea typeface="微软雅黑"/>
+              </a:rPr>
               <a:t>第三，原型系统落地——如何把算法打通成完整的预警处置闭环？</a:t>
             </a:r>
           </a:p>
@@ -1581,21 +1793,37 @@
           <a:lstStyle/>
           <a:p>
             <a:r>
+              <a:rPr>
+                <a:latin typeface="Calibri"/>
+                <a:ea typeface="微软雅黑"/>
+              </a:rPr>
               <a:t>这个就是评估的结果。</a:t>
             </a:r>
           </a:p>
           <a:p>
             <a:r>
+              <a:rPr>
+                <a:latin typeface="Calibri"/>
+                <a:ea typeface="微软雅黑"/>
+              </a:rPr>
               <a:t>请看图中七种方法的三轮平均对比。本文方法 F₀.₅ 为 0.919，与最强基线 MVT-RF 并列最优。</a:t>
             </a:r>
           </a:p>
           <a:p>
             <a:r>
+              <a:rPr>
+                <a:latin typeface="Calibri"/>
+                <a:ea typeface="微软雅黑"/>
+              </a:rPr>
               <a:t>但关键差异在误报率——我们的 FPR 是 2.71 乘以 10 的负 5 次方，MVT-RF 是 4.53 乘以 10 的负 5 次方，FPR 下降了 40%。</a:t>
             </a:r>
           </a:p>
           <a:p>
             <a:r>
+              <a:rPr>
+                <a:latin typeface="Calibri"/>
+                <a:ea typeface="微软雅黑"/>
+              </a:rPr>
               <a:t>虽然说 F₀.₅ 分数一样，但我们也是给不同团队提供了一种不同的工程方案——同等检出能力下误报更少。</a:t>
             </a:r>
           </a:p>
@@ -1666,26 +1894,46 @@
           <a:lstStyle/>
           <a:p>
             <a:r>
+              <a:rPr>
+                <a:latin typeface="Calibri"/>
+                <a:ea typeface="微软雅黑"/>
+              </a:rPr>
               <a:t>这里是参数选择和它的变化。</a:t>
             </a:r>
           </a:p>
           <a:p>
             <a:r>
+              <a:rPr>
+                <a:latin typeface="Calibri"/>
+                <a:ea typeface="微软雅黑"/>
+              </a:rPr>
               <a:t>左图是 W-k 超参灵敏度热力图。MB1 峰值落在 W 等于 1、k 等于 2 的组合，MB2 落在 2 和 2。</a:t>
             </a:r>
           </a:p>
           <a:p>
             <a:r>
+              <a:rPr>
+                <a:latin typeface="Calibri"/>
+                <a:ea typeface="微软雅黑"/>
+              </a:rPr>
               <a:t>可以看到 W 大于等于 1 的区域整体维持高位，性能对超参扰动不敏感，说明方法鲁棒性较好。</a:t>
             </a:r>
           </a:p>
           <a:p>
             <a:r>
+              <a:rPr>
+                <a:latin typeface="Calibri"/>
+                <a:ea typeface="微软雅黑"/>
+              </a:rPr>
               <a:t>右图是 TP 预警提前量分布。这里要补充一点：30 天是建模窗口长度，实际主力检出集中在故障前 1 天以内，绝大多数 TP 都在这个范围内。</a:t>
             </a:r>
           </a:p>
           <a:p>
             <a:r>
+              <a:rPr>
+                <a:latin typeface="Calibri"/>
+                <a:ea typeface="微软雅黑"/>
+              </a:rPr>
               <a:t>告警紧贴故障日，误报很低，但留给数据迁移的时间窗口也有限。</a:t>
             </a:r>
           </a:p>
@@ -1756,21 +2004,37 @@
           <a:lstStyle/>
           <a:p>
             <a:r>
+              <a:rPr>
+                <a:latin typeface="Calibri"/>
+                <a:ea typeface="微软雅黑"/>
+              </a:rPr>
               <a:t>然后看一下所有方法的分布，其实都集中在故障前几天。</a:t>
             </a:r>
           </a:p>
           <a:p>
             <a:r>
+              <a:rPr>
+                <a:latin typeface="Calibri"/>
+                <a:ea typeface="微软雅黑"/>
+              </a:rPr>
               <a:t>这张热力图按轮次和方法细分了 TP 检出分布。</a:t>
             </a:r>
           </a:p>
           <a:p>
             <a:r>
+              <a:rPr>
+                <a:latin typeface="Calibri"/>
+                <a:ea typeface="微软雅黑"/>
+              </a:rPr>
               <a:t>检出盘的提前量高度集中在故障前 1 天以内。</a:t>
             </a:r>
           </a:p>
           <a:p>
             <a:r>
+              <a:rPr>
+                <a:latin typeface="Calibri"/>
+                <a:ea typeface="微软雅黑"/>
+              </a:rPr>
               <a:t>其实大部分方法也都集中在靠近故障的几天里面，这恰恰说明——长窗口可能并不需要那么长。</a:t>
             </a:r>
           </a:p>
@@ -1841,31 +2105,55 @@
           <a:lstStyle/>
           <a:p>
             <a:r>
+              <a:rPr>
+                <a:latin typeface="Calibri"/>
+                <a:ea typeface="微软雅黑"/>
+              </a:rPr>
               <a:t>这就是第三章的一个小结。</a:t>
             </a:r>
           </a:p>
           <a:p>
             <a:r>
+              <a:rPr>
+                <a:latin typeface="Calibri"/>
+                <a:ea typeface="微软雅黑"/>
+              </a:rPr>
               <a:t>第三章提出了混合标注加突变特征加异构集成的三层衔接方案。</a:t>
             </a:r>
           </a:p>
           <a:p>
             <a:r>
+              <a:rPr>
+                <a:latin typeface="Calibri"/>
+                <a:ea typeface="微软雅黑"/>
+              </a:rPr>
               <a:t>近端突变标注消除了长窗稀释，B 组 r_k|Δ| 捕捉了 1 到 3 天的突变信号。</a:t>
             </a:r>
           </a:p>
           <a:p>
             <a:r>
+              <a:rPr>
+                <a:latin typeface="Calibri"/>
+                <a:ea typeface="微软雅黑"/>
+              </a:rPr>
               <a:t>MB1 上 F₀.₅ 达到 0.919，与最强基线并列最优，FPR 降低了 40%，Precision 更高——契合运维低误报约束。</a:t>
             </a:r>
           </a:p>
           <a:p>
             <a:r>
+              <a:rPr>
+                <a:latin typeface="Calibri"/>
+                <a:ea typeface="微软雅黑"/>
+              </a:rPr>
               <a:t>消融实验全面验证了标注策略、突变特征和集成模型各自的有效贡献。</a:t>
             </a:r>
           </a:p>
           <a:p>
             <a:r>
+              <a:rPr>
+                <a:latin typeface="Calibri"/>
+                <a:ea typeface="微软雅黑"/>
+              </a:rPr>
               <a:t>需要坦诚说明的是，这套方案仅在阿里云 MLC-SSD 子集上做了验证，跨型号泛化能力还有待考察。</a:t>
             </a:r>
           </a:p>
@@ -1936,6 +2224,10 @@
           <a:lstStyle/>
           <a:p>
             <a:r>
+              <a:rPr>
+                <a:latin typeface="Calibri"/>
+                <a:ea typeface="微软雅黑"/>
+              </a:rPr>
               <a:t>进入第四章，块级寿命优化。</a:t>
             </a:r>
           </a:p>
@@ -2006,21 +2298,37 @@
           <a:lstStyle/>
           <a:p>
             <a:r>
+              <a:rPr>
+                <a:latin typeface="Calibri"/>
+                <a:ea typeface="微软雅黑"/>
+              </a:rPr>
               <a:t>这个实验是用高温 85 度来模拟实际磨损。</a:t>
             </a:r>
           </a:p>
           <a:p>
             <a:r>
+              <a:rPr>
+                <a:latin typeface="Calibri"/>
+                <a:ea typeface="微软雅黑"/>
+              </a:rPr>
               <a:t>第四章用一块 TLC SSD 在 85°C 高温下做加速磨损实验。</a:t>
             </a:r>
           </a:p>
           <a:p>
             <a:r>
+              <a:rPr>
+                <a:latin typeface="Calibri"/>
+                <a:ea typeface="微软雅黑"/>
+              </a:rPr>
               <a:t>我们不可能去采集单块使用三年五年的整体变化过程，而且既磨损又要同时采集时间维度和使用次数维度的错误比特变化，这两个同时采集不可行。所以利用块编码中物理位置相近的块组成逻辑组，假设它们具有相似的磨损特性，构建出 256 个逻辑块。</a:t>
             </a:r>
           </a:p>
           <a:p>
             <a:r>
+              <a:rPr>
+                <a:latin typeface="Calibri"/>
+                <a:ea typeface="微软雅黑"/>
+              </a:rPr>
               <a:t>观察寿命分布，256 个里面 251 个都能写到 1 万次，剩下 5 块不足 1 万。厂商建议的阈值是 8500。</a:t>
             </a:r>
           </a:p>
@@ -2091,36 +2399,64 @@
           <a:lstStyle/>
           <a:p>
             <a:r>
+              <a:rPr>
+                <a:latin typeface="Calibri"/>
+                <a:ea typeface="微软雅黑"/>
+              </a:rPr>
               <a:t>根据这种分布，我们没有去具体预测每个块的使用寿命。</a:t>
             </a:r>
           </a:p>
           <a:p>
             <a:r>
+              <a:rPr>
+                <a:latin typeface="Calibri"/>
+                <a:ea typeface="微软雅黑"/>
+              </a:rPr>
               <a:t>8500 的统一阈值下，强块的剩余写入余量被完全浪费。</a:t>
             </a:r>
           </a:p>
           <a:p>
             <a:r>
+              <a:rPr>
+                <a:latin typeface="Calibri"/>
+                <a:ea typeface="微软雅黑"/>
+              </a:rPr>
               <a:t>我们的策略很直观：其实不需要对每个块精确预测寿命，只需要预测出写不到 1 万的那个块，给它少写一点。</a:t>
             </a:r>
           </a:p>
           <a:p>
             <a:r>
+              <a:rPr>
+                <a:latin typeface="Calibri"/>
+                <a:ea typeface="微软雅黑"/>
+              </a:rPr>
               <a:t>在早期 PE 档位采集 FBC 特征，用三个模型投票分类出强弱块，然后强块 PE 上限提到 10000、弱块降到 7500。</a:t>
             </a:r>
           </a:p>
           <a:p>
             <a:r>
+              <a:rPr>
+                <a:latin typeface="Calibri"/>
+                <a:ea typeface="微软雅黑"/>
+              </a:rPr>
               <a:t>差异化写入策略下，累计写入量提升约 17.08%。这是策略测算值。</a:t>
             </a:r>
           </a:p>
           <a:p>
             <a:r>
+              <a:rPr>
+                <a:latin typeface="Calibri"/>
+                <a:ea typeface="微软雅黑"/>
+              </a:rPr>
               <a:t>消融实验发现特征非常强——测试集 52 个块全部预测正确，251 个强块也全部识别。总写入量提升约 17.08%。</a:t>
             </a:r>
           </a:p>
           <a:p>
             <a:r>
+              <a:rPr>
+                <a:latin typeface="Calibri"/>
+                <a:ea typeface="微软雅黑"/>
+              </a:rPr>
               <a:t>图中负数的含义是：如果把强块误判成弱块，总写入量反而下降。所以关键是弱块不能被漏判。</a:t>
             </a:r>
           </a:p>
@@ -2191,6 +2527,10 @@
           <a:lstStyle/>
           <a:p>
             <a:r>
+              <a:rPr>
+                <a:latin typeface="Calibri"/>
+                <a:ea typeface="微软雅黑"/>
+              </a:rPr>
               <a:t>具体的建模方法和第三章类似，关键结论已在上一页讲过。</a:t>
             </a:r>
           </a:p>
@@ -2261,6 +2601,10 @@
           <a:lstStyle/>
           <a:p>
             <a:r>
+              <a:rPr>
+                <a:latin typeface="Calibri"/>
+                <a:ea typeface="微软雅黑"/>
+              </a:rPr>
               <a:t>消融分析的话，我们从读取次数、磨损采样 PE 和字线范围三个维度做了消融，关键结论是——单次读取即可保留全部增益。详细数据请看图。</a:t>
             </a:r>
           </a:p>
@@ -2331,16 +2675,28 @@
           <a:lstStyle/>
           <a:p>
             <a:r>
+              <a:rPr>
+                <a:latin typeface="Calibri"/>
+                <a:ea typeface="微软雅黑"/>
+              </a:rPr>
               <a:t>这就是第四章的所有内容。</a:t>
             </a:r>
           </a:p>
           <a:p>
             <a:r>
+              <a:rPr>
+                <a:latin typeface="Calibri"/>
+                <a:ea typeface="微软雅黑"/>
+              </a:rPr>
               <a:t>第四章提出了 FBC 强/弱块二分类加差异化 PE 管控方案，约 17% 的累计写入量提升。</a:t>
             </a:r>
           </a:p>
           <a:p>
             <a:r>
+              <a:rPr>
+                <a:latin typeface="Calibri"/>
+                <a:ea typeface="微软雅黑"/>
+              </a:rPr>
               <a:t>轻量化消融验证了部署可行性。局限是 256 个逻辑块样本偏小。</a:t>
             </a:r>
           </a:p>
@@ -2411,26 +2767,46 @@
           <a:lstStyle/>
           <a:p>
             <a:r>
+              <a:rPr>
+                <a:latin typeface="Calibri"/>
+                <a:ea typeface="微软雅黑"/>
+              </a:rPr>
               <a:t>首先介绍一下背景。</a:t>
             </a:r>
           </a:p>
           <a:p>
             <a:r>
+              <a:rPr>
+                <a:latin typeface="Calibri"/>
+                <a:ea typeface="微软雅黑"/>
+              </a:rPr>
               <a:t>请看右侧的全球数据存储规模增长趋势图。截至 2024 年，全球数据中心已经突破 11800 座，到 2030 年数据量预计超过 1000 ZB。</a:t>
             </a:r>
           </a:p>
           <a:p>
             <a:r>
+              <a:rPr>
+                <a:latin typeface="Calibri"/>
+                <a:ea typeface="微软雅黑"/>
+              </a:rPr>
               <a:t>SSD 作为数据中心的重要存储设备，承担着越来越大的份额，但年化故障率大约 2.5%。看起来不高，可乘以万盘规模的基数，每次故障都可能造成业务中断和数据不可逆丢失。</a:t>
             </a:r>
           </a:p>
           <a:p>
             <a:r>
+              <a:rPr>
+                <a:latin typeface="Calibri"/>
+                <a:ea typeface="微软雅黑"/>
+              </a:rPr>
               <a:t>左下角就是一个真实案例——唐山银行因为核心存储故障，紧急采购了华为 NAS 设备做替换。虽然数据可以恢复，但业务中断本身就是损失。</a:t>
             </a:r>
           </a:p>
           <a:p>
             <a:r>
+              <a:rPr>
+                <a:latin typeface="Calibri"/>
+                <a:ea typeface="微软雅黑"/>
+              </a:rPr>
               <a:t>被动容灾消耗很大，主动预警才是降本的关键。</a:t>
             </a:r>
           </a:p>
@@ -2501,6 +2877,10 @@
           <a:lstStyle/>
           <a:p>
             <a:r>
+              <a:rPr>
+                <a:latin typeface="Calibri"/>
+                <a:ea typeface="微软雅黑"/>
+              </a:rPr>
               <a:t>进入第五章，原型系统落地。</a:t>
             </a:r>
           </a:p>
@@ -2571,21 +2951,37 @@
           <a:lstStyle/>
           <a:p>
             <a:r>
+              <a:rPr>
+                <a:latin typeface="Calibri"/>
+                <a:ea typeface="微软雅黑"/>
+              </a:rPr>
               <a:t>然后就是第五章。</a:t>
             </a:r>
           </a:p>
           <a:p>
             <a:r>
+              <a:rPr>
+                <a:latin typeface="Calibri"/>
+                <a:ea typeface="微软雅黑"/>
+              </a:rPr>
               <a:t>第五章做了一个智慧 SSD 运维原型软件。</a:t>
             </a:r>
           </a:p>
           <a:p>
             <a:r>
+              <a:rPr>
+                <a:latin typeface="Calibri"/>
+                <a:ea typeface="微软雅黑"/>
+              </a:rPr>
               <a:t>左图是四层架构——数据采集、算法服务、业务逻辑、前端展示。</a:t>
             </a:r>
           </a:p>
           <a:p>
             <a:r>
+              <a:rPr>
+                <a:latin typeface="Calibri"/>
+                <a:ea typeface="微软雅黑"/>
+              </a:rPr>
               <a:t>右图是用例分析——预警的生成、确认、处置、忽略全流程。</a:t>
             </a:r>
           </a:p>
@@ -2656,6 +3052,10 @@
           <a:lstStyle/>
           <a:p>
             <a:r>
+              <a:rPr>
+                <a:latin typeface="Calibri"/>
+                <a:ea typeface="微软雅黑"/>
+              </a:rPr>
               <a:t>右边的话就是运维同学处理的一个时序。预警状态从 pending 到 confirmed 或 ignored，终态不可逆。前端 Vue3、后端 Java 加 Python，REST 接口通信。完整闭环已经跑通。</a:t>
             </a:r>
           </a:p>
@@ -2726,51 +3126,91 @@
           <a:lstStyle/>
           <a:p>
             <a:r>
+              <a:rPr>
+                <a:latin typeface="Calibri"/>
+                <a:ea typeface="微软雅黑"/>
+              </a:rPr>
               <a:t>整个报告差不多结束了，做一个总结。</a:t>
             </a:r>
           </a:p>
           <a:p>
             <a:r>
+              <a:rPr>
+                <a:latin typeface="Calibri"/>
+                <a:ea typeface="微软雅黑"/>
+              </a:rPr>
               <a:t>本文的核心贡献有三项。</a:t>
             </a:r>
           </a:p>
           <a:p>
             <a:r>
+              <a:rPr>
+                <a:latin typeface="Calibri"/>
+                <a:ea typeface="微软雅黑"/>
+              </a:rPr>
               <a:t>第一，近端突变标注加短期突变特征。混合标注消除了长窗稀释，B 组 r_k|Δ| 捕捉了 1 到 3 天的突变信号。</a:t>
             </a:r>
           </a:p>
           <a:p>
             <a:r>
+              <a:rPr>
+                <a:latin typeface="Calibri"/>
+                <a:ea typeface="微软雅黑"/>
+              </a:rPr>
               <a:t>F₀.₅ 达到 0.919，与最强基线并列最优。</a:t>
             </a:r>
           </a:p>
           <a:p>
             <a:r>
+              <a:rPr>
+                <a:latin typeface="Calibri"/>
+                <a:ea typeface="微软雅黑"/>
+              </a:rPr>
               <a:t>第二，异构集成预测。做集成的原因是单个模型只在 MB1 上表现好、在 MB2 上就不行了，集成让它更稳定。</a:t>
             </a:r>
           </a:p>
           <a:p>
             <a:r>
+              <a:rPr>
+                <a:latin typeface="Calibri"/>
+                <a:ea typeface="微软雅黑"/>
+              </a:rPr>
               <a:t>Attention 融合后 F₀.₅ 达到 0.919 与最强基线并列最优，FPR 降低 40%。</a:t>
             </a:r>
           </a:p>
           <a:p>
             <a:r>
+              <a:rPr>
+                <a:latin typeface="Calibri"/>
+                <a:ea typeface="微软雅黑"/>
+              </a:rPr>
               <a:t>大规模部署下虚假告警显著减少。</a:t>
             </a:r>
           </a:p>
           <a:p>
             <a:r>
+              <a:rPr>
+                <a:latin typeface="Calibri"/>
+                <a:ea typeface="微软雅黑"/>
+              </a:rPr>
               <a:t>第三，差异化 PE 写入量提升约 17%——这是策略测算值。强/弱块分类后差异化擦写上限，DefaultRead 单次读取即可保留增益。</a:t>
             </a:r>
           </a:p>
           <a:p>
             <a:r>
+              <a:rPr>
+                <a:latin typeface="Calibri"/>
+                <a:ea typeface="微软雅黑"/>
+              </a:rPr>
               <a:t>测试集为小样本点估计，统计可靠性有限。</a:t>
             </a:r>
           </a:p>
           <a:p>
             <a:r>
+              <a:rPr>
+                <a:latin typeface="Calibri"/>
+                <a:ea typeface="微软雅黑"/>
+              </a:rPr>
               <a:t>一句话概括：低误报约束贯穿两大任务，同等检出能力下误报更少，同等硬件条件下资源利用更充分。</a:t>
             </a:r>
           </a:p>
@@ -2841,46 +3281,82 @@
           <a:lstStyle/>
           <a:p>
             <a:r>
+              <a:rPr>
+                <a:latin typeface="Calibri"/>
+                <a:ea typeface="微软雅黑"/>
+              </a:rPr>
               <a:t>当然也有明确的局限，坦率地跟各位汇报。</a:t>
             </a:r>
           </a:p>
           <a:p>
             <a:r>
+              <a:rPr>
+                <a:latin typeface="Calibri"/>
+                <a:ea typeface="微软雅黑"/>
+              </a:rPr>
               <a:t>三个主要局限需要正视。</a:t>
             </a:r>
           </a:p>
           <a:p>
             <a:r>
+              <a:rPr>
+                <a:latin typeface="Calibri"/>
+                <a:ea typeface="微软雅黑"/>
+              </a:rPr>
               <a:t>第一，MB2 上 TPR 仅约 0.19，弱信号故障盘仍难检出——这是低误报约束下的固有代价。</a:t>
             </a:r>
           </a:p>
           <a:p>
             <a:r>
+              <a:rPr>
+                <a:latin typeface="Calibri"/>
+                <a:ea typeface="微软雅黑"/>
+              </a:rPr>
               <a:t>第二，256 个逻辑块样本偏小，块级结论仍需扩大验证。</a:t>
             </a:r>
           </a:p>
           <a:p>
             <a:r>
+              <a:rPr>
+                <a:latin typeface="Calibri"/>
+                <a:ea typeface="微软雅黑"/>
+              </a:rPr>
               <a:t>第三，三轮实验结果之间变化还不小，不是非常稳定，存在概念漂移的问题。</a:t>
             </a:r>
           </a:p>
           <a:p>
             <a:r>
+              <a:rPr>
+                <a:latin typeface="Calibri"/>
+                <a:ea typeface="微软雅黑"/>
+              </a:rPr>
               <a:t>未来有四条路可以探索：</a:t>
             </a:r>
           </a:p>
           <a:p>
             <a:r>
+              <a:rPr>
+                <a:latin typeface="Calibri"/>
+                <a:ea typeface="微软雅黑"/>
+              </a:rPr>
               <a:t>跨厂商跨型号泛化验证，包括 QLC、PLC 新型闪存；</a:t>
             </a:r>
           </a:p>
           <a:p>
             <a:r>
+              <a:rPr>
+                <a:latin typeface="Calibri"/>
+                <a:ea typeface="微软雅黑"/>
+              </a:rPr>
               <a:t>在线增量学习应对概念漂移，让模型持续迭代；</a:t>
             </a:r>
           </a:p>
           <a:p>
             <a:r>
+              <a:rPr>
+                <a:latin typeface="Calibri"/>
+                <a:ea typeface="微软雅黑"/>
+              </a:rPr>
               <a:t>以及结合特征重要性做故障归因，给运维同学提供"为什么会报这个盘故障"的参考。</a:t>
             </a:r>
           </a:p>
@@ -2951,6 +3427,10 @@
           <a:lstStyle/>
           <a:p>
             <a:r>
+              <a:rPr>
+                <a:latin typeface="Calibri"/>
+                <a:ea typeface="微软雅黑"/>
+              </a:rPr>
               <a:t>所有的内容到这里就结束了。感谢各位专家的耐心倾听，敬请批评指正。谢谢。</a:t>
             </a:r>
           </a:p>
@@ -3021,26 +3501,46 @@
           <a:lstStyle/>
           <a:p>
             <a:r>
+              <a:rPr>
+                <a:latin typeface="Calibri"/>
+                <a:ea typeface="微软雅黑"/>
+              </a:rPr>
               <a:t>现在就是目前的一些工作。</a:t>
             </a:r>
           </a:p>
           <a:p>
             <a:r>
+              <a:rPr>
+                <a:latin typeface="Calibri"/>
+                <a:ea typeface="微软雅黑"/>
+              </a:rPr>
               <a:t>盘级故障预测这条线，右边列了代表性工作。</a:t>
             </a:r>
           </a:p>
           <a:p>
             <a:r>
+              <a:rPr>
+                <a:latin typeface="Calibri"/>
+                <a:ea typeface="微软雅黑"/>
+              </a:rPr>
               <a:t>简单说，现有方法主要有两类：树模型集成和深度时序网络，已经在阿里云、腾讯等公开数据集上做了验证，但各自都有局限。</a:t>
             </a:r>
           </a:p>
           <a:p>
             <a:r>
+              <a:rPr>
+                <a:latin typeface="Calibri"/>
+                <a:ea typeface="微软雅黑"/>
+              </a:rPr>
               <a:t>块级寿命管理这条线，目前还很少有人做数据驱动的预测。</a:t>
             </a:r>
           </a:p>
           <a:p>
             <a:r>
+              <a:rPr>
+                <a:latin typeface="Calibri"/>
+                <a:ea typeface="微软雅黑"/>
+              </a:rPr>
               <a:t>传统方案就是厂商给一个统一的 PE 阈值，超过这个值就认为块不可用了。这种做法简单，但不区分块间差异。</a:t>
             </a:r>
           </a:p>
@@ -3111,31 +3611,55 @@
           <a:lstStyle/>
           <a:p>
             <a:r>
+              <a:rPr>
+                <a:latin typeface="Calibri"/>
+                <a:ea typeface="微软雅黑"/>
+              </a:rPr>
               <a:t>现在研究的不足，就是我们尝试解决的问题。</a:t>
             </a:r>
           </a:p>
           <a:p>
             <a:r>
+              <a:rPr>
+                <a:latin typeface="Calibri"/>
+                <a:ea typeface="微软雅黑"/>
+              </a:rPr>
               <a:t>盘级预测的不足集中在三点。</a:t>
             </a:r>
           </a:p>
           <a:p>
             <a:r>
+              <a:rPr>
+                <a:latin typeface="Calibri"/>
+                <a:ea typeface="微软雅黑"/>
+              </a:rPr>
               <a:t>第一，现有方法动辄使用数百天甚至 256 天的长窗口特征，稀释了近端突变信号，标签噪声混入了静默段。</a:t>
             </a:r>
           </a:p>
           <a:p>
             <a:r>
+              <a:rPr>
+                <a:latin typeface="Calibri"/>
+                <a:ea typeface="微软雅黑"/>
+              </a:rPr>
               <a:t>第二，即使最强基线 MVT-RF 达到了 F₀.₅=0.919，FPR 仍有 4.53 乘以 10 的负 5 次方。</a:t>
             </a:r>
           </a:p>
           <a:p>
             <a:r>
+              <a:rPr>
+                <a:latin typeface="Calibri"/>
+                <a:ea typeface="微软雅黑"/>
+              </a:rPr>
               <a:t>第三，数据中心盘多了以后虚假告警是大量的，人工根本处理不过来。一般就会配规则自动下线，机器下线了人工不会再复核。所以每一次误报就是一次真实的换盘，都是工时开销。FPR 每降一个 10 的负 5 次方，就减少约 1 次每万次的假阳性。</a:t>
             </a:r>
           </a:p>
           <a:p>
             <a:r>
+              <a:rPr>
+                <a:latin typeface="Calibri"/>
+                <a:ea typeface="微软雅黑"/>
+              </a:rPr>
               <a:t>块级寿命管理的不足主要是：统一 PE 阈值让弱块过早淘汰、强块耐久余量被浪费，而且缺乏从预测到调度再到验证的完整闭环。</a:t>
             </a:r>
           </a:p>
@@ -3206,26 +3730,46 @@
           <a:lstStyle/>
           <a:p>
             <a:r>
+              <a:rPr>
+                <a:latin typeface="Calibri"/>
+                <a:ea typeface="微软雅黑"/>
+              </a:rPr>
               <a:t>针对这些不足，本文确立了三条目标：</a:t>
             </a:r>
           </a:p>
           <a:p>
             <a:r>
+              <a:rPr>
+                <a:latin typeface="Calibri"/>
+                <a:ea typeface="微软雅黑"/>
+              </a:rPr>
               <a:t>第一，在 30 天预测窗口内实现低误报预警，FPR 显著低于最强基线。</a:t>
             </a:r>
           </a:p>
           <a:p>
             <a:r>
+              <a:rPr>
+                <a:latin typeface="Calibri"/>
+                <a:ea typeface="微软雅黑"/>
+              </a:rPr>
               <a:t>第二，差异化 PE 提升整体写入量。</a:t>
             </a:r>
           </a:p>
           <a:p>
             <a:r>
+              <a:rPr>
+                <a:latin typeface="Calibri"/>
+                <a:ea typeface="微软雅黑"/>
+              </a:rPr>
               <a:t>第三，原型软件打通全闭环。</a:t>
             </a:r>
           </a:p>
           <a:p>
             <a:r>
+              <a:rPr>
+                <a:latin typeface="Calibri"/>
+                <a:ea typeface="微软雅黑"/>
+              </a:rPr>
               <a:t>贯穿全文的核心主线是——低误报约束同时贯穿盘级 FPR 控制和块级误判率控制。</a:t>
             </a:r>
           </a:p>
@@ -3296,31 +3840,55 @@
           <a:lstStyle/>
           <a:p>
             <a:r>
+              <a:rPr>
+                <a:latin typeface="Calibri"/>
+                <a:ea typeface="微软雅黑"/>
+              </a:rPr>
               <a:t>这里是整体框架。</a:t>
             </a:r>
           </a:p>
           <a:p>
             <a:r>
+              <a:rPr>
+                <a:latin typeface="Calibri"/>
+                <a:ea typeface="微软雅黑"/>
+              </a:rPr>
               <a:t>请看图中三段式架构。</a:t>
             </a:r>
           </a:p>
           <a:p>
             <a:r>
+              <a:rPr>
+                <a:latin typeface="Calibri"/>
+                <a:ea typeface="微软雅黑"/>
+              </a:rPr>
               <a:t>第三章做盘级预测，核心是混合标注加突变特征配合异构集成。</a:t>
             </a:r>
           </a:p>
           <a:p>
             <a:r>
+              <a:rPr>
+                <a:latin typeface="Calibri"/>
+                <a:ea typeface="微软雅黑"/>
+              </a:rPr>
               <a:t>第四章下沉到块级，用早期 FBC 特征做集成分类后实施差异化 PE。</a:t>
             </a:r>
           </a:p>
           <a:p>
             <a:r>
+              <a:rPr>
+                <a:latin typeface="Calibri"/>
+                <a:ea typeface="微软雅黑"/>
+              </a:rPr>
               <a:t>第五章把算法集成进运维软件，形成完整的数据驱动闭环。</a:t>
             </a:r>
           </a:p>
           <a:p>
             <a:r>
+              <a:rPr>
+                <a:latin typeface="Calibri"/>
+                <a:ea typeface="微软雅黑"/>
+              </a:rPr>
               <a:t>三章层层递进，从预测到优化到落地。</a:t>
             </a:r>
           </a:p>
@@ -3391,6 +3959,10 @@
           <a:lstStyle/>
           <a:p>
             <a:r>
+              <a:rPr>
+                <a:latin typeface="Calibri"/>
+                <a:ea typeface="微软雅黑"/>
+              </a:rPr>
               <a:t>下面进入技术基础部分。</a:t>
             </a:r>
           </a:p>
@@ -3461,51 +4033,91 @@
           <a:lstStyle/>
           <a:p>
             <a:r>
+              <a:rPr>
+                <a:latin typeface="Calibri"/>
+                <a:ea typeface="微软雅黑"/>
+              </a:rPr>
               <a:t>先来讲一下涉及到的技术基础，首先为什么会发生故障。</a:t>
             </a:r>
           </a:p>
           <a:p>
             <a:r>
+              <a:rPr>
+                <a:latin typeface="Calibri"/>
+                <a:ea typeface="微软雅黑"/>
+              </a:rPr>
               <a:t>先做一个直观的类比——SSD 存数据就像用铅笔在纸上写字，写多了擦、擦了写，纸面会越来越粗糙，最终写不上字。</a:t>
             </a:r>
           </a:p>
           <a:p>
             <a:r>
+              <a:rPr>
+                <a:latin typeface="Calibri"/>
+                <a:ea typeface="微软雅黑"/>
+              </a:rPr>
               <a:t>物理上，这个"写字"是怎么实现的呢？</a:t>
             </a:r>
           </a:p>
           <a:p>
             <a:r>
+              <a:rPr>
+                <a:latin typeface="Calibri"/>
+                <a:ea typeface="微软雅黑"/>
+              </a:rPr>
               <a:t>请看右图。闪存内部有一个很小的氧化层结构，氧化层之间像一个小仓库，用来困住电子。</a:t>
             </a:r>
           </a:p>
           <a:p>
             <a:r>
+              <a:rPr>
+                <a:latin typeface="Calibri"/>
+                <a:ea typeface="微软雅黑"/>
+              </a:rPr>
               <a:t>有电子的时候电压高，没电子的时候电压低——我们就用这两种状态来编码 0 和 1。</a:t>
             </a:r>
           </a:p>
           <a:p>
             <a:r>
+              <a:rPr>
+                <a:latin typeface="Calibri"/>
+                <a:ea typeface="微软雅黑"/>
+              </a:rPr>
               <a:t>如果说电压分布有两个峰，那就是两种状态、存 1 个比特就是 SLC；四个峰就是四种状态、两个比特就是 MLC；八个峰就是八种状态、三个比特就是 TLC。</a:t>
             </a:r>
           </a:p>
           <a:p>
             <a:r>
+              <a:rPr>
+                <a:latin typeface="Calibri"/>
+                <a:ea typeface="微软雅黑"/>
+              </a:rPr>
               <a:t>但问题来了：存得越多，电压状态就越挤，对偏移也就越敏感。</a:t>
             </a:r>
           </a:p>
           <a:p>
             <a:r>
+              <a:rPr>
+                <a:latin typeface="Calibri"/>
+                <a:ea typeface="微软雅黑"/>
+              </a:rPr>
               <a:t>随着使用，氧化隧道层会磨损老化，对电子的捕捉能力下降，电压就会泄露、发生偏移。原来读到的一个电压状态可能就不准了——原来读 100 可能实际上变成了 101，因此就产生了错误比特（FBC）。</a:t>
             </a:r>
           </a:p>
           <a:p>
             <a:r>
+              <a:rPr>
+                <a:latin typeface="Calibri"/>
+                <a:ea typeface="微软雅黑"/>
+              </a:rPr>
               <a:t>TLC 状态更密，同样的偏移量更容易读错。</a:t>
             </a:r>
           </a:p>
           <a:p>
             <a:r>
+              <a:rPr>
+                <a:latin typeface="Calibri"/>
+                <a:ea typeface="微软雅黑"/>
+              </a:rPr>
               <a:t>SSD 本身有纠错机制，但如果一个块的错误比特超过了纠错能力的上限，这个块就彻底报废了。</a:t>
             </a:r>
           </a:p>
@@ -6581,8 +7193,8 @@
                 <a:solidFill>
                   <a:srgbClr val="FFFFFF"/>
                 </a:solidFill>
-                <a:latin typeface="PingFang SC"/>
-                <a:ea typeface="PingFang SC"/>
+                <a:latin typeface="Calibri"/>
+                <a:ea typeface="微软雅黑"/>
               </a:rPr>
               <a:t>浙江大学硕士学位论文答辩</a:t>
             </a:r>
@@ -6615,8 +7227,8 @@
                 <a:solidFill>
                   <a:srgbClr val="0A1A3E"/>
                 </a:solidFill>
-                <a:latin typeface="PingFang SC"/>
-                <a:ea typeface="PingFang SC"/>
+                <a:latin typeface="Calibri"/>
+                <a:ea typeface="微软雅黑"/>
               </a:rPr>
               <a:t>基于机器学习的固态硬盘</a:t>
             </a:r>
@@ -6649,8 +7261,8 @@
                 <a:solidFill>
                   <a:srgbClr val="0A1A3E"/>
                 </a:solidFill>
-                <a:latin typeface="PingFang SC"/>
-                <a:ea typeface="PingFang SC"/>
+                <a:latin typeface="Calibri"/>
+                <a:ea typeface="微软雅黑"/>
               </a:rPr>
               <a:t>故障预测与寿命提升方法研究</a:t>
             </a:r>
@@ -6683,8 +7295,8 @@
                 <a:solidFill>
                   <a:srgbClr val="333333"/>
                 </a:solidFill>
-                <a:latin typeface="PingFang SC"/>
-                <a:ea typeface="PingFang SC"/>
+                <a:latin typeface="Calibri"/>
+                <a:ea typeface="微软雅黑"/>
               </a:rPr>
               <a:t>答辩人：龙泳江</a:t>
             </a:r>
@@ -6717,8 +7329,8 @@
                 <a:solidFill>
                   <a:srgbClr val="333333"/>
                 </a:solidFill>
-                <a:latin typeface="PingFang SC"/>
-                <a:ea typeface="PingFang SC"/>
+                <a:latin typeface="Calibri"/>
+                <a:ea typeface="微软雅黑"/>
               </a:rPr>
               <a:t>导师：苏中根教授</a:t>
             </a:r>
@@ -6751,8 +7363,8 @@
                 <a:solidFill>
                   <a:srgbClr val="333333"/>
                 </a:solidFill>
-                <a:latin typeface="PingFang SC"/>
-                <a:ea typeface="PingFang SC"/>
+                <a:latin typeface="Calibri"/>
+                <a:ea typeface="微软雅黑"/>
               </a:rPr>
               <a:t>学院：工程师学院</a:t>
             </a:r>
@@ -6785,8 +7397,8 @@
                 <a:solidFill>
                   <a:srgbClr val="333333"/>
                 </a:solidFill>
-                <a:latin typeface="PingFang SC"/>
-                <a:ea typeface="PingFang SC"/>
+                <a:latin typeface="Calibri"/>
+                <a:ea typeface="微软雅黑"/>
               </a:rPr>
               <a:t>专业：数据科学与工程 · 2023 级</a:t>
             </a:r>
@@ -6947,8 +7559,8 @@
                 <a:solidFill>
                   <a:srgbClr val="0A1A3E"/>
                 </a:solidFill>
-                <a:latin typeface="PingFang SC"/>
-                <a:ea typeface="PingFang SC"/>
+                <a:latin typeface="Calibri"/>
+                <a:ea typeface="微软雅黑"/>
               </a:rPr>
               <a:t>SMART 提供通用监测字段，但缺失芯片级 FBC</a:t>
             </a:r>
@@ -7048,8 +7660,8 @@
                 <a:solidFill>
                   <a:srgbClr val="999999"/>
                 </a:solidFill>
-                <a:latin typeface="PingFang SC"/>
-                <a:ea typeface="PingFang SC"/>
+                <a:latin typeface="Calibri"/>
+                <a:ea typeface="微软雅黑"/>
               </a:rPr>
               <a:t>CrystalDiskInfo SMART 健康日志</a:t>
             </a:r>
@@ -7086,8 +7698,8 @@
                 <a:solidFill>
                   <a:srgbClr val="0A1A3E"/>
                 </a:solidFill>
-                <a:latin typeface="PingFang SC"/>
-                <a:ea typeface="PingFang SC"/>
+                <a:latin typeface="Calibri"/>
+                <a:ea typeface="微软雅黑"/>
               </a:rPr>
               <a:t>分析要点</a:t>
             </a:r>
@@ -7103,8 +7715,8 @@
                 <a:solidFill>
                   <a:srgbClr val="333333"/>
                 </a:solidFill>
-                <a:latin typeface="PingFang SC"/>
-                <a:ea typeface="PingFang SC"/>
+                <a:latin typeface="Calibri"/>
+                <a:ea typeface="微软雅黑"/>
               </a:rPr>
               <a:t>●  </a:t>
             </a:r>
@@ -7113,8 +7725,8 @@
                 <a:solidFill>
                   <a:srgbClr val="333333"/>
                 </a:solidFill>
-                <a:latin typeface="PingFang SC"/>
-                <a:ea typeface="PingFang SC"/>
+                <a:latin typeface="Calibri"/>
+                <a:ea typeface="微软雅黑"/>
               </a:rPr>
               <a:t>NVMe 健康日志仅 15 项通用字段，ID 01–0F 固定编号</a:t>
             </a:r>
@@ -7130,8 +7742,8 @@
                 <a:solidFill>
                   <a:srgbClr val="333333"/>
                 </a:solidFill>
-                <a:latin typeface="PingFang SC"/>
-                <a:ea typeface="PingFang SC"/>
+                <a:latin typeface="Calibri"/>
+                <a:ea typeface="微软雅黑"/>
               </a:rPr>
               <a:t>●  </a:t>
             </a:r>
@@ -7140,8 +7752,8 @@
                 <a:solidFill>
                   <a:srgbClr val="333333"/>
                 </a:solidFill>
-                <a:latin typeface="PingFang SC"/>
-                <a:ea typeface="PingFang SC"/>
+                <a:latin typeface="Calibri"/>
+                <a:ea typeface="微软雅黑"/>
               </a:rPr>
               <a:t>运行状态：综合温度 41℃、通电时间、启动-关闭循环次数</a:t>
             </a:r>
@@ -7157,8 +7769,8 @@
                 <a:solidFill>
                   <a:srgbClr val="333333"/>
                 </a:solidFill>
-                <a:latin typeface="PingFang SC"/>
-                <a:ea typeface="PingFang SC"/>
+                <a:latin typeface="Calibri"/>
+                <a:ea typeface="微软雅黑"/>
               </a:rPr>
               <a:t>●  </a:t>
             </a:r>
@@ -7167,8 +7779,8 @@
                 <a:solidFill>
                   <a:srgbClr val="333333"/>
                 </a:solidFill>
-                <a:latin typeface="PingFang SC"/>
-                <a:ea typeface="PingFang SC"/>
+                <a:latin typeface="Calibri"/>
+                <a:ea typeface="微软雅黑"/>
               </a:rPr>
               <a:t>磨损相关：已用寿命百分比、可用备用空间及其阈值</a:t>
             </a:r>
@@ -7184,8 +7796,8 @@
                 <a:solidFill>
                   <a:srgbClr val="333333"/>
                 </a:solidFill>
-                <a:latin typeface="PingFang SC"/>
-                <a:ea typeface="PingFang SC"/>
+                <a:latin typeface="Calibri"/>
+                <a:ea typeface="微软雅黑"/>
               </a:rPr>
               <a:t>●  </a:t>
             </a:r>
@@ -7194,8 +7806,8 @@
                 <a:solidFill>
                   <a:srgbClr val="333333"/>
                 </a:solidFill>
-                <a:latin typeface="PingFang SC"/>
-                <a:ea typeface="PingFang SC"/>
+                <a:latin typeface="Calibri"/>
+                <a:ea typeface="微软雅黑"/>
               </a:rPr>
               <a:t>读写量记为单元计数，原始值为十六进制需按规范解码</a:t>
             </a:r>
@@ -7211,8 +7823,8 @@
                 <a:solidFill>
                   <a:srgbClr val="333333"/>
                 </a:solidFill>
-                <a:latin typeface="PingFang SC"/>
-                <a:ea typeface="PingFang SC"/>
+                <a:latin typeface="Calibri"/>
+                <a:ea typeface="微软雅黑"/>
               </a:rPr>
               <a:t>●  </a:t>
             </a:r>
@@ -7221,8 +7833,8 @@
                 <a:solidFill>
                   <a:srgbClr val="333333"/>
                 </a:solidFill>
-                <a:latin typeface="PingFang SC"/>
-                <a:ea typeface="PingFang SC"/>
+                <a:latin typeface="Calibri"/>
+                <a:ea typeface="微软雅黑"/>
               </a:rPr>
               <a:t>媒体与数据完整性错误计数为全盘聚合值，定位不到块级 FBC</a:t>
             </a:r>
@@ -7255,8 +7867,8 @@
                 <a:solidFill>
                   <a:srgbClr val="999999"/>
                 </a:solidFill>
-                <a:latin typeface="PingFang SC"/>
-                <a:ea typeface="PingFang SC"/>
+                <a:latin typeface="Calibri"/>
+                <a:ea typeface="微软雅黑"/>
               </a:rPr>
               <a:t>CrystalDiskInfo 8.13 读取某 1 TB NVMe SSD 的 SMART 健康日志</a:t>
             </a:r>
@@ -7289,8 +7901,8 @@
                 <a:solidFill>
                   <a:srgbClr val="999999"/>
                 </a:solidFill>
-                <a:latin typeface="PingFang SC"/>
-                <a:ea typeface="PingFang SC"/>
+                <a:latin typeface="Calibri"/>
+                <a:ea typeface="微软雅黑"/>
               </a:rPr>
               <a:t>10</a:t>
             </a:r>
@@ -7384,8 +7996,8 @@
                 <a:solidFill>
                   <a:srgbClr val="0A1A3E"/>
                 </a:solidFill>
-                <a:latin typeface="PingFang SC"/>
-                <a:ea typeface="PingFang SC"/>
+                <a:latin typeface="Calibri"/>
+                <a:ea typeface="微软雅黑"/>
               </a:rPr>
               <a:t>Bagging 降方差、Boosting 降偏差，异构集成互补</a:t>
             </a:r>
@@ -7485,8 +8097,8 @@
                 <a:solidFill>
                   <a:srgbClr val="999999"/>
                 </a:solidFill>
-                <a:latin typeface="PingFang SC"/>
-                <a:ea typeface="PingFang SC"/>
+                <a:latin typeface="Calibri"/>
+                <a:ea typeface="微软雅黑"/>
               </a:rPr>
               <a:t>Bagging 并行集成示意图</a:t>
             </a:r>
@@ -7523,8 +8135,8 @@
                 <a:solidFill>
                   <a:srgbClr val="0A1A3E"/>
                 </a:solidFill>
-                <a:latin typeface="PingFang SC"/>
-                <a:ea typeface="PingFang SC"/>
+                <a:latin typeface="Calibri"/>
+                <a:ea typeface="微软雅黑"/>
               </a:rPr>
               <a:t>随机森林（Bagging）</a:t>
             </a:r>
@@ -7540,8 +8152,8 @@
                 <a:solidFill>
                   <a:srgbClr val="333333"/>
                 </a:solidFill>
-                <a:latin typeface="PingFang SC"/>
-                <a:ea typeface="PingFang SC"/>
+                <a:latin typeface="Calibri"/>
+                <a:ea typeface="微软雅黑"/>
               </a:rPr>
               <a:t>●  </a:t>
             </a:r>
@@ -7550,8 +8162,8 @@
                 <a:solidFill>
                   <a:srgbClr val="333333"/>
                 </a:solidFill>
-                <a:latin typeface="PingFang SC"/>
-                <a:ea typeface="PingFang SC"/>
+                <a:latin typeface="Calibri"/>
+                <a:ea typeface="微软雅黑"/>
               </a:rPr>
               <a:t>自助采样叠加特征随机，多树平均降低方差</a:t>
             </a:r>
@@ -7567,8 +8179,8 @@
                 <a:solidFill>
                   <a:srgbClr val="333333"/>
                 </a:solidFill>
-                <a:latin typeface="PingFang SC"/>
-                <a:ea typeface="PingFang SC"/>
+                <a:latin typeface="Calibri"/>
+                <a:ea typeface="微软雅黑"/>
               </a:rPr>
               <a:t>●  </a:t>
             </a:r>
@@ -7577,8 +8189,8 @@
                 <a:solidFill>
                   <a:srgbClr val="333333"/>
                 </a:solidFill>
-                <a:latin typeface="PingFang SC"/>
-                <a:ea typeface="PingFang SC"/>
+                <a:latin typeface="Calibri"/>
+                <a:ea typeface="微软雅黑"/>
               </a:rPr>
               <a:t>对噪声与异常样本鲁棒</a:t>
             </a:r>
@@ -7635,8 +8247,8 @@
                 <a:solidFill>
                   <a:srgbClr val="999999"/>
                 </a:solidFill>
-                <a:latin typeface="PingFang SC"/>
-                <a:ea typeface="PingFang SC"/>
+                <a:latin typeface="Calibri"/>
+                <a:ea typeface="微软雅黑"/>
               </a:rPr>
               <a:t>Boosting 串行集成示意图</a:t>
             </a:r>
@@ -7673,8 +8285,8 @@
                 <a:solidFill>
                   <a:srgbClr val="0A1A3E"/>
                 </a:solidFill>
-                <a:latin typeface="PingFang SC"/>
-                <a:ea typeface="PingFang SC"/>
+                <a:latin typeface="Calibri"/>
+                <a:ea typeface="微软雅黑"/>
               </a:rPr>
               <a:t>GBDT / XGBoost / LightGBM（Boosting）</a:t>
             </a:r>
@@ -7690,8 +8302,8 @@
                 <a:solidFill>
                   <a:srgbClr val="333333"/>
                 </a:solidFill>
-                <a:latin typeface="PingFang SC"/>
-                <a:ea typeface="PingFang SC"/>
+                <a:latin typeface="Calibri"/>
+                <a:ea typeface="微软雅黑"/>
               </a:rPr>
               <a:t>●  </a:t>
             </a:r>
@@ -7700,8 +8312,8 @@
                 <a:solidFill>
                   <a:srgbClr val="333333"/>
                 </a:solidFill>
-                <a:latin typeface="PingFang SC"/>
-                <a:ea typeface="PingFang SC"/>
+                <a:latin typeface="Calibri"/>
+                <a:ea typeface="微软雅黑"/>
               </a:rPr>
               <a:t>逐轮拟合残差降低偏差</a:t>
             </a:r>
@@ -7717,8 +8329,8 @@
                 <a:solidFill>
                   <a:srgbClr val="333333"/>
                 </a:solidFill>
-                <a:latin typeface="PingFang SC"/>
-                <a:ea typeface="PingFang SC"/>
+                <a:latin typeface="Calibri"/>
+                <a:ea typeface="微软雅黑"/>
               </a:rPr>
               <a:t>●  </a:t>
             </a:r>
@@ -7727,8 +8339,8 @@
                 <a:solidFill>
                   <a:srgbClr val="333333"/>
                 </a:solidFill>
-                <a:latin typeface="PingFang SC"/>
-                <a:ea typeface="PingFang SC"/>
+                <a:latin typeface="Calibri"/>
+                <a:ea typeface="微软雅黑"/>
               </a:rPr>
               <a:t>XGBoost 引入二阶泰勒展开与显式正则化，抑制过拟合</a:t>
             </a:r>
@@ -7744,8 +8356,8 @@
                 <a:solidFill>
                   <a:srgbClr val="333333"/>
                 </a:solidFill>
-                <a:latin typeface="PingFang SC"/>
-                <a:ea typeface="PingFang SC"/>
+                <a:latin typeface="Calibri"/>
+                <a:ea typeface="微软雅黑"/>
               </a:rPr>
               <a:t>●  </a:t>
             </a:r>
@@ -7754,8 +8366,8 @@
                 <a:solidFill>
                   <a:srgbClr val="333333"/>
                 </a:solidFill>
-                <a:latin typeface="PingFang SC"/>
-                <a:ea typeface="PingFang SC"/>
+                <a:latin typeface="Calibri"/>
+                <a:ea typeface="微软雅黑"/>
               </a:rPr>
               <a:t>输出特征重要性，支撑关键指标筛选与可解释分析</a:t>
             </a:r>
@@ -7788,8 +8400,8 @@
                 <a:solidFill>
                   <a:srgbClr val="999999"/>
                 </a:solidFill>
-                <a:latin typeface="PingFang SC"/>
-                <a:ea typeface="PingFang SC"/>
+                <a:latin typeface="Calibri"/>
+                <a:ea typeface="微软雅黑"/>
               </a:rPr>
               <a:t>11</a:t>
             </a:r>
@@ -7883,8 +8495,8 @@
                 <a:solidFill>
                   <a:srgbClr val="0A1A3E"/>
                 </a:solidFill>
-                <a:latin typeface="PingFang SC"/>
-                <a:ea typeface="PingFang SC"/>
+                <a:latin typeface="Calibri"/>
+                <a:ea typeface="微软雅黑"/>
               </a:rPr>
               <a:t>第三章：盘级故障预测</a:t>
             </a:r>
@@ -7917,8 +8529,8 @@
                 <a:solidFill>
                   <a:srgbClr val="666666"/>
                 </a:solidFill>
-                <a:latin typeface="PingFang SC"/>
-                <a:ea typeface="PingFang SC"/>
+                <a:latin typeface="Calibri"/>
+                <a:ea typeface="微软雅黑"/>
               </a:rPr>
               <a:t>混合标注 + 突变特征 + 异构集成 — 提升检出率、降低误报率</a:t>
             </a:r>
@@ -8012,8 +8624,8 @@
                 <a:solidFill>
                   <a:srgbClr val="0A1A3E"/>
                 </a:solidFill>
-                <a:latin typeface="PingFang SC"/>
-                <a:ea typeface="PingFang SC"/>
+                <a:latin typeface="Calibri"/>
+                <a:ea typeface="微软雅黑"/>
               </a:rPr>
               <a:t>总体流程：预处理→突变特征→混合标注→异构集成→盘级评估</a:t>
             </a:r>
@@ -8117,8 +8729,8 @@
                 <a:solidFill>
                   <a:srgbClr val="333333"/>
                 </a:solidFill>
-                <a:latin typeface="PingFang SC"/>
-                <a:ea typeface="PingFang SC"/>
+                <a:latin typeface="Calibri"/>
+                <a:ea typeface="微软雅黑"/>
               </a:rPr>
               <a:t>●  </a:t>
             </a:r>
@@ -8127,8 +8739,8 @@
                 <a:solidFill>
                   <a:srgbClr val="333333"/>
                 </a:solidFill>
-                <a:latin typeface="PingFang SC"/>
-                <a:ea typeface="PingFang SC"/>
+                <a:latin typeface="Calibri"/>
+                <a:ea typeface="微软雅黑"/>
               </a:rPr>
               <a:t>SMART 日级日志经预处理与 A/B 归纳后分三路并行处理</a:t>
             </a:r>
@@ -8144,8 +8756,8 @@
                 <a:solidFill>
                   <a:srgbClr val="333333"/>
                 </a:solidFill>
-                <a:latin typeface="PingFang SC"/>
-                <a:ea typeface="PingFang SC"/>
+                <a:latin typeface="Calibri"/>
+                <a:ea typeface="微软雅黑"/>
               </a:rPr>
               <a:t>●  </a:t>
             </a:r>
@@ -8154,8 +8766,8 @@
                 <a:solidFill>
                   <a:srgbClr val="333333"/>
                 </a:solidFill>
-                <a:latin typeface="PingFang SC"/>
-                <a:ea typeface="PingFang SC"/>
+                <a:latin typeface="Calibri"/>
+                <a:ea typeface="微软雅黑"/>
               </a:rPr>
               <a:t>混合标注提供降噪监督信号，特征层提供突变刻画</a:t>
             </a:r>
@@ -8171,8 +8783,8 @@
                 <a:solidFill>
                   <a:srgbClr val="333333"/>
                 </a:solidFill>
-                <a:latin typeface="PingFang SC"/>
-                <a:ea typeface="PingFang SC"/>
+                <a:latin typeface="Calibri"/>
+                <a:ea typeface="微软雅黑"/>
               </a:rPr>
               <a:t>●  </a:t>
             </a:r>
@@ -8181,8 +8793,8 @@
                 <a:solidFill>
                   <a:srgbClr val="333333"/>
                 </a:solidFill>
-                <a:latin typeface="PingFang SC"/>
-                <a:ea typeface="PingFang SC"/>
+                <a:latin typeface="Calibri"/>
+                <a:ea typeface="微软雅黑"/>
               </a:rPr>
               <a:t>最终输出样本级概率，聚合为盘级最早告警评估</a:t>
             </a:r>
@@ -8215,8 +8827,8 @@
                 <a:solidFill>
                   <a:srgbClr val="666666"/>
                 </a:solidFill>
-                <a:latin typeface="PingFang SC"/>
-                <a:ea typeface="PingFang SC"/>
+                <a:latin typeface="Calibri"/>
+                <a:ea typeface="微软雅黑"/>
               </a:rPr>
               <a:t>本章方法三模块：①短期时序突变特征 ②混合标注 ③异构集成预测</a:t>
             </a:r>
@@ -8249,8 +8861,8 @@
                 <a:solidFill>
                   <a:srgbClr val="999999"/>
                 </a:solidFill>
-                <a:latin typeface="PingFang SC"/>
-                <a:ea typeface="PingFang SC"/>
+                <a:latin typeface="Calibri"/>
+                <a:ea typeface="微软雅黑"/>
               </a:rPr>
               <a:t>13</a:t>
             </a:r>
@@ -8344,8 +8956,8 @@
                 <a:solidFill>
                   <a:srgbClr val="0A1A3E"/>
                 </a:solidFill>
-                <a:latin typeface="PingFang SC"/>
-                <a:ea typeface="PingFang SC"/>
+                <a:latin typeface="Calibri"/>
+                <a:ea typeface="微软雅黑"/>
               </a:rPr>
               <a:t>阿里云公开 SMART 数据集：5 座数据中心、9.3 万块 MLC-SSD 两年日志</a:t>
             </a:r>
@@ -8445,8 +9057,8 @@
                 <a:solidFill>
                   <a:srgbClr val="999999"/>
                 </a:solidFill>
-                <a:latin typeface="PingFang SC"/>
-                <a:ea typeface="PingFang SC"/>
+                <a:latin typeface="Calibri"/>
+                <a:ea typeface="微软雅黑"/>
               </a:rPr>
               <a:t>天池数据集 MB1/MB2 概览</a:t>
             </a:r>
@@ -8483,8 +9095,8 @@
                 <a:solidFill>
                   <a:srgbClr val="0A1A3E"/>
                 </a:solidFill>
-                <a:latin typeface="PingFang SC"/>
-                <a:ea typeface="PingFang SC"/>
+                <a:latin typeface="Calibri"/>
+                <a:ea typeface="微软雅黑"/>
               </a:rPr>
               <a:t>分析要点</a:t>
             </a:r>
@@ -8500,8 +9112,8 @@
                 <a:solidFill>
                   <a:srgbClr val="333333"/>
                 </a:solidFill>
-                <a:latin typeface="PingFang SC"/>
-                <a:ea typeface="PingFang SC"/>
+                <a:latin typeface="Calibri"/>
+                <a:ea typeface="微软雅黑"/>
               </a:rPr>
               <a:t>●  </a:t>
             </a:r>
@@ -8510,8 +9122,8 @@
                 <a:solidFill>
                   <a:srgbClr val="333333"/>
                 </a:solidFill>
-                <a:latin typeface="PingFang SC"/>
-                <a:ea typeface="PingFang SC"/>
+                <a:latin typeface="Calibri"/>
+                <a:ea typeface="微软雅黑"/>
               </a:rPr>
               <a:t>阿里云五座数据中心，2018.1–2019.12 日级 SMART 日志</a:t>
             </a:r>
@@ -8527,8 +9139,8 @@
                 <a:solidFill>
                   <a:srgbClr val="333333"/>
                 </a:solidFill>
-                <a:latin typeface="PingFang SC"/>
-                <a:ea typeface="PingFang SC"/>
+                <a:latin typeface="Calibri"/>
+                <a:ea typeface="微软雅黑"/>
               </a:rPr>
               <a:t>●  </a:t>
             </a:r>
@@ -8537,8 +9149,8 @@
                 <a:solidFill>
                   <a:srgbClr val="333333"/>
                 </a:solidFill>
-                <a:latin typeface="PingFang SC"/>
-                <a:ea typeface="PingFang SC"/>
+                <a:latin typeface="Calibri"/>
+                <a:ea typeface="微软雅黑"/>
               </a:rPr>
               <a:t>MB1/MB2 均为 MLC-SSD，合计 9.3 万盘、2411 块故障盘</a:t>
             </a:r>
@@ -8554,8 +9166,8 @@
                 <a:solidFill>
                   <a:srgbClr val="333333"/>
                 </a:solidFill>
-                <a:latin typeface="PingFang SC"/>
-                <a:ea typeface="PingFang SC"/>
+                <a:latin typeface="Calibri"/>
+                <a:ea typeface="微软雅黑"/>
               </a:rPr>
               <a:t>●  </a:t>
             </a:r>
@@ -8564,8 +9176,8 @@
                 <a:solidFill>
                   <a:srgbClr val="333333"/>
                 </a:solidFill>
-                <a:latin typeface="PingFang SC"/>
-                <a:ea typeface="PingFang SC"/>
+                <a:latin typeface="Calibri"/>
+                <a:ea typeface="微软雅黑"/>
               </a:rPr>
               <a:t>MB1 故障率 2.52%、MB2 仅 0.71%，构成高/低信噪比对照</a:t>
             </a:r>
@@ -8581,8 +9193,8 @@
                 <a:solidFill>
                   <a:srgbClr val="333333"/>
                 </a:solidFill>
-                <a:latin typeface="PingFang SC"/>
-                <a:ea typeface="PingFang SC"/>
+                <a:latin typeface="Calibri"/>
+                <a:ea typeface="微软雅黑"/>
               </a:rPr>
               <a:t>●  </a:t>
             </a:r>
@@ -8591,8 +9203,8 @@
                 <a:solidFill>
                   <a:srgbClr val="333333"/>
                 </a:solidFill>
-                <a:latin typeface="PingFang SC"/>
-                <a:ea typeface="PingFang SC"/>
+                <a:latin typeface="Calibri"/>
+                <a:ea typeface="微软雅黑"/>
               </a:rPr>
               <a:t>102 列 SMART 经空值/零方差/Spearman 冗余三步筛选，保留 20/19 列</a:t>
             </a:r>
@@ -8608,8 +9220,8 @@
                 <a:solidFill>
                   <a:srgbClr val="333333"/>
                 </a:solidFill>
-                <a:latin typeface="PingFang SC"/>
-                <a:ea typeface="PingFang SC"/>
+                <a:latin typeface="Calibri"/>
+                <a:ea typeface="微软雅黑"/>
               </a:rPr>
               <a:t>●  </a:t>
             </a:r>
@@ -8618,8 +9230,8 @@
                 <a:solidFill>
                   <a:srgbClr val="333333"/>
                 </a:solidFill>
-                <a:latin typeface="PingFang SC"/>
-                <a:ea typeface="PingFang SC"/>
+                <a:latin typeface="Calibri"/>
+                <a:ea typeface="微软雅黑"/>
               </a:rPr>
               <a:t>日历缺失：99% 盘有中断，63%–66% 属轻度可前向填充</a:t>
             </a:r>
@@ -8652,8 +9264,8 @@
                 <a:solidFill>
                   <a:srgbClr val="999999"/>
                 </a:solidFill>
-                <a:latin typeface="PingFang SC"/>
-                <a:ea typeface="PingFang SC"/>
+                <a:latin typeface="Calibri"/>
+                <a:ea typeface="微软雅黑"/>
               </a:rPr>
               <a:t>14</a:t>
             </a:r>
@@ -8747,8 +9359,8 @@
                 <a:solidFill>
                   <a:srgbClr val="0A1A3E"/>
                 </a:solidFill>
-                <a:latin typeface="PingFang SC"/>
-                <a:ea typeface="PingFang SC"/>
+                <a:latin typeface="Calibri"/>
+                <a:ea typeface="微软雅黑"/>
               </a:rPr>
               <a:t>MB1/MB2 故障分布与 SMART 数据缺失模式分析</a:t>
             </a:r>
@@ -8848,8 +9460,8 @@
                 <a:solidFill>
                   <a:srgbClr val="999999"/>
                 </a:solidFill>
-                <a:latin typeface="PingFang SC"/>
-                <a:ea typeface="PingFang SC"/>
+                <a:latin typeface="Calibri"/>
+                <a:ea typeface="微软雅黑"/>
               </a:rPr>
               <a:t>MB1/MB2 月度故障计数</a:t>
             </a:r>
@@ -8886,8 +9498,8 @@
                 <a:solidFill>
                   <a:srgbClr val="0A1A3E"/>
                 </a:solidFill>
-                <a:latin typeface="PingFang SC"/>
-                <a:ea typeface="PingFang SC"/>
+                <a:latin typeface="Calibri"/>
+                <a:ea typeface="微软雅黑"/>
               </a:rPr>
               <a:t>月度故障分布</a:t>
             </a:r>
@@ -8903,8 +9515,8 @@
                 <a:solidFill>
                   <a:srgbClr val="333333"/>
                 </a:solidFill>
-                <a:latin typeface="PingFang SC"/>
-                <a:ea typeface="PingFang SC"/>
+                <a:latin typeface="Calibri"/>
+                <a:ea typeface="微软雅黑"/>
               </a:rPr>
               <a:t>●  </a:t>
             </a:r>
@@ -8913,8 +9525,8 @@
                 <a:solidFill>
                   <a:srgbClr val="333333"/>
                 </a:solidFill>
-                <a:latin typeface="PingFang SC"/>
-                <a:ea typeface="PingFang SC"/>
+                <a:latin typeface="Calibri"/>
+                <a:ea typeface="微软雅黑"/>
               </a:rPr>
               <a:t>MB1 故障高峰集中在 2018 年中与 2019 年末</a:t>
             </a:r>
@@ -8930,8 +9542,8 @@
                 <a:solidFill>
                   <a:srgbClr val="333333"/>
                 </a:solidFill>
-                <a:latin typeface="PingFang SC"/>
-                <a:ea typeface="PingFang SC"/>
+                <a:latin typeface="Calibri"/>
+                <a:ea typeface="微软雅黑"/>
               </a:rPr>
               <a:t>●  </a:t>
             </a:r>
@@ -8940,8 +9552,8 @@
                 <a:solidFill>
                   <a:srgbClr val="333333"/>
                 </a:solidFill>
-                <a:latin typeface="PingFang SC"/>
-                <a:ea typeface="PingFang SC"/>
+                <a:latin typeface="Calibri"/>
+                <a:ea typeface="微软雅黑"/>
               </a:rPr>
               <a:t>MB2 故障率更低且分布更均匀</a:t>
             </a:r>
@@ -8998,8 +9610,8 @@
                 <a:solidFill>
                   <a:srgbClr val="999999"/>
                 </a:solidFill>
-                <a:latin typeface="PingFang SC"/>
-                <a:ea typeface="PingFang SC"/>
+                <a:latin typeface="Calibri"/>
+                <a:ea typeface="微软雅黑"/>
               </a:rPr>
               <a:t>SMART 缺失模式分布</a:t>
             </a:r>
@@ -9036,8 +9648,8 @@
                 <a:solidFill>
                   <a:srgbClr val="0A1A3E"/>
                 </a:solidFill>
-                <a:latin typeface="PingFang SC"/>
-                <a:ea typeface="PingFang SC"/>
+                <a:latin typeface="Calibri"/>
+                <a:ea typeface="微软雅黑"/>
               </a:rPr>
               <a:t>SMART 数据缺失模式</a:t>
             </a:r>
@@ -9053,8 +9665,8 @@
                 <a:solidFill>
                   <a:srgbClr val="333333"/>
                 </a:solidFill>
-                <a:latin typeface="PingFang SC"/>
-                <a:ea typeface="PingFang SC"/>
+                <a:latin typeface="Calibri"/>
+                <a:ea typeface="微软雅黑"/>
               </a:rPr>
               <a:t>●  </a:t>
             </a:r>
@@ -9063,8 +9675,8 @@
                 <a:solidFill>
                   <a:srgbClr val="333333"/>
                 </a:solidFill>
-                <a:latin typeface="PingFang SC"/>
-                <a:ea typeface="PingFang SC"/>
+                <a:latin typeface="Calibri"/>
+                <a:ea typeface="微软雅黑"/>
               </a:rPr>
               <a:t>部分 SMART 属性存在系统性缺失，影响特征构造策略</a:t>
             </a:r>
@@ -9080,8 +9692,8 @@
                 <a:solidFill>
                   <a:srgbClr val="333333"/>
                 </a:solidFill>
-                <a:latin typeface="PingFang SC"/>
-                <a:ea typeface="PingFang SC"/>
+                <a:latin typeface="Calibri"/>
+                <a:ea typeface="微软雅黑"/>
               </a:rPr>
               <a:t>●  </a:t>
             </a:r>
@@ -9090,8 +9702,8 @@
                 <a:solidFill>
                   <a:srgbClr val="333333"/>
                 </a:solidFill>
-                <a:latin typeface="PingFang SC"/>
-                <a:ea typeface="PingFang SC"/>
+                <a:latin typeface="Calibri"/>
+                <a:ea typeface="微软雅黑"/>
               </a:rPr>
               <a:t>缺失分布非随机，需在预处理阶段针对性补全</a:t>
             </a:r>
@@ -9124,8 +9736,8 @@
                 <a:solidFill>
                   <a:srgbClr val="999999"/>
                 </a:solidFill>
-                <a:latin typeface="PingFang SC"/>
-                <a:ea typeface="PingFang SC"/>
+                <a:latin typeface="Calibri"/>
+                <a:ea typeface="微软雅黑"/>
               </a:rPr>
               <a:t>15</a:t>
             </a:r>
@@ -9219,8 +9831,8 @@
                 <a:solidFill>
                   <a:srgbClr val="0A1A3E"/>
                 </a:solidFill>
-                <a:latin typeface="PingFang SC"/>
-                <a:ea typeface="PingFang SC"/>
+                <a:latin typeface="Calibri"/>
+                <a:ea typeface="微软雅黑"/>
               </a:rPr>
               <a:t>B 组属性在 MB1/MB2 上均出现故障前突变信号</a:t>
             </a:r>
@@ -9320,8 +9932,8 @@
                 <a:solidFill>
                   <a:srgbClr val="999999"/>
                 </a:solidFill>
-                <a:latin typeface="PingFang SC"/>
-                <a:ea typeface="PingFang SC"/>
+                <a:latin typeface="Calibri"/>
+                <a:ea typeface="微软雅黑"/>
               </a:rPr>
               <a:t>MB1 B 组属性时序 EDA</a:t>
             </a:r>
@@ -9358,8 +9970,8 @@
                 <a:solidFill>
                   <a:srgbClr val="0A1A3E"/>
                 </a:solidFill>
-                <a:latin typeface="PingFang SC"/>
-                <a:ea typeface="PingFang SC"/>
+                <a:latin typeface="Calibri"/>
+                <a:ea typeface="微软雅黑"/>
               </a:rPr>
               <a:t>MB1 突变 EDA</a:t>
             </a:r>
@@ -9375,8 +9987,8 @@
                 <a:solidFill>
                   <a:srgbClr val="333333"/>
                 </a:solidFill>
-                <a:latin typeface="PingFang SC"/>
-                <a:ea typeface="PingFang SC"/>
+                <a:latin typeface="Calibri"/>
+                <a:ea typeface="微软雅黑"/>
               </a:rPr>
               <a:t>●  </a:t>
             </a:r>
@@ -9385,8 +9997,8 @@
                 <a:solidFill>
                   <a:srgbClr val="333333"/>
                 </a:solidFill>
-                <a:latin typeface="PingFang SC"/>
-                <a:ea typeface="PingFang SC"/>
+                <a:latin typeface="Calibri"/>
+                <a:ea typeface="微软雅黑"/>
               </a:rPr>
               <a:t>r</a:t>
             </a:r>
@@ -9395,8 +10007,8 @@
                 <a:solidFill>
                   <a:srgbClr val="333333"/>
                 </a:solidFill>
-                <a:latin typeface="PingFang SC"/>
-                <a:ea typeface="PingFang SC"/>
+                <a:latin typeface="Calibri"/>
+                <a:ea typeface="微软雅黑"/>
               </a:rPr>
               <a:t>180</a:t>
             </a:r>
@@ -9405,8 +10017,8 @@
                 <a:solidFill>
                   <a:srgbClr val="333333"/>
                 </a:solidFill>
-                <a:latin typeface="PingFang SC"/>
-                <a:ea typeface="PingFang SC"/>
+                <a:latin typeface="Calibri"/>
+                <a:ea typeface="微软雅黑"/>
               </a:rPr>
               <a:t>/r</a:t>
             </a:r>
@@ -9415,8 +10027,8 @@
                 <a:solidFill>
                   <a:srgbClr val="333333"/>
                 </a:solidFill>
-                <a:latin typeface="PingFang SC"/>
-                <a:ea typeface="PingFang SC"/>
+                <a:latin typeface="Calibri"/>
+                <a:ea typeface="微软雅黑"/>
               </a:rPr>
               <a:t>183</a:t>
             </a:r>
@@ -9425,8 +10037,8 @@
                 <a:solidFill>
                   <a:srgbClr val="333333"/>
                 </a:solidFill>
-                <a:latin typeface="PingFang SC"/>
-                <a:ea typeface="PingFang SC"/>
+                <a:latin typeface="Calibri"/>
+                <a:ea typeface="微软雅黑"/>
               </a:rPr>
               <a:t> 故障前 1-3 天阶跃激增</a:t>
             </a:r>
@@ -9442,8 +10054,8 @@
                 <a:solidFill>
                   <a:srgbClr val="333333"/>
                 </a:solidFill>
-                <a:latin typeface="PingFang SC"/>
-                <a:ea typeface="PingFang SC"/>
+                <a:latin typeface="Calibri"/>
+                <a:ea typeface="微软雅黑"/>
               </a:rPr>
               <a:t>●  </a:t>
             </a:r>
@@ -9452,8 +10064,8 @@
                 <a:solidFill>
                   <a:srgbClr val="333333"/>
                 </a:solidFill>
-                <a:latin typeface="PingFang SC"/>
-                <a:ea typeface="PingFang SC"/>
+                <a:latin typeface="Calibri"/>
+                <a:ea typeface="微软雅黑"/>
               </a:rPr>
               <a:t>6 块故障盘时序均呈一致突变模式</a:t>
             </a:r>
@@ -9469,8 +10081,8 @@
                 <a:solidFill>
                   <a:srgbClr val="333333"/>
                 </a:solidFill>
-                <a:latin typeface="PingFang SC"/>
-                <a:ea typeface="PingFang SC"/>
+                <a:latin typeface="Calibri"/>
+                <a:ea typeface="微软雅黑"/>
               </a:rPr>
               <a:t>●  </a:t>
             </a:r>
@@ -9479,8 +10091,8 @@
                 <a:solidFill>
                   <a:srgbClr val="333333"/>
                 </a:solidFill>
-                <a:latin typeface="PingFang SC"/>
-                <a:ea typeface="PingFang SC"/>
+                <a:latin typeface="Calibri"/>
+                <a:ea typeface="微软雅黑"/>
               </a:rPr>
               <a:t>A 组磨损计数缓慢平稳增长</a:t>
             </a:r>
@@ -9537,8 +10149,8 @@
                 <a:solidFill>
                   <a:srgbClr val="999999"/>
                 </a:solidFill>
-                <a:latin typeface="PingFang SC"/>
-                <a:ea typeface="PingFang SC"/>
+                <a:latin typeface="Calibri"/>
+                <a:ea typeface="微软雅黑"/>
               </a:rPr>
               <a:t>MB2 B 组属性时序 EDA</a:t>
             </a:r>
@@ -9575,8 +10187,8 @@
                 <a:solidFill>
                   <a:srgbClr val="0A1A3E"/>
                 </a:solidFill>
-                <a:latin typeface="PingFang SC"/>
-                <a:ea typeface="PingFang SC"/>
+                <a:latin typeface="Calibri"/>
+                <a:ea typeface="微软雅黑"/>
               </a:rPr>
               <a:t>MB2 突变 EDA</a:t>
             </a:r>
@@ -9592,8 +10204,8 @@
                 <a:solidFill>
                   <a:srgbClr val="333333"/>
                 </a:solidFill>
-                <a:latin typeface="PingFang SC"/>
-                <a:ea typeface="PingFang SC"/>
+                <a:latin typeface="Calibri"/>
+                <a:ea typeface="微软雅黑"/>
               </a:rPr>
               <a:t>●  </a:t>
             </a:r>
@@ -9602,8 +10214,8 @@
                 <a:solidFill>
                   <a:srgbClr val="333333"/>
                 </a:solidFill>
-                <a:latin typeface="PingFang SC"/>
-                <a:ea typeface="PingFang SC"/>
+                <a:latin typeface="Calibri"/>
+                <a:ea typeface="微软雅黑"/>
               </a:rPr>
               <a:t>低故障率场景下突变信号仍可辨识</a:t>
             </a:r>
@@ -9619,8 +10231,8 @@
                 <a:solidFill>
                   <a:srgbClr val="333333"/>
                 </a:solidFill>
-                <a:latin typeface="PingFang SC"/>
-                <a:ea typeface="PingFang SC"/>
+                <a:latin typeface="Calibri"/>
+                <a:ea typeface="微软雅黑"/>
               </a:rPr>
               <a:t>●  </a:t>
             </a:r>
@@ -9629,8 +10241,8 @@
                 <a:solidFill>
                   <a:srgbClr val="333333"/>
                 </a:solidFill>
-                <a:latin typeface="PingFang SC"/>
-                <a:ea typeface="PingFang SC"/>
+                <a:latin typeface="Calibri"/>
+                <a:ea typeface="微软雅黑"/>
               </a:rPr>
               <a:t>验证 B 组突变非 MB1 特有现象</a:t>
             </a:r>
@@ -9646,8 +10258,8 @@
                 <a:solidFill>
                   <a:srgbClr val="333333"/>
                 </a:solidFill>
-                <a:latin typeface="PingFang SC"/>
-                <a:ea typeface="PingFang SC"/>
+                <a:latin typeface="Calibri"/>
+                <a:ea typeface="微软雅黑"/>
               </a:rPr>
               <a:t>●  </a:t>
             </a:r>
@@ -9656,8 +10268,8 @@
                 <a:solidFill>
                   <a:srgbClr val="333333"/>
                 </a:solidFill>
-                <a:latin typeface="PingFang SC"/>
-                <a:ea typeface="PingFang SC"/>
+                <a:latin typeface="Calibri"/>
+                <a:ea typeface="微软雅黑"/>
               </a:rPr>
               <a:t>但低信噪比对模型检出能力构成挑战</a:t>
             </a:r>
@@ -9690,8 +10302,8 @@
                 <a:solidFill>
                   <a:srgbClr val="999999"/>
                 </a:solidFill>
-                <a:latin typeface="PingFang SC"/>
-                <a:ea typeface="PingFang SC"/>
+                <a:latin typeface="Calibri"/>
+                <a:ea typeface="微软雅黑"/>
               </a:rPr>
               <a:t>16</a:t>
             </a:r>
@@ -9785,8 +10397,8 @@
                 <a:solidFill>
                   <a:srgbClr val="0A1A3E"/>
                 </a:solidFill>
-                <a:latin typeface="PingFang SC"/>
-                <a:ea typeface="PingFang SC"/>
+                <a:latin typeface="Calibri"/>
+                <a:ea typeface="微软雅黑"/>
               </a:rPr>
               <a:t>首跳 PMF 峰值在故障前 1 天，为混合标注提供时间锚点</a:t>
             </a:r>
@@ -9886,8 +10498,8 @@
                 <a:solidFill>
                   <a:srgbClr val="999999"/>
                 </a:solidFill>
-                <a:latin typeface="PingFang SC"/>
-                <a:ea typeface="PingFang SC"/>
+                <a:latin typeface="Calibri"/>
+                <a:ea typeface="微软雅黑"/>
               </a:rPr>
               <a:t>B 组属性首跳 PMF 分布</a:t>
             </a:r>
@@ -9924,8 +10536,8 @@
                 <a:solidFill>
                   <a:srgbClr val="0A1A3E"/>
                 </a:solidFill>
-                <a:latin typeface="PingFang SC"/>
-                <a:ea typeface="PingFang SC"/>
+                <a:latin typeface="Calibri"/>
+                <a:ea typeface="微软雅黑"/>
               </a:rPr>
               <a:t>分析要点</a:t>
             </a:r>
@@ -9941,8 +10553,8 @@
                 <a:solidFill>
                   <a:srgbClr val="333333"/>
                 </a:solidFill>
-                <a:latin typeface="PingFang SC"/>
-                <a:ea typeface="PingFang SC"/>
+                <a:latin typeface="Calibri"/>
+                <a:ea typeface="微软雅黑"/>
               </a:rPr>
               <a:t>●  </a:t>
             </a:r>
@@ -9951,8 +10563,8 @@
                 <a:solidFill>
                   <a:srgbClr val="333333"/>
                 </a:solidFill>
-                <a:latin typeface="PingFang SC"/>
-                <a:ea typeface="PingFang SC"/>
+                <a:latin typeface="Calibri"/>
+                <a:ea typeface="微软雅黑"/>
               </a:rPr>
               <a:t>B 组属性首次非零跳变集中在故障前 1–3 天（PMF 峰值 d=1，d≤3 累计 65.7%）</a:t>
             </a:r>
@@ -9968,8 +10580,8 @@
                 <a:solidFill>
                   <a:srgbClr val="333333"/>
                 </a:solidFill>
-                <a:latin typeface="PingFang SC"/>
-                <a:ea typeface="PingFang SC"/>
+                <a:latin typeface="Calibri"/>
+                <a:ea typeface="微软雅黑"/>
               </a:rPr>
               <a:t>●  </a:t>
             </a:r>
@@ -9978,8 +10590,8 @@
                 <a:solidFill>
                   <a:srgbClr val="333333"/>
                 </a:solidFill>
-                <a:latin typeface="PingFang SC"/>
-                <a:ea typeface="PingFang SC"/>
+                <a:latin typeface="Calibri"/>
+                <a:ea typeface="微软雅黑"/>
               </a:rPr>
               <a:t>首跳时间点为混合标注的正样本下界提供统计依据</a:t>
             </a:r>
@@ -9995,8 +10607,8 @@
                 <a:solidFill>
                   <a:srgbClr val="333333"/>
                 </a:solidFill>
-                <a:latin typeface="PingFang SC"/>
-                <a:ea typeface="PingFang SC"/>
+                <a:latin typeface="Calibri"/>
+                <a:ea typeface="微软雅黑"/>
               </a:rPr>
               <a:t>●  </a:t>
             </a:r>
@@ -10005,8 +10617,8 @@
                 <a:solidFill>
                   <a:srgbClr val="333333"/>
                 </a:solidFill>
-                <a:latin typeface="PingFang SC"/>
-                <a:ea typeface="PingFang SC"/>
+                <a:latin typeface="Calibri"/>
+                <a:ea typeface="微软雅黑"/>
               </a:rPr>
               <a:t>将正样本限制在短窗 k=2 天与首跳的交集区间</a:t>
             </a:r>
@@ -10039,8 +10651,8 @@
                 <a:solidFill>
                   <a:srgbClr val="999999"/>
                 </a:solidFill>
-                <a:latin typeface="PingFang SC"/>
-                <a:ea typeface="PingFang SC"/>
+                <a:latin typeface="Calibri"/>
+                <a:ea typeface="微软雅黑"/>
               </a:rPr>
               <a:t>MB1 子集 B 组属性首次跳变时间 PMF 分布</a:t>
             </a:r>
@@ -10073,8 +10685,8 @@
                 <a:solidFill>
                   <a:srgbClr val="999999"/>
                 </a:solidFill>
-                <a:latin typeface="PingFang SC"/>
-                <a:ea typeface="PingFang SC"/>
+                <a:latin typeface="Calibri"/>
+                <a:ea typeface="微软雅黑"/>
               </a:rPr>
               <a:t>17</a:t>
             </a:r>
@@ -10168,8 +10780,8 @@
                 <a:solidFill>
                   <a:srgbClr val="0A1A3E"/>
                 </a:solidFill>
-                <a:latin typeface="PingFang SC"/>
-                <a:ea typeface="PingFang SC"/>
+                <a:latin typeface="Calibri"/>
+                <a:ea typeface="微软雅黑"/>
               </a:rPr>
               <a:t>混合标注取短窗与首跳交集，评估按盘级口径统计</a:t>
             </a:r>
@@ -10269,8 +10881,8 @@
                 <a:solidFill>
                   <a:srgbClr val="999999"/>
                 </a:solidFill>
-                <a:latin typeface="PingFang SC"/>
-                <a:ea typeface="PingFang SC"/>
+                <a:latin typeface="Calibri"/>
+                <a:ea typeface="微软雅黑"/>
               </a:rPr>
               <a:t>标注策略窗口对比</a:t>
             </a:r>
@@ -10307,8 +10919,8 @@
                 <a:solidFill>
                   <a:srgbClr val="0A1A3E"/>
                 </a:solidFill>
-                <a:latin typeface="PingFang SC"/>
-                <a:ea typeface="PingFang SC"/>
+                <a:latin typeface="Calibri"/>
+                <a:ea typeface="微软雅黑"/>
               </a:rPr>
               <a:t>五种标注策略对比</a:t>
             </a:r>
@@ -10324,8 +10936,8 @@
                 <a:solidFill>
                   <a:srgbClr val="333333"/>
                 </a:solidFill>
-                <a:latin typeface="PingFang SC"/>
-                <a:ea typeface="PingFang SC"/>
+                <a:latin typeface="Calibri"/>
+                <a:ea typeface="微软雅黑"/>
               </a:rPr>
               <a:t>●  </a:t>
             </a:r>
@@ -10334,8 +10946,8 @@
                 <a:solidFill>
                   <a:srgbClr val="333333"/>
                 </a:solidFill>
-                <a:latin typeface="PingFang SC"/>
-                <a:ea typeface="PingFang SC"/>
+                <a:latin typeface="Calibri"/>
+                <a:ea typeface="微软雅黑"/>
               </a:rPr>
               <a:t>固定长窗稀释近端突变信号，短窗与首跳窗口各有缺陷</a:t>
             </a:r>
@@ -10351,8 +10963,8 @@
                 <a:solidFill>
                   <a:srgbClr val="333333"/>
                 </a:solidFill>
-                <a:latin typeface="PingFang SC"/>
-                <a:ea typeface="PingFang SC"/>
+                <a:latin typeface="Calibri"/>
+                <a:ea typeface="微软雅黑"/>
               </a:rPr>
               <a:t>●  </a:t>
             </a:r>
@@ -10361,8 +10973,8 @@
                 <a:solidFill>
                   <a:srgbClr val="333333"/>
                 </a:solidFill>
-                <a:latin typeface="PingFang SC"/>
-                <a:ea typeface="PingFang SC"/>
+                <a:latin typeface="Calibri"/>
+                <a:ea typeface="微软雅黑"/>
               </a:rPr>
               <a:t>混合策略取短窗与首跳交集，消除静默段标签噪声</a:t>
             </a:r>
@@ -10419,8 +11031,8 @@
                 <a:solidFill>
                   <a:srgbClr val="999999"/>
                 </a:solidFill>
-                <a:latin typeface="PingFang SC"/>
-                <a:ea typeface="PingFang SC"/>
+                <a:latin typeface="Calibri"/>
+                <a:ea typeface="微软雅黑"/>
               </a:rPr>
               <a:t>盘级 TP/FP/TN/FN 口径</a:t>
             </a:r>
@@ -10457,8 +11069,8 @@
                 <a:solidFill>
                   <a:srgbClr val="0A1A3E"/>
                 </a:solidFill>
-                <a:latin typeface="PingFang SC"/>
-                <a:ea typeface="PingFang SC"/>
+                <a:latin typeface="Calibri"/>
+                <a:ea typeface="微软雅黑"/>
               </a:rPr>
               <a:t>盘级评估口径定义</a:t>
             </a:r>
@@ -10474,8 +11086,8 @@
                 <a:solidFill>
                   <a:srgbClr val="333333"/>
                 </a:solidFill>
-                <a:latin typeface="PingFang SC"/>
-                <a:ea typeface="PingFang SC"/>
+                <a:latin typeface="Calibri"/>
+                <a:ea typeface="微软雅黑"/>
               </a:rPr>
               <a:t>●  </a:t>
             </a:r>
@@ -10484,8 +11096,8 @@
                 <a:solidFill>
                   <a:srgbClr val="333333"/>
                 </a:solidFill>
-                <a:latin typeface="PingFang SC"/>
-                <a:ea typeface="PingFang SC"/>
+                <a:latin typeface="Calibri"/>
+                <a:ea typeface="微软雅黑"/>
               </a:rPr>
               <a:t>TP/FP/TN/FN 按盘级而非样本级统计</a:t>
             </a:r>
@@ -10501,8 +11113,8 @@
                 <a:solidFill>
                   <a:srgbClr val="333333"/>
                 </a:solidFill>
-                <a:latin typeface="PingFang SC"/>
-                <a:ea typeface="PingFang SC"/>
+                <a:latin typeface="Calibri"/>
+                <a:ea typeface="微软雅黑"/>
               </a:rPr>
               <a:t>●  </a:t>
             </a:r>
@@ -10511,8 +11123,8 @@
                 <a:solidFill>
                   <a:srgbClr val="333333"/>
                 </a:solidFill>
-                <a:latin typeface="PingFang SC"/>
-                <a:ea typeface="PingFang SC"/>
+                <a:latin typeface="Calibri"/>
+                <a:ea typeface="微软雅黑"/>
               </a:rPr>
               <a:t>F</a:t>
             </a:r>
@@ -10521,8 +11133,8 @@
                 <a:solidFill>
                   <a:srgbClr val="333333"/>
                 </a:solidFill>
-                <a:latin typeface="PingFang SC"/>
-                <a:ea typeface="PingFang SC"/>
+                <a:latin typeface="Calibri"/>
+                <a:ea typeface="微软雅黑"/>
               </a:rPr>
               <a:t>0.5</a:t>
             </a:r>
@@ -10531,8 +11143,8 @@
                 <a:solidFill>
                   <a:srgbClr val="333333"/>
                 </a:solidFill>
-                <a:latin typeface="PingFang SC"/>
-                <a:ea typeface="PingFang SC"/>
+                <a:latin typeface="Calibri"/>
+                <a:ea typeface="微软雅黑"/>
               </a:rPr>
               <a:t> 赋予 Precision 更高权重，契合低误报约束</a:t>
             </a:r>
@@ -10565,8 +11177,8 @@
                 <a:solidFill>
                   <a:srgbClr val="999999"/>
                 </a:solidFill>
-                <a:latin typeface="PingFang SC"/>
-                <a:ea typeface="PingFang SC"/>
+                <a:latin typeface="Calibri"/>
+                <a:ea typeface="微软雅黑"/>
               </a:rPr>
               <a:t>18</a:t>
             </a:r>
@@ -10660,8 +11272,8 @@
                 <a:solidFill>
                   <a:srgbClr val="0A1A3E"/>
                 </a:solidFill>
-                <a:latin typeface="PingFang SC"/>
-                <a:ea typeface="PingFang SC"/>
+                <a:latin typeface="Calibri"/>
+                <a:ea typeface="微软雅黑"/>
               </a:rPr>
               <a:t>RF/XGBoost/LightGBM 经 Attention 融合，F</a:t>
             </a:r>
@@ -10670,8 +11282,8 @@
                 <a:solidFill>
                   <a:srgbClr val="0A1A3E"/>
                 </a:solidFill>
-                <a:latin typeface="PingFang SC"/>
-                <a:ea typeface="PingFang SC"/>
+                <a:latin typeface="Calibri"/>
+                <a:ea typeface="微软雅黑"/>
               </a:rPr>
               <a:t>0.5</a:t>
             </a:r>
@@ -10680,8 +11292,8 @@
                 <a:solidFill>
                   <a:srgbClr val="0A1A3E"/>
                 </a:solidFill>
-                <a:latin typeface="PingFang SC"/>
-                <a:ea typeface="PingFang SC"/>
+                <a:latin typeface="Calibri"/>
+                <a:ea typeface="微软雅黑"/>
               </a:rPr>
               <a:t>=0.919</a:t>
             </a:r>
@@ -10781,8 +11393,8 @@
                 <a:solidFill>
                   <a:srgbClr val="999999"/>
                 </a:solidFill>
-                <a:latin typeface="PingFang SC"/>
-                <a:ea typeface="PingFang SC"/>
+                <a:latin typeface="Calibri"/>
+                <a:ea typeface="微软雅黑"/>
               </a:rPr>
               <a:t>RF/XGB/LGB 异构集成</a:t>
             </a:r>
@@ -10819,8 +11431,8 @@
                 <a:solidFill>
                   <a:srgbClr val="0A1A3E"/>
                 </a:solidFill>
-                <a:latin typeface="PingFang SC"/>
-                <a:ea typeface="PingFang SC"/>
+                <a:latin typeface="Calibri"/>
+                <a:ea typeface="微软雅黑"/>
               </a:rPr>
               <a:t>集成模型架构</a:t>
             </a:r>
@@ -10836,8 +11448,8 @@
                 <a:solidFill>
                   <a:srgbClr val="333333"/>
                 </a:solidFill>
-                <a:latin typeface="PingFang SC"/>
-                <a:ea typeface="PingFang SC"/>
+                <a:latin typeface="Calibri"/>
+                <a:ea typeface="微软雅黑"/>
               </a:rPr>
               <a:t>●  </a:t>
             </a:r>
@@ -10846,8 +11458,8 @@
                 <a:solidFill>
                   <a:srgbClr val="333333"/>
                 </a:solidFill>
-                <a:latin typeface="PingFang SC"/>
-                <a:ea typeface="PingFang SC"/>
+                <a:latin typeface="Calibri"/>
+                <a:ea typeface="微软雅黑"/>
               </a:rPr>
               <a:t>RF 稳定基线，XGB 精度高，LGB 速度快效率好</a:t>
             </a:r>
@@ -10863,8 +11475,8 @@
                 <a:solidFill>
                   <a:srgbClr val="333333"/>
                 </a:solidFill>
-                <a:latin typeface="PingFang SC"/>
-                <a:ea typeface="PingFang SC"/>
+                <a:latin typeface="Calibri"/>
+                <a:ea typeface="微软雅黑"/>
               </a:rPr>
               <a:t>●  </a:t>
             </a:r>
@@ -10873,8 +11485,8 @@
                 <a:solidFill>
                   <a:srgbClr val="333333"/>
                 </a:solidFill>
-                <a:latin typeface="PingFang SC"/>
-                <a:ea typeface="PingFang SC"/>
+                <a:latin typeface="Calibri"/>
+                <a:ea typeface="微软雅黑"/>
               </a:rPr>
               <a:t>Attention 模块对每个样本自适应分配权重，Softmax 归一化</a:t>
             </a:r>
@@ -10890,8 +11502,8 @@
                 <a:solidFill>
                   <a:srgbClr val="333333"/>
                 </a:solidFill>
-                <a:latin typeface="PingFang SC"/>
-                <a:ea typeface="PingFang SC"/>
+                <a:latin typeface="Calibri"/>
+                <a:ea typeface="微软雅黑"/>
               </a:rPr>
               <a:t>●  </a:t>
             </a:r>
@@ -10900,8 +11512,8 @@
                 <a:solidFill>
                   <a:srgbClr val="333333"/>
                 </a:solidFill>
-                <a:latin typeface="PingFang SC"/>
-                <a:ea typeface="PingFang SC"/>
+                <a:latin typeface="Calibri"/>
+                <a:ea typeface="微软雅黑"/>
               </a:rPr>
               <a:t>Focal Loss 缓解正负样本极度失衡</a:t>
             </a:r>
@@ -10958,8 +11570,8 @@
                 <a:solidFill>
                   <a:srgbClr val="999999"/>
                 </a:solidFill>
-                <a:latin typeface="PingFang SC"/>
-                <a:ea typeface="PingFang SC"/>
+                <a:latin typeface="Calibri"/>
+                <a:ea typeface="微软雅黑"/>
               </a:rPr>
               <a:t>Attention 权重分配示意</a:t>
             </a:r>
@@ -10996,8 +11608,8 @@
                 <a:solidFill>
                   <a:srgbClr val="0A1A3E"/>
                 </a:solidFill>
-                <a:latin typeface="PingFang SC"/>
-                <a:ea typeface="PingFang SC"/>
+                <a:latin typeface="Calibri"/>
+                <a:ea typeface="微软雅黑"/>
               </a:rPr>
               <a:t>Attention 加权融合</a:t>
             </a:r>
@@ -11013,8 +11625,8 @@
                 <a:solidFill>
                   <a:srgbClr val="333333"/>
                 </a:solidFill>
-                <a:latin typeface="PingFang SC"/>
-                <a:ea typeface="PingFang SC"/>
+                <a:latin typeface="Calibri"/>
+                <a:ea typeface="微软雅黑"/>
               </a:rPr>
               <a:t>●  </a:t>
             </a:r>
@@ -11023,8 +11635,8 @@
                 <a:solidFill>
                   <a:srgbClr val="333333"/>
                 </a:solidFill>
-                <a:latin typeface="PingFang SC"/>
-                <a:ea typeface="PingFang SC"/>
+                <a:latin typeface="Calibri"/>
+                <a:ea typeface="微软雅黑"/>
               </a:rPr>
               <a:t>α</a:t>
             </a:r>
@@ -11033,8 +11645,8 @@
                 <a:solidFill>
                   <a:srgbClr val="333333"/>
                 </a:solidFill>
-                <a:latin typeface="PingFang SC"/>
-                <a:ea typeface="PingFang SC"/>
+                <a:latin typeface="Calibri"/>
+                <a:ea typeface="微软雅黑"/>
               </a:rPr>
               <a:t>1</a:t>
             </a:r>
@@ -11043,8 +11655,8 @@
                 <a:solidFill>
                   <a:srgbClr val="333333"/>
                 </a:solidFill>
-                <a:latin typeface="PingFang SC"/>
-                <a:ea typeface="PingFang SC"/>
+                <a:latin typeface="Calibri"/>
+                <a:ea typeface="微软雅黑"/>
               </a:rPr>
               <a:t>/α</a:t>
             </a:r>
@@ -11053,8 +11665,8 @@
                 <a:solidFill>
                   <a:srgbClr val="333333"/>
                 </a:solidFill>
-                <a:latin typeface="PingFang SC"/>
-                <a:ea typeface="PingFang SC"/>
+                <a:latin typeface="Calibri"/>
+                <a:ea typeface="微软雅黑"/>
               </a:rPr>
               <a:t>2</a:t>
             </a:r>
@@ -11063,8 +11675,8 @@
                 <a:solidFill>
                   <a:srgbClr val="333333"/>
                 </a:solidFill>
-                <a:latin typeface="PingFang SC"/>
-                <a:ea typeface="PingFang SC"/>
+                <a:latin typeface="Calibri"/>
+                <a:ea typeface="微软雅黑"/>
               </a:rPr>
               <a:t>/α</a:t>
             </a:r>
@@ -11073,8 +11685,8 @@
                 <a:solidFill>
                   <a:srgbClr val="333333"/>
                 </a:solidFill>
-                <a:latin typeface="PingFang SC"/>
-                <a:ea typeface="PingFang SC"/>
+                <a:latin typeface="Calibri"/>
+                <a:ea typeface="微软雅黑"/>
               </a:rPr>
               <a:t>3</a:t>
             </a:r>
@@ -11083,8 +11695,8 @@
                 <a:solidFill>
                   <a:srgbClr val="333333"/>
                 </a:solidFill>
-                <a:latin typeface="PingFang SC"/>
-                <a:ea typeface="PingFang SC"/>
+                <a:latin typeface="Calibri"/>
+                <a:ea typeface="微软雅黑"/>
               </a:rPr>
               <a:t> 经 Softmax 归一化和为 1</a:t>
             </a:r>
@@ -11100,8 +11712,8 @@
                 <a:solidFill>
                   <a:srgbClr val="333333"/>
                 </a:solidFill>
-                <a:latin typeface="PingFang SC"/>
-                <a:ea typeface="PingFang SC"/>
+                <a:latin typeface="Calibri"/>
+                <a:ea typeface="微软雅黑"/>
               </a:rPr>
               <a:t>●  </a:t>
             </a:r>
@@ -11110,8 +11722,8 @@
                 <a:solidFill>
                   <a:srgbClr val="333333"/>
                 </a:solidFill>
-                <a:latin typeface="PingFang SC"/>
-                <a:ea typeface="PingFang SC"/>
+                <a:latin typeface="Calibri"/>
+                <a:ea typeface="微软雅黑"/>
               </a:rPr>
               <a:t>样本级自适应权重自动学习</a:t>
             </a:r>
@@ -11127,8 +11739,8 @@
                 <a:solidFill>
                   <a:srgbClr val="333333"/>
                 </a:solidFill>
-                <a:latin typeface="PingFang SC"/>
-                <a:ea typeface="PingFang SC"/>
+                <a:latin typeface="Calibri"/>
+                <a:ea typeface="微软雅黑"/>
               </a:rPr>
               <a:t>●  </a:t>
             </a:r>
@@ -11137,8 +11749,8 @@
                 <a:solidFill>
                   <a:srgbClr val="333333"/>
                 </a:solidFill>
-                <a:latin typeface="PingFang SC"/>
-                <a:ea typeface="PingFang SC"/>
+                <a:latin typeface="Calibri"/>
+                <a:ea typeface="微软雅黑"/>
               </a:rPr>
               <a:t>融合效果优于任意单一模型</a:t>
             </a:r>
@@ -11171,8 +11783,8 @@
                 <a:solidFill>
                   <a:srgbClr val="999999"/>
                 </a:solidFill>
-                <a:latin typeface="PingFang SC"/>
-                <a:ea typeface="PingFang SC"/>
+                <a:latin typeface="Calibri"/>
+                <a:ea typeface="微软雅黑"/>
               </a:rPr>
               <a:t>19</a:t>
             </a:r>
@@ -11266,8 +11878,8 @@
                 <a:solidFill>
                   <a:srgbClr val="0A1A3E"/>
                 </a:solidFill>
-                <a:latin typeface="PingFang SC"/>
-                <a:ea typeface="PingFang SC"/>
+                <a:latin typeface="Calibri"/>
+                <a:ea typeface="微软雅黑"/>
               </a:rPr>
               <a:t>报告围绕盘级预测、块级优化、系统落地三个核心问题展开</a:t>
             </a:r>
@@ -11347,8 +11959,8 @@
                 <a:solidFill>
                   <a:srgbClr val="333333"/>
                 </a:solidFill>
-                <a:latin typeface="PingFang SC"/>
-                <a:ea typeface="PingFang SC"/>
+                <a:latin typeface="Calibri"/>
+                <a:ea typeface="微软雅黑"/>
               </a:rPr>
               <a:t>●  </a:t>
             </a:r>
@@ -11357,8 +11969,8 @@
                 <a:solidFill>
                   <a:srgbClr val="333333"/>
                 </a:solidFill>
-                <a:latin typeface="PingFang SC"/>
-                <a:ea typeface="PingFang SC"/>
+                <a:latin typeface="Calibri"/>
+                <a:ea typeface="微软雅黑"/>
               </a:rPr>
               <a:t>研究背景与问题提出</a:t>
             </a:r>
@@ -11374,8 +11986,8 @@
                 <a:solidFill>
                   <a:srgbClr val="333333"/>
                 </a:solidFill>
-                <a:latin typeface="PingFang SC"/>
-                <a:ea typeface="PingFang SC"/>
+                <a:latin typeface="Calibri"/>
+                <a:ea typeface="微软雅黑"/>
               </a:rPr>
               <a:t>●  </a:t>
             </a:r>
@@ -11384,8 +11996,8 @@
                 <a:solidFill>
                   <a:srgbClr val="333333"/>
                 </a:solidFill>
-                <a:latin typeface="PingFang SC"/>
-                <a:ea typeface="PingFang SC"/>
+                <a:latin typeface="Calibri"/>
+                <a:ea typeface="微软雅黑"/>
               </a:rPr>
               <a:t>盘级故障预测：如何提前 30 天、低误报地检出 SSD 故障？</a:t>
             </a:r>
@@ -11401,8 +12013,8 @@
                 <a:solidFill>
                   <a:srgbClr val="666666"/>
                 </a:solidFill>
-                <a:latin typeface="PingFang SC"/>
-                <a:ea typeface="PingFang SC"/>
+                <a:latin typeface="Calibri"/>
+                <a:ea typeface="微软雅黑"/>
               </a:rPr>
               <a:t>◦  </a:t>
             </a:r>
@@ -11411,8 +12023,8 @@
                 <a:solidFill>
                   <a:srgbClr val="666666"/>
                 </a:solidFill>
-                <a:latin typeface="PingFang SC"/>
-                <a:ea typeface="PingFang SC"/>
+                <a:latin typeface="Calibri"/>
+                <a:ea typeface="微软雅黑"/>
               </a:rPr>
               <a:t>基于近端突变标注与异构集成，F</a:t>
             </a:r>
@@ -11421,8 +12033,8 @@
                 <a:solidFill>
                   <a:srgbClr val="666666"/>
                 </a:solidFill>
-                <a:latin typeface="PingFang SC"/>
-                <a:ea typeface="PingFang SC"/>
+                <a:latin typeface="Calibri"/>
+                <a:ea typeface="微软雅黑"/>
               </a:rPr>
               <a:t>0.5</a:t>
             </a:r>
@@ -11431,8 +12043,8 @@
                 <a:solidFill>
                   <a:srgbClr val="666666"/>
                 </a:solidFill>
-                <a:latin typeface="PingFang SC"/>
-                <a:ea typeface="PingFang SC"/>
+                <a:latin typeface="Calibri"/>
+                <a:ea typeface="微软雅黑"/>
               </a:rPr>
               <a:t> 目标 ≥ 0.9</a:t>
             </a:r>
@@ -11448,8 +12060,8 @@
                 <a:solidFill>
                   <a:srgbClr val="333333"/>
                 </a:solidFill>
-                <a:latin typeface="PingFang SC"/>
-                <a:ea typeface="PingFang SC"/>
+                <a:latin typeface="Calibri"/>
+                <a:ea typeface="微软雅黑"/>
               </a:rPr>
               <a:t>●  </a:t>
             </a:r>
@@ -11458,8 +12070,8 @@
                 <a:solidFill>
                   <a:srgbClr val="333333"/>
                 </a:solidFill>
-                <a:latin typeface="PingFang SC"/>
-                <a:ea typeface="PingFang SC"/>
+                <a:latin typeface="Calibri"/>
+                <a:ea typeface="微软雅黑"/>
               </a:rPr>
               <a:t>块级寿命优化：如何差异化利用闪存耐久，提升累计写入量？</a:t>
             </a:r>
@@ -11475,8 +12087,8 @@
                 <a:solidFill>
                   <a:srgbClr val="666666"/>
                 </a:solidFill>
-                <a:latin typeface="PingFang SC"/>
-                <a:ea typeface="PingFang SC"/>
+                <a:latin typeface="Calibri"/>
+                <a:ea typeface="微软雅黑"/>
               </a:rPr>
               <a:t>◦  </a:t>
             </a:r>
@@ -11485,8 +12097,8 @@
                 <a:solidFill>
                   <a:srgbClr val="666666"/>
                 </a:solidFill>
-                <a:latin typeface="PingFang SC"/>
-                <a:ea typeface="PingFang SC"/>
+                <a:latin typeface="Calibri"/>
+                <a:ea typeface="微软雅黑"/>
               </a:rPr>
               <a:t>基于早期 FBC 特征集成分类，写入量提升目标 ≥ 15%</a:t>
             </a:r>
@@ -11502,8 +12114,8 @@
                 <a:solidFill>
                   <a:srgbClr val="333333"/>
                 </a:solidFill>
-                <a:latin typeface="PingFang SC"/>
-                <a:ea typeface="PingFang SC"/>
+                <a:latin typeface="Calibri"/>
+                <a:ea typeface="微软雅黑"/>
               </a:rPr>
               <a:t>●  </a:t>
             </a:r>
@@ -11512,8 +12124,8 @@
                 <a:solidFill>
                   <a:srgbClr val="333333"/>
                 </a:solidFill>
-                <a:latin typeface="PingFang SC"/>
-                <a:ea typeface="PingFang SC"/>
+                <a:latin typeface="Calibri"/>
+                <a:ea typeface="微软雅黑"/>
               </a:rPr>
               <a:t>原型系统落地：如何把算法打通成完整的预警处置闭环？</a:t>
             </a:r>
@@ -11529,8 +12141,8 @@
                 <a:solidFill>
                   <a:srgbClr val="666666"/>
                 </a:solidFill>
-                <a:latin typeface="PingFang SC"/>
-                <a:ea typeface="PingFang SC"/>
+                <a:latin typeface="Calibri"/>
+                <a:ea typeface="微软雅黑"/>
               </a:rPr>
               <a:t>◦  </a:t>
             </a:r>
@@ -11539,8 +12151,8 @@
                 <a:solidFill>
                   <a:srgbClr val="666666"/>
                 </a:solidFill>
-                <a:latin typeface="PingFang SC"/>
-                <a:ea typeface="PingFang SC"/>
+                <a:latin typeface="Calibri"/>
+                <a:ea typeface="微软雅黑"/>
               </a:rPr>
               <a:t>Vue3 + Java + Python，数据接入→预警→处置全流程</a:t>
             </a:r>
@@ -11573,8 +12185,8 @@
                 <a:solidFill>
                   <a:srgbClr val="999999"/>
                 </a:solidFill>
-                <a:latin typeface="PingFang SC"/>
-                <a:ea typeface="PingFang SC"/>
+                <a:latin typeface="Calibri"/>
+                <a:ea typeface="微软雅黑"/>
               </a:rPr>
               <a:t>2</a:t>
             </a:r>
@@ -11668,8 +12280,8 @@
                 <a:solidFill>
                   <a:srgbClr val="0A1A3E"/>
                 </a:solidFill>
-                <a:latin typeface="PingFang SC"/>
-                <a:ea typeface="PingFang SC"/>
+                <a:latin typeface="Calibri"/>
+                <a:ea typeface="微软雅黑"/>
               </a:rPr>
               <a:t>F</a:t>
             </a:r>
@@ -11678,8 +12290,8 @@
                 <a:solidFill>
                   <a:srgbClr val="0A1A3E"/>
                 </a:solidFill>
-                <a:latin typeface="PingFang SC"/>
-                <a:ea typeface="PingFang SC"/>
+                <a:latin typeface="Calibri"/>
+                <a:ea typeface="微软雅黑"/>
               </a:rPr>
               <a:t>0.5</a:t>
             </a:r>
@@ -11688,8 +12300,8 @@
                 <a:solidFill>
                   <a:srgbClr val="0A1A3E"/>
                 </a:solidFill>
-                <a:latin typeface="PingFang SC"/>
-                <a:ea typeface="PingFang SC"/>
+                <a:latin typeface="Calibri"/>
+                <a:ea typeface="微软雅黑"/>
               </a:rPr>
               <a:t>=0.919 并列最优，FPR 降低 40%，Precision=0.981</a:t>
             </a:r>
@@ -11789,8 +12401,8 @@
                 <a:solidFill>
                   <a:srgbClr val="999999"/>
                 </a:solidFill>
-                <a:latin typeface="PingFang SC"/>
-                <a:ea typeface="PingFang SC"/>
+                <a:latin typeface="Calibri"/>
+                <a:ea typeface="微软雅黑"/>
               </a:rPr>
               <a:t>七种方法三轮平均对比</a:t>
             </a:r>
@@ -11827,8 +12439,8 @@
                 <a:solidFill>
                   <a:srgbClr val="0A1A3E"/>
                 </a:solidFill>
-                <a:latin typeface="PingFang SC"/>
-                <a:ea typeface="PingFang SC"/>
+                <a:latin typeface="Calibri"/>
+                <a:ea typeface="微软雅黑"/>
               </a:rPr>
               <a:t>分析要点</a:t>
             </a:r>
@@ -11844,8 +12456,8 @@
                 <a:solidFill>
                   <a:srgbClr val="333333"/>
                 </a:solidFill>
-                <a:latin typeface="PingFang SC"/>
-                <a:ea typeface="PingFang SC"/>
+                <a:latin typeface="Calibri"/>
+                <a:ea typeface="微软雅黑"/>
               </a:rPr>
               <a:t>●  </a:t>
             </a:r>
@@ -11854,8 +12466,8 @@
                 <a:solidFill>
                   <a:srgbClr val="333333"/>
                 </a:solidFill>
-                <a:latin typeface="PingFang SC"/>
-                <a:ea typeface="PingFang SC"/>
+                <a:latin typeface="Calibri"/>
+                <a:ea typeface="微软雅黑"/>
               </a:rPr>
               <a:t>F</a:t>
             </a:r>
@@ -11864,8 +12476,8 @@
                 <a:solidFill>
                   <a:srgbClr val="333333"/>
                 </a:solidFill>
-                <a:latin typeface="PingFang SC"/>
-                <a:ea typeface="PingFang SC"/>
+                <a:latin typeface="Calibri"/>
+                <a:ea typeface="微软雅黑"/>
               </a:rPr>
               <a:t>0.5</a:t>
             </a:r>
@@ -11874,8 +12486,8 @@
                 <a:solidFill>
                   <a:srgbClr val="333333"/>
                 </a:solidFill>
-                <a:latin typeface="PingFang SC"/>
-                <a:ea typeface="PingFang SC"/>
+                <a:latin typeface="Calibri"/>
+                <a:ea typeface="微软雅黑"/>
               </a:rPr>
               <a:t>=0.919，与最强基线 MVT-RF 并列最优</a:t>
             </a:r>
@@ -11891,8 +12503,8 @@
                 <a:solidFill>
                   <a:srgbClr val="333333"/>
                 </a:solidFill>
-                <a:latin typeface="PingFang SC"/>
-                <a:ea typeface="PingFang SC"/>
+                <a:latin typeface="Calibri"/>
+                <a:ea typeface="微软雅黑"/>
               </a:rPr>
               <a:t>●  </a:t>
             </a:r>
@@ -11901,8 +12513,8 @@
                 <a:solidFill>
                   <a:srgbClr val="333333"/>
                 </a:solidFill>
-                <a:latin typeface="PingFang SC"/>
-                <a:ea typeface="PingFang SC"/>
+                <a:latin typeface="Calibri"/>
+                <a:ea typeface="微软雅黑"/>
               </a:rPr>
               <a:t>FPR: 2.71×10</a:t>
             </a:r>
@@ -11911,8 +12523,8 @@
                 <a:solidFill>
                   <a:srgbClr val="333333"/>
                 </a:solidFill>
-                <a:latin typeface="PingFang SC"/>
-                <a:ea typeface="PingFang SC"/>
+                <a:latin typeface="Calibri"/>
+                <a:ea typeface="微软雅黑"/>
               </a:rPr>
               <a:t>-5</a:t>
             </a:r>
@@ -11921,8 +12533,8 @@
                 <a:solidFill>
                   <a:srgbClr val="333333"/>
                 </a:solidFill>
-                <a:latin typeface="PingFang SC"/>
-                <a:ea typeface="PingFang SC"/>
+                <a:latin typeface="Calibri"/>
+                <a:ea typeface="微软雅黑"/>
               </a:rPr>
               <a:t> vs MVT-RF 4.53×10</a:t>
             </a:r>
@@ -11931,8 +12543,8 @@
                 <a:solidFill>
                   <a:srgbClr val="333333"/>
                 </a:solidFill>
-                <a:latin typeface="PingFang SC"/>
-                <a:ea typeface="PingFang SC"/>
+                <a:latin typeface="Calibri"/>
+                <a:ea typeface="微软雅黑"/>
               </a:rPr>
               <a:t>-5</a:t>
             </a:r>
@@ -11941,8 +12553,8 @@
                 <a:solidFill>
                   <a:srgbClr val="333333"/>
                 </a:solidFill>
-                <a:latin typeface="PingFang SC"/>
-                <a:ea typeface="PingFang SC"/>
+                <a:latin typeface="Calibri"/>
+                <a:ea typeface="微软雅黑"/>
               </a:rPr>
               <a:t>，FPR 下降 40%</a:t>
             </a:r>
@@ -11958,8 +12570,8 @@
                 <a:solidFill>
                   <a:srgbClr val="333333"/>
                 </a:solidFill>
-                <a:latin typeface="PingFang SC"/>
-                <a:ea typeface="PingFang SC"/>
+                <a:latin typeface="Calibri"/>
+                <a:ea typeface="微软雅黑"/>
               </a:rPr>
               <a:t>●  </a:t>
             </a:r>
@@ -11968,8 +12580,8 @@
                 <a:solidFill>
                   <a:srgbClr val="333333"/>
                 </a:solidFill>
-                <a:latin typeface="PingFang SC"/>
-                <a:ea typeface="PingFang SC"/>
+                <a:latin typeface="Calibri"/>
+                <a:ea typeface="微软雅黑"/>
               </a:rPr>
               <a:t>Precision: 0.981 vs MVT-RF 0.967，高出 1.4 个百分点</a:t>
             </a:r>
@@ -11985,8 +12597,8 @@
                 <a:solidFill>
                   <a:srgbClr val="333333"/>
                 </a:solidFill>
-                <a:latin typeface="PingFang SC"/>
-                <a:ea typeface="PingFang SC"/>
+                <a:latin typeface="Calibri"/>
+                <a:ea typeface="微软雅黑"/>
               </a:rPr>
               <a:t>●  </a:t>
             </a:r>
@@ -11995,8 +12607,8 @@
                 <a:solidFill>
                   <a:srgbClr val="333333"/>
                 </a:solidFill>
-                <a:latin typeface="PingFang SC"/>
-                <a:ea typeface="PingFang SC"/>
+                <a:latin typeface="Calibri"/>
+                <a:ea typeface="微软雅黑"/>
               </a:rPr>
               <a:t>万盘集群中每十万次预测减少约 1.8 次假阳性换盘</a:t>
             </a:r>
@@ -12029,8 +12641,8 @@
                 <a:solidFill>
                   <a:srgbClr val="999999"/>
                 </a:solidFill>
-                <a:latin typeface="PingFang SC"/>
-                <a:ea typeface="PingFang SC"/>
+                <a:latin typeface="Calibri"/>
+                <a:ea typeface="微软雅黑"/>
               </a:rPr>
               <a:t>7 种方法三轮平均，F</a:t>
             </a:r>
@@ -12039,8 +12651,8 @@
                 <a:solidFill>
                   <a:srgbClr val="999999"/>
                 </a:solidFill>
-                <a:latin typeface="PingFang SC"/>
-                <a:ea typeface="PingFang SC"/>
+                <a:latin typeface="Calibri"/>
+                <a:ea typeface="微软雅黑"/>
               </a:rPr>
               <a:t>0.5</a:t>
             </a:r>
@@ -12049,8 +12661,8 @@
                 <a:solidFill>
                   <a:srgbClr val="999999"/>
                 </a:solidFill>
-                <a:latin typeface="PingFang SC"/>
-                <a:ea typeface="PingFang SC"/>
+                <a:latin typeface="Calibri"/>
+                <a:ea typeface="微软雅黑"/>
               </a:rPr>
               <a:t> 加权 F-score</a:t>
             </a:r>
@@ -12083,8 +12695,8 @@
                 <a:solidFill>
                   <a:srgbClr val="999999"/>
                 </a:solidFill>
-                <a:latin typeface="PingFang SC"/>
-                <a:ea typeface="PingFang SC"/>
+                <a:latin typeface="Calibri"/>
+                <a:ea typeface="微软雅黑"/>
               </a:rPr>
               <a:t>20</a:t>
             </a:r>
@@ -12178,8 +12790,8 @@
                 <a:solidFill>
                   <a:srgbClr val="0A1A3E"/>
                 </a:solidFill>
-                <a:latin typeface="PingFang SC"/>
-                <a:ea typeface="PingFang SC"/>
+                <a:latin typeface="Calibri"/>
+                <a:ea typeface="微软雅黑"/>
               </a:rPr>
               <a:t>MB1 最优 (W=1, k=2)，TP 提前量集中在故障前 1 天</a:t>
             </a:r>
@@ -12279,8 +12891,8 @@
                 <a:solidFill>
                   <a:srgbClr val="999999"/>
                 </a:solidFill>
-                <a:latin typeface="PingFang SC"/>
-                <a:ea typeface="PingFang SC"/>
+                <a:latin typeface="Calibri"/>
+                <a:ea typeface="微软雅黑"/>
               </a:rPr>
               <a:t>W-k 超参灵敏度热力图</a:t>
             </a:r>
@@ -12317,8 +12929,8 @@
                 <a:solidFill>
                   <a:srgbClr val="0A1A3E"/>
                 </a:solidFill>
-                <a:latin typeface="PingFang SC"/>
-                <a:ea typeface="PingFang SC"/>
+                <a:latin typeface="Calibri"/>
+                <a:ea typeface="微软雅黑"/>
               </a:rPr>
               <a:t>W-k 超参灵敏度</a:t>
             </a:r>
@@ -12334,8 +12946,8 @@
                 <a:solidFill>
                   <a:srgbClr val="333333"/>
                 </a:solidFill>
-                <a:latin typeface="PingFang SC"/>
-                <a:ea typeface="PingFang SC"/>
+                <a:latin typeface="Calibri"/>
+                <a:ea typeface="微软雅黑"/>
               </a:rPr>
               <a:t>●  </a:t>
             </a:r>
@@ -12344,8 +12956,8 @@
                 <a:solidFill>
                   <a:srgbClr val="333333"/>
                 </a:solidFill>
-                <a:latin typeface="PingFang SC"/>
-                <a:ea typeface="PingFang SC"/>
+                <a:latin typeface="Calibri"/>
+                <a:ea typeface="微软雅黑"/>
               </a:rPr>
               <a:t>MB1 峰值 F</a:t>
             </a:r>
@@ -12354,8 +12966,8 @@
                 <a:solidFill>
                   <a:srgbClr val="333333"/>
                 </a:solidFill>
-                <a:latin typeface="PingFang SC"/>
-                <a:ea typeface="PingFang SC"/>
+                <a:latin typeface="Calibri"/>
+                <a:ea typeface="微软雅黑"/>
               </a:rPr>
               <a:t>0.5</a:t>
             </a:r>
@@ -12364,8 +12976,8 @@
                 <a:solidFill>
                   <a:srgbClr val="333333"/>
                 </a:solidFill>
-                <a:latin typeface="PingFang SC"/>
-                <a:ea typeface="PingFang SC"/>
+                <a:latin typeface="Calibri"/>
+                <a:ea typeface="微软雅黑"/>
               </a:rPr>
               <a:t>=0.918 落在 (W=1, k=2)，MB2 落在 (2, 2)</a:t>
             </a:r>
@@ -12381,8 +12993,8 @@
                 <a:solidFill>
                   <a:srgbClr val="333333"/>
                 </a:solidFill>
-                <a:latin typeface="PingFang SC"/>
-                <a:ea typeface="PingFang SC"/>
+                <a:latin typeface="Calibri"/>
+                <a:ea typeface="微软雅黑"/>
               </a:rPr>
               <a:t>●  </a:t>
             </a:r>
@@ -12391,8 +13003,8 @@
                 <a:solidFill>
                   <a:srgbClr val="333333"/>
                 </a:solidFill>
-                <a:latin typeface="PingFang SC"/>
-                <a:ea typeface="PingFang SC"/>
+                <a:latin typeface="Calibri"/>
+                <a:ea typeface="微软雅黑"/>
               </a:rPr>
               <a:t>W≥1 区域整体维持高位，性能对超参扰动不敏感</a:t>
             </a:r>
@@ -12449,8 +13061,8 @@
                 <a:solidFill>
                   <a:srgbClr val="999999"/>
                 </a:solidFill>
-                <a:latin typeface="PingFang SC"/>
-                <a:ea typeface="PingFang SC"/>
+                <a:latin typeface="Calibri"/>
+                <a:ea typeface="微软雅黑"/>
               </a:rPr>
               <a:t>测试集 TP 提前天数分布</a:t>
             </a:r>
@@ -12487,8 +13099,8 @@
                 <a:solidFill>
                   <a:srgbClr val="0A1A3E"/>
                 </a:solidFill>
-                <a:latin typeface="PingFang SC"/>
-                <a:ea typeface="PingFang SC"/>
+                <a:latin typeface="Calibri"/>
+                <a:ea typeface="微软雅黑"/>
               </a:rPr>
               <a:t>TP 预警提前量分布</a:t>
             </a:r>
@@ -12504,8 +13116,8 @@
                 <a:solidFill>
                   <a:srgbClr val="333333"/>
                 </a:solidFill>
-                <a:latin typeface="PingFang SC"/>
-                <a:ea typeface="PingFang SC"/>
+                <a:latin typeface="Calibri"/>
+                <a:ea typeface="微软雅黑"/>
               </a:rPr>
               <a:t>●  </a:t>
             </a:r>
@@ -12514,8 +13126,8 @@
                 <a:solidFill>
                   <a:srgbClr val="333333"/>
                 </a:solidFill>
-                <a:latin typeface="PingFang SC"/>
-                <a:ea typeface="PingFang SC"/>
+                <a:latin typeface="Calibri"/>
+                <a:ea typeface="微软雅黑"/>
               </a:rPr>
               <a:t>提前量中位数 1 天，148 块 TP 中 146 块在 d≤1 检出</a:t>
             </a:r>
@@ -12531,8 +13143,8 @@
                 <a:solidFill>
                   <a:srgbClr val="333333"/>
                 </a:solidFill>
-                <a:latin typeface="PingFang SC"/>
-                <a:ea typeface="PingFang SC"/>
+                <a:latin typeface="Calibri"/>
+                <a:ea typeface="微软雅黑"/>
               </a:rPr>
               <a:t>●  </a:t>
             </a:r>
@@ -12541,8 +13153,8 @@
                 <a:solidFill>
                   <a:srgbClr val="333333"/>
                 </a:solidFill>
-                <a:latin typeface="PingFang SC"/>
-                <a:ea typeface="PingFang SC"/>
+                <a:latin typeface="Calibri"/>
+                <a:ea typeface="微软雅黑"/>
               </a:rPr>
               <a:t>告警紧贴故障日，误报低但数据迁移窗口有限</a:t>
             </a:r>
@@ -12575,8 +13187,8 @@
                 <a:solidFill>
                   <a:srgbClr val="999999"/>
                 </a:solidFill>
-                <a:latin typeface="PingFang SC"/>
-                <a:ea typeface="PingFang SC"/>
+                <a:latin typeface="Calibri"/>
+                <a:ea typeface="微软雅黑"/>
               </a:rPr>
               <a:t>21</a:t>
             </a:r>
@@ -12670,8 +13282,8 @@
                 <a:solidFill>
                   <a:srgbClr val="0A1A3E"/>
                 </a:solidFill>
-                <a:latin typeface="PingFang SC"/>
-                <a:ea typeface="PingFang SC"/>
+                <a:latin typeface="Calibri"/>
+                <a:ea typeface="微软雅黑"/>
               </a:rPr>
               <a:t>分轮分方法 TP 提前量热力图揭示检出集中在近端</a:t>
             </a:r>
@@ -12771,8 +13383,8 @@
                 <a:solidFill>
                   <a:srgbClr val="999999"/>
                 </a:solidFill>
-                <a:latin typeface="PingFang SC"/>
-                <a:ea typeface="PingFang SC"/>
+                <a:latin typeface="Calibri"/>
+                <a:ea typeface="微软雅黑"/>
               </a:rPr>
               <a:t>分轮分方法 TP 提前天数热力图</a:t>
             </a:r>
@@ -12809,8 +13421,8 @@
                 <a:solidFill>
                   <a:srgbClr val="0A1A3E"/>
                 </a:solidFill>
-                <a:latin typeface="PingFang SC"/>
-                <a:ea typeface="PingFang SC"/>
+                <a:latin typeface="Calibri"/>
+                <a:ea typeface="微软雅黑"/>
               </a:rPr>
               <a:t>分析要点</a:t>
             </a:r>
@@ -12826,8 +13438,8 @@
                 <a:solidFill>
                   <a:srgbClr val="333333"/>
                 </a:solidFill>
-                <a:latin typeface="PingFang SC"/>
-                <a:ea typeface="PingFang SC"/>
+                <a:latin typeface="Calibri"/>
+                <a:ea typeface="微软雅黑"/>
               </a:rPr>
               <a:t>●  </a:t>
             </a:r>
@@ -12836,8 +13448,8 @@
                 <a:solidFill>
                   <a:srgbClr val="333333"/>
                 </a:solidFill>
-                <a:latin typeface="PingFang SC"/>
-                <a:ea typeface="PingFang SC"/>
+                <a:latin typeface="Calibri"/>
+                <a:ea typeface="微软雅黑"/>
               </a:rPr>
               <a:t>R3 检出最多，d=1 天共 51 盘</a:t>
             </a:r>
@@ -12853,8 +13465,8 @@
                 <a:solidFill>
                   <a:srgbClr val="333333"/>
                 </a:solidFill>
-                <a:latin typeface="PingFang SC"/>
-                <a:ea typeface="PingFang SC"/>
+                <a:latin typeface="Calibri"/>
+                <a:ea typeface="微软雅黑"/>
               </a:rPr>
               <a:t>●  </a:t>
             </a:r>
@@ -12863,8 +13475,8 @@
                 <a:solidFill>
                   <a:srgbClr val="333333"/>
                 </a:solidFill>
-                <a:latin typeface="PingFang SC"/>
-                <a:ea typeface="PingFang SC"/>
+                <a:latin typeface="Calibri"/>
+                <a:ea typeface="微软雅黑"/>
               </a:rPr>
               <a:t>三轮 TP 合计 148 盘（测试集故障盘共 224 块）</a:t>
             </a:r>
@@ -12880,8 +13492,8 @@
                 <a:solidFill>
                   <a:srgbClr val="333333"/>
                 </a:solidFill>
-                <a:latin typeface="PingFang SC"/>
-                <a:ea typeface="PingFang SC"/>
+                <a:latin typeface="Calibri"/>
+                <a:ea typeface="微软雅黑"/>
               </a:rPr>
               <a:t>●  </a:t>
             </a:r>
@@ -12890,8 +13502,8 @@
                 <a:solidFill>
                   <a:srgbClr val="333333"/>
                 </a:solidFill>
-                <a:latin typeface="PingFang SC"/>
-                <a:ea typeface="PingFang SC"/>
+                <a:latin typeface="Calibri"/>
+                <a:ea typeface="微软雅黑"/>
               </a:rPr>
               <a:t>检出盘提前量高度集中在 d≤1 天，与混合标注短窗策略一致</a:t>
             </a:r>
@@ -12907,8 +13519,8 @@
                 <a:solidFill>
                   <a:srgbClr val="333333"/>
                 </a:solidFill>
-                <a:latin typeface="PingFang SC"/>
-                <a:ea typeface="PingFang SC"/>
+                <a:latin typeface="Calibri"/>
+                <a:ea typeface="微软雅黑"/>
               </a:rPr>
               <a:t>●  </a:t>
             </a:r>
@@ -12917,8 +13529,8 @@
                 <a:solidFill>
                   <a:srgbClr val="333333"/>
                 </a:solidFill>
-                <a:latin typeface="PingFang SC"/>
-                <a:ea typeface="PingFang SC"/>
+                <a:latin typeface="Calibri"/>
+                <a:ea typeface="微软雅黑"/>
               </a:rPr>
               <a:t>告警紧贴故障日，误报极低，留给数据迁移的时间窗口有限</a:t>
             </a:r>
@@ -12951,8 +13563,8 @@
                 <a:solidFill>
                   <a:srgbClr val="999999"/>
                 </a:solidFill>
-                <a:latin typeface="PingFang SC"/>
-                <a:ea typeface="PingFang SC"/>
+                <a:latin typeface="Calibri"/>
+                <a:ea typeface="微软雅黑"/>
               </a:rPr>
               <a:t>测试集分轮分方法 TP 预警提前天数热力图</a:t>
             </a:r>
@@ -12985,8 +13597,8 @@
                 <a:solidFill>
                   <a:srgbClr val="999999"/>
                 </a:solidFill>
-                <a:latin typeface="PingFang SC"/>
-                <a:ea typeface="PingFang SC"/>
+                <a:latin typeface="Calibri"/>
+                <a:ea typeface="微软雅黑"/>
               </a:rPr>
               <a:t>22</a:t>
             </a:r>
@@ -13080,8 +13692,8 @@
                 <a:solidFill>
                   <a:srgbClr val="0A1A3E"/>
                 </a:solidFill>
-                <a:latin typeface="PingFang SC"/>
-                <a:ea typeface="PingFang SC"/>
+                <a:latin typeface="Calibri"/>
+                <a:ea typeface="微软雅黑"/>
               </a:rPr>
               <a:t>第三章小结：混合标注+突变特征+异构集成三层衔接</a:t>
             </a:r>
@@ -13161,8 +13773,8 @@
                 <a:solidFill>
                   <a:srgbClr val="333333"/>
                 </a:solidFill>
-                <a:latin typeface="PingFang SC"/>
-                <a:ea typeface="PingFang SC"/>
+                <a:latin typeface="Calibri"/>
+                <a:ea typeface="微软雅黑"/>
               </a:rPr>
               <a:t>●  </a:t>
             </a:r>
@@ -13171,8 +13783,8 @@
                 <a:solidFill>
                   <a:srgbClr val="333333"/>
                 </a:solidFill>
-                <a:latin typeface="PingFang SC"/>
-                <a:ea typeface="PingFang SC"/>
+                <a:latin typeface="Calibri"/>
+                <a:ea typeface="微软雅黑"/>
               </a:rPr>
               <a:t>混合标注 + 突变特征 + 异构集成三层衔接方案</a:t>
             </a:r>
@@ -13188,8 +13800,8 @@
                 <a:solidFill>
                   <a:srgbClr val="666666"/>
                 </a:solidFill>
-                <a:latin typeface="PingFang SC"/>
-                <a:ea typeface="PingFang SC"/>
+                <a:latin typeface="Calibri"/>
+                <a:ea typeface="微软雅黑"/>
               </a:rPr>
               <a:t>◦  </a:t>
             </a:r>
@@ -13198,8 +13810,8 @@
                 <a:solidFill>
                   <a:srgbClr val="666666"/>
                 </a:solidFill>
-                <a:latin typeface="PingFang SC"/>
-                <a:ea typeface="PingFang SC"/>
+                <a:latin typeface="Calibri"/>
+                <a:ea typeface="微软雅黑"/>
               </a:rPr>
               <a:t>近端突变标注消除长窗稀释，B 组 r</a:t>
             </a:r>
@@ -13208,8 +13820,8 @@
                 <a:solidFill>
                   <a:srgbClr val="666666"/>
                 </a:solidFill>
-                <a:latin typeface="PingFang SC"/>
-                <a:ea typeface="PingFang SC"/>
+                <a:latin typeface="Calibri"/>
+                <a:ea typeface="微软雅黑"/>
               </a:rPr>
               <a:t>k</a:t>
             </a:r>
@@ -13218,8 +13830,8 @@
                 <a:solidFill>
                   <a:srgbClr val="666666"/>
                 </a:solidFill>
-                <a:latin typeface="PingFang SC"/>
-                <a:ea typeface="PingFang SC"/>
+                <a:latin typeface="Calibri"/>
+                <a:ea typeface="微软雅黑"/>
               </a:rPr>
               <a:t>|Δ| 捕捉 1-3 天突变信号</a:t>
             </a:r>
@@ -13235,8 +13847,8 @@
                 <a:solidFill>
                   <a:srgbClr val="333333"/>
                 </a:solidFill>
-                <a:latin typeface="PingFang SC"/>
-                <a:ea typeface="PingFang SC"/>
+                <a:latin typeface="Calibri"/>
+                <a:ea typeface="微软雅黑"/>
               </a:rPr>
               <a:t>●  </a:t>
             </a:r>
@@ -13245,8 +13857,8 @@
                 <a:solidFill>
                   <a:srgbClr val="333333"/>
                 </a:solidFill>
-                <a:latin typeface="PingFang SC"/>
-                <a:ea typeface="PingFang SC"/>
+                <a:latin typeface="Calibri"/>
+                <a:ea typeface="微软雅黑"/>
               </a:rPr>
               <a:t>MB1: F</a:t>
             </a:r>
@@ -13255,8 +13867,8 @@
                 <a:solidFill>
                   <a:srgbClr val="333333"/>
                 </a:solidFill>
-                <a:latin typeface="PingFang SC"/>
-                <a:ea typeface="PingFang SC"/>
+                <a:latin typeface="Calibri"/>
+                <a:ea typeface="微软雅黑"/>
               </a:rPr>
               <a:t>0.5</a:t>
             </a:r>
@@ -13265,8 +13877,8 @@
                 <a:solidFill>
                   <a:srgbClr val="333333"/>
                 </a:solidFill>
-                <a:latin typeface="PingFang SC"/>
-                <a:ea typeface="PingFang SC"/>
+                <a:latin typeface="Calibri"/>
+                <a:ea typeface="微软雅黑"/>
               </a:rPr>
               <a:t>=0.919 与最强基线并列最优，FPR 降低 40%</a:t>
             </a:r>
@@ -13282,8 +13894,8 @@
                 <a:solidFill>
                   <a:srgbClr val="666666"/>
                 </a:solidFill>
-                <a:latin typeface="PingFang SC"/>
-                <a:ea typeface="PingFang SC"/>
+                <a:latin typeface="Calibri"/>
+                <a:ea typeface="微软雅黑"/>
               </a:rPr>
               <a:t>◦  </a:t>
             </a:r>
@@ -13292,8 +13904,8 @@
                 <a:solidFill>
                   <a:srgbClr val="666666"/>
                 </a:solidFill>
-                <a:latin typeface="PingFang SC"/>
-                <a:ea typeface="PingFang SC"/>
+                <a:latin typeface="Calibri"/>
+                <a:ea typeface="微软雅黑"/>
               </a:rPr>
               <a:t>更低 FPR、更高 Precision，契合运维低误报约束</a:t>
             </a:r>
@@ -13309,8 +13921,8 @@
                 <a:solidFill>
                   <a:srgbClr val="333333"/>
                 </a:solidFill>
-                <a:latin typeface="PingFang SC"/>
-                <a:ea typeface="PingFang SC"/>
+                <a:latin typeface="Calibri"/>
+                <a:ea typeface="微软雅黑"/>
               </a:rPr>
               <a:t>●  </a:t>
             </a:r>
@@ -13319,8 +13931,8 @@
                 <a:solidFill>
                   <a:srgbClr val="333333"/>
                 </a:solidFill>
-                <a:latin typeface="PingFang SC"/>
-                <a:ea typeface="PingFang SC"/>
+                <a:latin typeface="Calibri"/>
+                <a:ea typeface="微软雅黑"/>
               </a:rPr>
               <a:t>消融实验全面验证各组件有效性</a:t>
             </a:r>
@@ -13336,8 +13948,8 @@
                 <a:solidFill>
                   <a:srgbClr val="666666"/>
                 </a:solidFill>
-                <a:latin typeface="PingFang SC"/>
-                <a:ea typeface="PingFang SC"/>
+                <a:latin typeface="Calibri"/>
+                <a:ea typeface="微软雅黑"/>
               </a:rPr>
               <a:t>◦  </a:t>
             </a:r>
@@ -13346,8 +13958,8 @@
                 <a:solidFill>
                   <a:srgbClr val="666666"/>
                 </a:solidFill>
-                <a:latin typeface="PingFang SC"/>
-                <a:ea typeface="PingFang SC"/>
+                <a:latin typeface="Calibri"/>
+                <a:ea typeface="微软雅黑"/>
               </a:rPr>
               <a:t>标注策略、突变特征、集成模型各自贡献均可量化</a:t>
             </a:r>
@@ -13363,8 +13975,8 @@
                 <a:solidFill>
                   <a:srgbClr val="333333"/>
                 </a:solidFill>
-                <a:latin typeface="PingFang SC"/>
-                <a:ea typeface="PingFang SC"/>
+                <a:latin typeface="Calibri"/>
+                <a:ea typeface="微软雅黑"/>
               </a:rPr>
               <a:t>●  </a:t>
             </a:r>
@@ -13373,8 +13985,8 @@
                 <a:solidFill>
                   <a:srgbClr val="333333"/>
                 </a:solidFill>
-                <a:latin typeface="PingFang SC"/>
-                <a:ea typeface="PingFang SC"/>
+                <a:latin typeface="Calibri"/>
+                <a:ea typeface="微软雅黑"/>
               </a:rPr>
               <a:t>适用边界：仅在阿里云 MLC-SSD 子集上验证，跨型号泛化待考</a:t>
             </a:r>
@@ -13407,8 +14019,8 @@
                 <a:solidFill>
                   <a:srgbClr val="999999"/>
                 </a:solidFill>
-                <a:latin typeface="PingFang SC"/>
-                <a:ea typeface="PingFang SC"/>
+                <a:latin typeface="Calibri"/>
+                <a:ea typeface="微软雅黑"/>
               </a:rPr>
               <a:t>23</a:t>
             </a:r>
@@ -13502,8 +14114,8 @@
                 <a:solidFill>
                   <a:srgbClr val="0A1A3E"/>
                 </a:solidFill>
-                <a:latin typeface="PingFang SC"/>
-                <a:ea typeface="PingFang SC"/>
+                <a:latin typeface="Calibri"/>
+                <a:ea typeface="微软雅黑"/>
               </a:rPr>
               <a:t>第四章：块级寿命优化</a:t>
             </a:r>
@@ -13536,8 +14148,8 @@
                 <a:solidFill>
                   <a:srgbClr val="666666"/>
                 </a:solidFill>
-                <a:latin typeface="PingFang SC"/>
-                <a:ea typeface="PingFang SC"/>
+                <a:latin typeface="Calibri"/>
+                <a:ea typeface="微软雅黑"/>
               </a:rPr>
               <a:t>FBC 特征驱动强/弱块分类 → 差异化 PE 管控 → 写入量提升约 17%</a:t>
             </a:r>
@@ -13631,8 +14243,8 @@
                 <a:solidFill>
                   <a:srgbClr val="0A1A3E"/>
                 </a:solidFill>
-                <a:latin typeface="PingFang SC"/>
-                <a:ea typeface="PingFang SC"/>
+                <a:latin typeface="Calibri"/>
+                <a:ea typeface="微软雅黑"/>
               </a:rPr>
               <a:t>实验室 85°C 加速磨损：256 逻辑块 × 10 PE 档位 FBC 时序</a:t>
             </a:r>
@@ -13732,8 +14344,8 @@
                 <a:solidFill>
                   <a:srgbClr val="999999"/>
                 </a:solidFill>
-                <a:latin typeface="PingFang SC"/>
-                <a:ea typeface="PingFang SC"/>
+                <a:latin typeface="Calibri"/>
+                <a:ea typeface="微软雅黑"/>
               </a:rPr>
               <a:t>BlockFilter 分组逻辑示意</a:t>
             </a:r>
@@ -13770,8 +14382,8 @@
                 <a:solidFill>
                   <a:srgbClr val="0A1A3E"/>
                 </a:solidFill>
-                <a:latin typeface="PingFang SC"/>
-                <a:ea typeface="PingFang SC"/>
+                <a:latin typeface="Calibri"/>
+                <a:ea typeface="微软雅黑"/>
               </a:rPr>
               <a:t>分析要点</a:t>
             </a:r>
@@ -13787,8 +14399,8 @@
                 <a:solidFill>
                   <a:srgbClr val="333333"/>
                 </a:solidFill>
-                <a:latin typeface="PingFang SC"/>
-                <a:ea typeface="PingFang SC"/>
+                <a:latin typeface="Calibri"/>
+                <a:ea typeface="微软雅黑"/>
               </a:rPr>
               <a:t>●  </a:t>
             </a:r>
@@ -13797,8 +14409,8 @@
                 <a:solidFill>
                   <a:srgbClr val="333333"/>
                 </a:solidFill>
-                <a:latin typeface="PingFang SC"/>
-                <a:ea typeface="PingFang SC"/>
+                <a:latin typeface="Calibri"/>
+                <a:ea typeface="微软雅黑"/>
               </a:rPr>
               <a:t>TLC SSD，85°C 高温 + 9:1 快慢磨损模拟实际场景</a:t>
             </a:r>
@@ -13814,8 +14426,8 @@
                 <a:solidFill>
                   <a:srgbClr val="333333"/>
                 </a:solidFill>
-                <a:latin typeface="PingFang SC"/>
-                <a:ea typeface="PingFang SC"/>
+                <a:latin typeface="Calibri"/>
+                <a:ea typeface="微软雅黑"/>
               </a:rPr>
               <a:t>●  </a:t>
             </a:r>
@@ -13824,8 +14436,8 @@
                 <a:solidFill>
                   <a:srgbClr val="333333"/>
                 </a:solidFill>
-                <a:latin typeface="PingFang SC"/>
-                <a:ea typeface="PingFang SC"/>
+                <a:latin typeface="Calibri"/>
+                <a:ea typeface="微软雅黑"/>
               </a:rPr>
               <a:t>10 个 PE 档位（0–10K），每 Die 取 10 Block 连续区域</a:t>
             </a:r>
@@ -13841,8 +14453,8 @@
                 <a:solidFill>
                   <a:srgbClr val="333333"/>
                 </a:solidFill>
-                <a:latin typeface="PingFang SC"/>
-                <a:ea typeface="PingFang SC"/>
+                <a:latin typeface="Calibri"/>
+                <a:ea typeface="微软雅黑"/>
               </a:rPr>
               <a:t>●  </a:t>
             </a:r>
@@ -13851,8 +14463,8 @@
                 <a:solidFill>
                   <a:srgbClr val="333333"/>
                 </a:solidFill>
-                <a:latin typeface="PingFang SC"/>
-                <a:ea typeface="PingFang SC"/>
+                <a:latin typeface="Calibri"/>
+                <a:ea typeface="微软雅黑"/>
               </a:rPr>
               <a:t>BlockFilter mod 4 分组重建 256 个逻辑块</a:t>
             </a:r>
@@ -13868,8 +14480,8 @@
                 <a:solidFill>
                   <a:srgbClr val="333333"/>
                 </a:solidFill>
-                <a:latin typeface="PingFang SC"/>
-                <a:ea typeface="PingFang SC"/>
+                <a:latin typeface="Calibri"/>
+                <a:ea typeface="微软雅黑"/>
               </a:rPr>
               <a:t>●  </a:t>
             </a:r>
@@ -13878,8 +14490,8 @@
                 <a:solidFill>
                   <a:srgbClr val="333333"/>
                 </a:solidFill>
-                <a:latin typeface="PingFang SC"/>
-                <a:ea typeface="PingFang SC"/>
+                <a:latin typeface="Calibri"/>
+                <a:ea typeface="微软雅黑"/>
               </a:rPr>
               <a:t>字段：Level / ReadType / PageType / WL / FBC 等</a:t>
             </a:r>
@@ -13895,8 +14507,8 @@
                 <a:solidFill>
                   <a:srgbClr val="333333"/>
                 </a:solidFill>
-                <a:latin typeface="PingFang SC"/>
-                <a:ea typeface="PingFang SC"/>
+                <a:latin typeface="Calibri"/>
+                <a:ea typeface="微软雅黑"/>
               </a:rPr>
               <a:t>●  </a:t>
             </a:r>
@@ -13905,8 +14517,8 @@
                 <a:solidFill>
                   <a:srgbClr val="333333"/>
                 </a:solidFill>
-                <a:latin typeface="PingFang SC"/>
-                <a:ea typeface="PingFang SC"/>
+                <a:latin typeface="Calibri"/>
+                <a:ea typeface="微软雅黑"/>
               </a:rPr>
               <a:t>256 块中强块 251、弱块仅 5，分布高度不平衡</a:t>
             </a:r>
@@ -13939,8 +14551,8 @@
                 <a:solidFill>
                   <a:srgbClr val="999999"/>
                 </a:solidFill>
-                <a:latin typeface="PingFang SC"/>
-                <a:ea typeface="PingFang SC"/>
+                <a:latin typeface="Calibri"/>
+                <a:ea typeface="微软雅黑"/>
               </a:rPr>
               <a:t>块分组逻辑示意</a:t>
             </a:r>
@@ -13973,8 +14585,8 @@
                 <a:solidFill>
                   <a:srgbClr val="999999"/>
                 </a:solidFill>
-                <a:latin typeface="PingFang SC"/>
-                <a:ea typeface="PingFang SC"/>
+                <a:latin typeface="Calibri"/>
+                <a:ea typeface="微软雅黑"/>
               </a:rPr>
               <a:t>25</a:t>
             </a:r>
@@ -14068,8 +14680,8 @@
                 <a:solidFill>
                   <a:srgbClr val="0A1A3E"/>
                 </a:solidFill>
-                <a:latin typeface="PingFang SC"/>
-                <a:ea typeface="PingFang SC"/>
+                <a:latin typeface="Calibri"/>
+                <a:ea typeface="微软雅黑"/>
               </a:rPr>
               <a:t>块级 FBC 分布差异驱动强/弱块二分类，差异化 PE 使累计写入提升约 17%</a:t>
             </a:r>
@@ -14169,8 +14781,8 @@
                 <a:solidFill>
                   <a:srgbClr val="999999"/>
                 </a:solidFill>
-                <a:latin typeface="PingFang SC"/>
-                <a:ea typeface="PingFang SC"/>
+                <a:latin typeface="Calibri"/>
+                <a:ea typeface="微软雅黑"/>
               </a:rPr>
               <a:t>块间 PE 耐受差异</a:t>
             </a:r>
@@ -14207,8 +14819,8 @@
                 <a:solidFill>
                   <a:srgbClr val="0A1A3E"/>
                 </a:solidFill>
-                <a:latin typeface="PingFang SC"/>
-                <a:ea typeface="PingFang SC"/>
+                <a:latin typeface="Calibri"/>
+                <a:ea typeface="微软雅黑"/>
               </a:rPr>
               <a:t>数据观察：统一阈值闲置强块余量</a:t>
             </a:r>
@@ -14224,8 +14836,8 @@
                 <a:solidFill>
                   <a:srgbClr val="333333"/>
                 </a:solidFill>
-                <a:latin typeface="PingFang SC"/>
-                <a:ea typeface="PingFang SC"/>
+                <a:latin typeface="Calibri"/>
+                <a:ea typeface="微软雅黑"/>
               </a:rPr>
               <a:t>●  </a:t>
             </a:r>
@@ -14234,8 +14846,8 @@
                 <a:solidFill>
                   <a:srgbClr val="333333"/>
                 </a:solidFill>
-                <a:latin typeface="PingFang SC"/>
-                <a:ea typeface="PingFang SC"/>
+                <a:latin typeface="Calibri"/>
+                <a:ea typeface="微软雅黑"/>
               </a:rPr>
               <a:t>块间 PE 耐受差异显著，最高与最低相差 1500 次</a:t>
             </a:r>
@@ -14251,8 +14863,8 @@
                 <a:solidFill>
                   <a:srgbClr val="333333"/>
                 </a:solidFill>
-                <a:latin typeface="PingFang SC"/>
-                <a:ea typeface="PingFang SC"/>
+                <a:latin typeface="Calibri"/>
+                <a:ea typeface="微软雅黑"/>
               </a:rPr>
               <a:t>●  </a:t>
             </a:r>
@@ -14261,8 +14873,8 @@
                 <a:solidFill>
                   <a:srgbClr val="333333"/>
                 </a:solidFill>
-                <a:latin typeface="PingFang SC"/>
-                <a:ea typeface="PingFang SC"/>
+                <a:latin typeface="Calibri"/>
+                <a:ea typeface="微软雅黑"/>
               </a:rPr>
               <a:t>8500 统一阈值下强块剩余写入余量被完全浪费</a:t>
             </a:r>
@@ -14278,8 +14890,8 @@
                 <a:solidFill>
                   <a:srgbClr val="333333"/>
                 </a:solidFill>
-                <a:latin typeface="PingFang SC"/>
-                <a:ea typeface="PingFang SC"/>
+                <a:latin typeface="Calibri"/>
+                <a:ea typeface="微软雅黑"/>
               </a:rPr>
               <a:t>●  </a:t>
             </a:r>
@@ -14288,8 +14900,8 @@
                 <a:solidFill>
                   <a:srgbClr val="333333"/>
                 </a:solidFill>
-                <a:latin typeface="PingFang SC"/>
-                <a:ea typeface="PingFang SC"/>
+                <a:latin typeface="Calibri"/>
+                <a:ea typeface="微软雅黑"/>
               </a:rPr>
               <a:t>该差异驱动按块分层配置 PE 上限</a:t>
             </a:r>
@@ -14346,8 +14958,8 @@
                 <a:solidFill>
                   <a:srgbClr val="999999"/>
                 </a:solidFill>
-                <a:latin typeface="PingFang SC"/>
-                <a:ea typeface="PingFang SC"/>
+                <a:latin typeface="Calibri"/>
+                <a:ea typeface="微软雅黑"/>
               </a:rPr>
               <a:t>FBC 特征→强/弱块标签流程</a:t>
             </a:r>
@@ -14384,8 +14996,8 @@
                 <a:solidFill>
                   <a:srgbClr val="0A1A3E"/>
                 </a:solidFill>
-                <a:latin typeface="PingFang SC"/>
-                <a:ea typeface="PingFang SC"/>
+                <a:latin typeface="Calibri"/>
+                <a:ea typeface="微软雅黑"/>
               </a:rPr>
               <a:t>策略：FBC 特征→强/弱块标签</a:t>
             </a:r>
@@ -14401,8 +15013,8 @@
                 <a:solidFill>
                   <a:srgbClr val="333333"/>
                 </a:solidFill>
-                <a:latin typeface="PingFang SC"/>
-                <a:ea typeface="PingFang SC"/>
+                <a:latin typeface="Calibri"/>
+                <a:ea typeface="微软雅黑"/>
               </a:rPr>
               <a:t>●  </a:t>
             </a:r>
@@ -14411,8 +15023,8 @@
                 <a:solidFill>
                   <a:srgbClr val="333333"/>
                 </a:solidFill>
-                <a:latin typeface="PingFang SC"/>
-                <a:ea typeface="PingFang SC"/>
+                <a:latin typeface="Calibri"/>
+                <a:ea typeface="微软雅黑"/>
               </a:rPr>
               <a:t>4 个早期 PE 档位（0/1000/2000/3000）采集 FBC 统计特征</a:t>
             </a:r>
@@ -14428,8 +15040,8 @@
                 <a:solidFill>
                   <a:srgbClr val="333333"/>
                 </a:solidFill>
-                <a:latin typeface="PingFang SC"/>
-                <a:ea typeface="PingFang SC"/>
+                <a:latin typeface="Calibri"/>
+                <a:ea typeface="微软雅黑"/>
               </a:rPr>
               <a:t>●  </a:t>
             </a:r>
@@ -14438,8 +15050,8 @@
                 <a:solidFill>
                   <a:srgbClr val="333333"/>
                 </a:solidFill>
-                <a:latin typeface="PingFang SC"/>
-                <a:ea typeface="PingFang SC"/>
+                <a:latin typeface="Calibri"/>
+                <a:ea typeface="微软雅黑"/>
               </a:rPr>
               <a:t>以 FBC 门限 151 推导 LIFESPAN，是否达 10000 划定强/弱块</a:t>
             </a:r>
@@ -14455,8 +15067,8 @@
                 <a:solidFill>
                   <a:srgbClr val="333333"/>
                 </a:solidFill>
-                <a:latin typeface="PingFang SC"/>
-                <a:ea typeface="PingFang SC"/>
+                <a:latin typeface="Calibri"/>
+                <a:ea typeface="微软雅黑"/>
               </a:rPr>
               <a:t>●  </a:t>
             </a:r>
@@ -14465,8 +15077,8 @@
                 <a:solidFill>
                   <a:srgbClr val="333333"/>
                 </a:solidFill>
-                <a:latin typeface="PingFang SC"/>
-                <a:ea typeface="PingFang SC"/>
+                <a:latin typeface="Calibri"/>
+                <a:ea typeface="微软雅黑"/>
               </a:rPr>
               <a:t>256 块中强块 251、弱块仅 5，分布高度不平衡</a:t>
             </a:r>
@@ -14482,8 +15094,8 @@
                 <a:solidFill>
                   <a:srgbClr val="333333"/>
                 </a:solidFill>
-                <a:latin typeface="PingFang SC"/>
-                <a:ea typeface="PingFang SC"/>
+                <a:latin typeface="Calibri"/>
+                <a:ea typeface="微软雅黑"/>
               </a:rPr>
               <a:t>●  </a:t>
             </a:r>
@@ -14492,8 +15104,8 @@
                 <a:solidFill>
                   <a:srgbClr val="333333"/>
                 </a:solidFill>
-                <a:latin typeface="PingFang SC"/>
-                <a:ea typeface="PingFang SC"/>
+                <a:latin typeface="Calibri"/>
+                <a:ea typeface="微软雅黑"/>
               </a:rPr>
               <a:t>强块上限 10000、弱块 7500；R</a:t>
             </a:r>
@@ -14502,8 +15114,8 @@
                 <a:solidFill>
                   <a:srgbClr val="333333"/>
                 </a:solidFill>
-                <a:latin typeface="PingFang SC"/>
-                <a:ea typeface="PingFang SC"/>
+                <a:latin typeface="Calibri"/>
+                <a:ea typeface="微软雅黑"/>
               </a:rPr>
               <a:t>imp</a:t>
             </a:r>
@@ -14512,8 +15124,8 @@
                 <a:solidFill>
                   <a:srgbClr val="333333"/>
                 </a:solidFill>
-                <a:latin typeface="PingFang SC"/>
-                <a:ea typeface="PingFang SC"/>
+                <a:latin typeface="Calibri"/>
+                <a:ea typeface="微软雅黑"/>
               </a:rPr>
               <a:t>≈17.08%（策略测算值，TN=51, TP=1, FP=FN=0）</a:t>
             </a:r>
@@ -14546,8 +15158,8 @@
                 <a:solidFill>
                   <a:srgbClr val="999999"/>
                 </a:solidFill>
-                <a:latin typeface="PingFang SC"/>
-                <a:ea typeface="PingFang SC"/>
+                <a:latin typeface="Calibri"/>
+                <a:ea typeface="微软雅黑"/>
               </a:rPr>
               <a:t>26</a:t>
             </a:r>
@@ -14641,8 +15253,8 @@
                 <a:solidFill>
                   <a:srgbClr val="0A1A3E"/>
                 </a:solidFill>
-                <a:latin typeface="PingFang SC"/>
-                <a:ea typeface="PingFang SC"/>
+                <a:latin typeface="Calibri"/>
+                <a:ea typeface="微软雅黑"/>
               </a:rPr>
               <a:t>三模型投票融合实现强/弱块分类</a:t>
             </a:r>
@@ -14742,8 +15354,8 @@
                 <a:solidFill>
                   <a:srgbClr val="999999"/>
                 </a:solidFill>
-                <a:latin typeface="PingFang SC"/>
-                <a:ea typeface="PingFang SC"/>
+                <a:latin typeface="Calibri"/>
+                <a:ea typeface="微软雅黑"/>
               </a:rPr>
               <a:t>集成投票流程</a:t>
             </a:r>
@@ -14780,8 +15392,8 @@
                 <a:solidFill>
                   <a:srgbClr val="0A1A3E"/>
                 </a:solidFill>
-                <a:latin typeface="PingFang SC"/>
-                <a:ea typeface="PingFang SC"/>
+                <a:latin typeface="Calibri"/>
+                <a:ea typeface="微软雅黑"/>
               </a:rPr>
               <a:t>分析要点</a:t>
             </a:r>
@@ -14797,8 +15409,8 @@
                 <a:solidFill>
                   <a:srgbClr val="333333"/>
                 </a:solidFill>
-                <a:latin typeface="PingFang SC"/>
-                <a:ea typeface="PingFang SC"/>
+                <a:latin typeface="Calibri"/>
+                <a:ea typeface="微软雅黑"/>
               </a:rPr>
               <a:t>●  </a:t>
             </a:r>
@@ -14807,8 +15419,8 @@
                 <a:solidFill>
                   <a:srgbClr val="333333"/>
                 </a:solidFill>
-                <a:latin typeface="PingFang SC"/>
-                <a:ea typeface="PingFang SC"/>
+                <a:latin typeface="Calibri"/>
+                <a:ea typeface="微软雅黑"/>
               </a:rPr>
               <a:t>LP/MP/UP 三类页分别建模后投票融合</a:t>
             </a:r>
@@ -14824,8 +15436,8 @@
                 <a:solidFill>
                   <a:srgbClr val="333333"/>
                 </a:solidFill>
-                <a:latin typeface="PingFang SC"/>
-                <a:ea typeface="PingFang SC"/>
+                <a:latin typeface="Calibri"/>
+                <a:ea typeface="微软雅黑"/>
               </a:rPr>
               <a:t>●  </a:t>
             </a:r>
@@ -14834,8 +15446,8 @@
                 <a:solidFill>
                   <a:srgbClr val="333333"/>
                 </a:solidFill>
-                <a:latin typeface="PingFang SC"/>
-                <a:ea typeface="PingFang SC"/>
+                <a:latin typeface="Calibri"/>
+                <a:ea typeface="微软雅黑"/>
               </a:rPr>
               <a:t>测试集 52 块中弱块仅 1 块，属小样本点估计</a:t>
             </a:r>
@@ -14868,8 +15480,8 @@
                 <a:solidFill>
                   <a:srgbClr val="999999"/>
                 </a:solidFill>
-                <a:latin typeface="PingFang SC"/>
-                <a:ea typeface="PingFang SC"/>
+                <a:latin typeface="Calibri"/>
+                <a:ea typeface="微软雅黑"/>
               </a:rPr>
               <a:t>27</a:t>
             </a:r>
@@ -14963,8 +15575,8 @@
                 <a:solidFill>
                   <a:srgbClr val="0A1A3E"/>
                 </a:solidFill>
-                <a:latin typeface="PingFang SC"/>
-                <a:ea typeface="PingFang SC"/>
+                <a:latin typeface="Calibri"/>
+                <a:ea typeface="微软雅黑"/>
               </a:rPr>
               <a:t>DefaultRead 单次读取即可完整保留 17.08% 增益</a:t>
             </a:r>
@@ -15064,8 +15676,8 @@
                 <a:solidFill>
                   <a:srgbClr val="999999"/>
                 </a:solidFill>
-                <a:latin typeface="PingFang SC"/>
-                <a:ea typeface="PingFang SC"/>
+                <a:latin typeface="Calibri"/>
+                <a:ea typeface="微软雅黑"/>
               </a:rPr>
               <a:t>读取次数/PE 档位/Wordline 消融</a:t>
             </a:r>
@@ -15102,8 +15714,8 @@
                 <a:solidFill>
                   <a:srgbClr val="0A1A3E"/>
                 </a:solidFill>
-                <a:latin typeface="PingFang SC"/>
-                <a:ea typeface="PingFang SC"/>
+                <a:latin typeface="Calibri"/>
+                <a:ea typeface="微软雅黑"/>
               </a:rPr>
               <a:t>三维度轻量化消融</a:t>
             </a:r>
@@ -15119,8 +15731,8 @@
                 <a:solidFill>
                   <a:srgbClr val="333333"/>
                 </a:solidFill>
-                <a:latin typeface="PingFang SC"/>
-                <a:ea typeface="PingFang SC"/>
+                <a:latin typeface="Calibri"/>
+                <a:ea typeface="微软雅黑"/>
               </a:rPr>
               <a:t>●  </a:t>
             </a:r>
@@ -15129,8 +15741,8 @@
                 <a:solidFill>
                   <a:srgbClr val="333333"/>
                 </a:solidFill>
-                <a:latin typeface="PingFang SC"/>
-                <a:ea typeface="PingFang SC"/>
+                <a:latin typeface="Calibri"/>
+                <a:ea typeface="微软雅黑"/>
               </a:rPr>
               <a:t>消融读取次数/PE 档位/Wordline 采样范围</a:t>
             </a:r>
@@ -15146,8 +15758,8 @@
                 <a:solidFill>
                   <a:srgbClr val="333333"/>
                 </a:solidFill>
-                <a:latin typeface="PingFang SC"/>
-                <a:ea typeface="PingFang SC"/>
+                <a:latin typeface="Calibri"/>
+                <a:ea typeface="微软雅黑"/>
               </a:rPr>
               <a:t>●  </a:t>
             </a:r>
@@ -15156,8 +15768,8 @@
                 <a:solidFill>
                   <a:srgbClr val="333333"/>
                 </a:solidFill>
-                <a:latin typeface="PingFang SC"/>
-                <a:ea typeface="PingFang SC"/>
+                <a:latin typeface="Calibri"/>
+                <a:ea typeface="微软雅黑"/>
               </a:rPr>
               <a:t>DefaultRead 单次读取即保留全部增益</a:t>
             </a:r>
@@ -15214,8 +15826,8 @@
                 <a:solidFill>
                   <a:srgbClr val="999999"/>
                 </a:solidFill>
-                <a:latin typeface="PingFang SC"/>
-                <a:ea typeface="PingFang SC"/>
+                <a:latin typeface="Calibri"/>
+                <a:ea typeface="微软雅黑"/>
               </a:rPr>
               <a:t>分模型/读类型 R</a:t>
             </a:r>
@@ -15224,8 +15836,8 @@
                 <a:solidFill>
                   <a:srgbClr val="999999"/>
                 </a:solidFill>
-                <a:latin typeface="PingFang SC"/>
-                <a:ea typeface="PingFang SC"/>
+                <a:latin typeface="Calibri"/>
+                <a:ea typeface="微软雅黑"/>
               </a:rPr>
               <a:t>imp</a:t>
             </a:r>
@@ -15234,8 +15846,8 @@
                 <a:solidFill>
                   <a:srgbClr val="999999"/>
                 </a:solidFill>
-                <a:latin typeface="PingFang SC"/>
-                <a:ea typeface="PingFang SC"/>
+                <a:latin typeface="Calibri"/>
+                <a:ea typeface="微软雅黑"/>
               </a:rPr>
               <a:t> 对比</a:t>
             </a:r>
@@ -15272,8 +15884,8 @@
                 <a:solidFill>
                   <a:srgbClr val="0A1A3E"/>
                 </a:solidFill>
-                <a:latin typeface="PingFang SC"/>
-                <a:ea typeface="PingFang SC"/>
+                <a:latin typeface="Calibri"/>
+                <a:ea typeface="微软雅黑"/>
               </a:rPr>
               <a:t>分模型/读类型 R</a:t>
             </a:r>
@@ -15282,8 +15894,8 @@
                 <a:solidFill>
                   <a:srgbClr val="0A1A3E"/>
                 </a:solidFill>
-                <a:latin typeface="PingFang SC"/>
-                <a:ea typeface="PingFang SC"/>
+                <a:latin typeface="Calibri"/>
+                <a:ea typeface="微软雅黑"/>
               </a:rPr>
               <a:t>imp</a:t>
             </a:r>
@@ -15299,8 +15911,8 @@
                 <a:solidFill>
                   <a:srgbClr val="333333"/>
                 </a:solidFill>
-                <a:latin typeface="PingFang SC"/>
-                <a:ea typeface="PingFang SC"/>
+                <a:latin typeface="Calibri"/>
+                <a:ea typeface="微软雅黑"/>
               </a:rPr>
               <a:t>●  </a:t>
             </a:r>
@@ -15309,8 +15921,8 @@
                 <a:solidFill>
                   <a:srgbClr val="333333"/>
                 </a:solidFill>
-                <a:latin typeface="PingFang SC"/>
-                <a:ea typeface="PingFang SC"/>
+                <a:latin typeface="Calibri"/>
+                <a:ea typeface="微软雅黑"/>
               </a:rPr>
               <a:t>分模型、分读类型对比 R</a:t>
             </a:r>
@@ -15319,8 +15931,8 @@
                 <a:solidFill>
                   <a:srgbClr val="333333"/>
                 </a:solidFill>
-                <a:latin typeface="PingFang SC"/>
-                <a:ea typeface="PingFang SC"/>
+                <a:latin typeface="Calibri"/>
+                <a:ea typeface="微软雅黑"/>
               </a:rPr>
               <a:t>imp</a:t>
             </a:r>
@@ -15329,8 +15941,8 @@
                 <a:solidFill>
                   <a:srgbClr val="333333"/>
                 </a:solidFill>
-                <a:latin typeface="PingFang SC"/>
-                <a:ea typeface="PingFang SC"/>
+                <a:latin typeface="Calibri"/>
+                <a:ea typeface="微软雅黑"/>
               </a:rPr>
               <a:t> 收益分布</a:t>
             </a:r>
@@ -15346,8 +15958,8 @@
                 <a:solidFill>
                   <a:srgbClr val="333333"/>
                 </a:solidFill>
-                <a:latin typeface="PingFang SC"/>
-                <a:ea typeface="PingFang SC"/>
+                <a:latin typeface="Calibri"/>
+                <a:ea typeface="微软雅黑"/>
               </a:rPr>
               <a:t>●  </a:t>
             </a:r>
@@ -15356,8 +15968,8 @@
                 <a:solidFill>
                   <a:srgbClr val="333333"/>
                 </a:solidFill>
-                <a:latin typeface="PingFang SC"/>
-                <a:ea typeface="PingFang SC"/>
+                <a:latin typeface="Calibri"/>
+                <a:ea typeface="微软雅黑"/>
               </a:rPr>
               <a:t>DefaultRead 集成列三模型均收敛至 17.08%；BestRead 下 LP/UP 单类页面出现负增益</a:t>
             </a:r>
@@ -15390,8 +16002,8 @@
                 <a:solidFill>
                   <a:srgbClr val="999999"/>
                 </a:solidFill>
-                <a:latin typeface="PingFang SC"/>
-                <a:ea typeface="PingFang SC"/>
+                <a:latin typeface="Calibri"/>
+                <a:ea typeface="微软雅黑"/>
               </a:rPr>
               <a:t>28</a:t>
             </a:r>
@@ -15485,8 +16097,8 @@
                 <a:solidFill>
                   <a:srgbClr val="0A1A3E"/>
                 </a:solidFill>
-                <a:latin typeface="PingFang SC"/>
-                <a:ea typeface="PingFang SC"/>
+                <a:latin typeface="Calibri"/>
+                <a:ea typeface="微软雅黑"/>
               </a:rPr>
               <a:t>第四章小结：差异化 PE + 轻量化部署 + 局限声明</a:t>
             </a:r>
@@ -15566,8 +16178,8 @@
                 <a:solidFill>
                   <a:srgbClr val="333333"/>
                 </a:solidFill>
-                <a:latin typeface="PingFang SC"/>
-                <a:ea typeface="PingFang SC"/>
+                <a:latin typeface="Calibri"/>
+                <a:ea typeface="微软雅黑"/>
               </a:rPr>
               <a:t>●  </a:t>
             </a:r>
@@ -15576,8 +16188,8 @@
                 <a:solidFill>
                   <a:srgbClr val="333333"/>
                 </a:solidFill>
-                <a:latin typeface="PingFang SC"/>
-                <a:ea typeface="PingFang SC"/>
+                <a:latin typeface="Calibri"/>
+                <a:ea typeface="微软雅黑"/>
               </a:rPr>
               <a:t>FBC 强/弱块二分类 + 差异化 PE 管控方案</a:t>
             </a:r>
@@ -15593,8 +16205,8 @@
                 <a:solidFill>
                   <a:srgbClr val="666666"/>
                 </a:solidFill>
-                <a:latin typeface="PingFang SC"/>
-                <a:ea typeface="PingFang SC"/>
+                <a:latin typeface="Calibri"/>
+                <a:ea typeface="微软雅黑"/>
               </a:rPr>
               <a:t>◦  </a:t>
             </a:r>
@@ -15603,8 +16215,8 @@
                 <a:solidFill>
                   <a:srgbClr val="666666"/>
                 </a:solidFill>
-                <a:latin typeface="PingFang SC"/>
-                <a:ea typeface="PingFang SC"/>
+                <a:latin typeface="Calibri"/>
+                <a:ea typeface="微软雅黑"/>
               </a:rPr>
               <a:t>DefaultRead 单次读取即可保留全部增益</a:t>
             </a:r>
@@ -15620,8 +16232,8 @@
                 <a:solidFill>
                   <a:srgbClr val="333333"/>
                 </a:solidFill>
-                <a:latin typeface="PingFang SC"/>
-                <a:ea typeface="PingFang SC"/>
+                <a:latin typeface="Calibri"/>
+                <a:ea typeface="微软雅黑"/>
               </a:rPr>
               <a:t>●  </a:t>
             </a:r>
@@ -15630,8 +16242,8 @@
                 <a:solidFill>
                   <a:srgbClr val="333333"/>
                 </a:solidFill>
-                <a:latin typeface="PingFang SC"/>
-                <a:ea typeface="PingFang SC"/>
+                <a:latin typeface="Calibri"/>
+                <a:ea typeface="微软雅黑"/>
               </a:rPr>
               <a:t>约 17% 累计可写入量提升，不突破 LDPC 安全边界</a:t>
             </a:r>
@@ -15647,8 +16259,8 @@
                 <a:solidFill>
                   <a:srgbClr val="666666"/>
                 </a:solidFill>
-                <a:latin typeface="PingFang SC"/>
-                <a:ea typeface="PingFang SC"/>
+                <a:latin typeface="Calibri"/>
+                <a:ea typeface="微软雅黑"/>
               </a:rPr>
               <a:t>◦  </a:t>
             </a:r>
@@ -15657,8 +16269,8 @@
                 <a:solidFill>
                   <a:srgbClr val="666666"/>
                 </a:solidFill>
-                <a:latin typeface="PingFang SC"/>
-                <a:ea typeface="PingFang SC"/>
+                <a:latin typeface="Calibri"/>
+                <a:ea typeface="微软雅黑"/>
               </a:rPr>
               <a:t>17% 为策略测算值，测试集为小样本点估计</a:t>
             </a:r>
@@ -15674,8 +16286,8 @@
                 <a:solidFill>
                   <a:srgbClr val="333333"/>
                 </a:solidFill>
-                <a:latin typeface="PingFang SC"/>
-                <a:ea typeface="PingFang SC"/>
+                <a:latin typeface="Calibri"/>
+                <a:ea typeface="微软雅黑"/>
               </a:rPr>
               <a:t>●  </a:t>
             </a:r>
@@ -15684,8 +16296,8 @@
                 <a:solidFill>
                   <a:srgbClr val="333333"/>
                 </a:solidFill>
-                <a:latin typeface="PingFang SC"/>
-                <a:ea typeface="PingFang SC"/>
+                <a:latin typeface="Calibri"/>
+                <a:ea typeface="微软雅黑"/>
               </a:rPr>
               <a:t>轻量化消融验证控制器端部署可行性</a:t>
             </a:r>
@@ -15701,8 +16313,8 @@
                 <a:solidFill>
                   <a:srgbClr val="666666"/>
                 </a:solidFill>
-                <a:latin typeface="PingFang SC"/>
-                <a:ea typeface="PingFang SC"/>
+                <a:latin typeface="Calibri"/>
+                <a:ea typeface="微软雅黑"/>
               </a:rPr>
               <a:t>◦  </a:t>
             </a:r>
@@ -15711,8 +16323,8 @@
                 <a:solidFill>
                   <a:srgbClr val="666666"/>
                 </a:solidFill>
-                <a:latin typeface="PingFang SC"/>
-                <a:ea typeface="PingFang SC"/>
+                <a:latin typeface="Calibri"/>
+                <a:ea typeface="微软雅黑"/>
               </a:rPr>
               <a:t>从预测到调度形成完整工程闭环</a:t>
             </a:r>
@@ -15728,8 +16340,8 @@
                 <a:solidFill>
                   <a:srgbClr val="333333"/>
                 </a:solidFill>
-                <a:latin typeface="PingFang SC"/>
-                <a:ea typeface="PingFang SC"/>
+                <a:latin typeface="Calibri"/>
+                <a:ea typeface="微软雅黑"/>
               </a:rPr>
               <a:t>●  </a:t>
             </a:r>
@@ -15738,8 +16350,8 @@
                 <a:solidFill>
                   <a:srgbClr val="333333"/>
                 </a:solidFill>
-                <a:latin typeface="PingFang SC"/>
-                <a:ea typeface="PingFang SC"/>
+                <a:latin typeface="Calibri"/>
+                <a:ea typeface="微软雅黑"/>
               </a:rPr>
               <a:t>局限：256 个逻辑块样本偏小，结论仍需扩大验证</a:t>
             </a:r>
@@ -15772,8 +16384,8 @@
                 <a:solidFill>
                   <a:srgbClr val="999999"/>
                 </a:solidFill>
-                <a:latin typeface="PingFang SC"/>
-                <a:ea typeface="PingFang SC"/>
+                <a:latin typeface="Calibri"/>
+                <a:ea typeface="微软雅黑"/>
               </a:rPr>
               <a:t>29</a:t>
             </a:r>
@@ -15867,8 +16479,8 @@
                 <a:solidFill>
                   <a:srgbClr val="0A1A3E"/>
                 </a:solidFill>
-                <a:latin typeface="PingFang SC"/>
-                <a:ea typeface="PingFang SC"/>
+                <a:latin typeface="Calibri"/>
+                <a:ea typeface="微软雅黑"/>
               </a:rPr>
               <a:t>全球数据中心存储规模持续扩张，SSD 故障致巨额损失</a:t>
             </a:r>
@@ -15948,8 +16560,8 @@
                 <a:solidFill>
                   <a:srgbClr val="0A1A3E"/>
                 </a:solidFill>
-                <a:latin typeface="PingFang SC"/>
-                <a:ea typeface="PingFang SC"/>
+                <a:latin typeface="Calibri"/>
+                <a:ea typeface="微软雅黑"/>
               </a:rPr>
               <a:t>分析要点</a:t>
             </a:r>
@@ -15965,8 +16577,8 @@
                 <a:solidFill>
                   <a:srgbClr val="333333"/>
                 </a:solidFill>
-                <a:latin typeface="PingFang SC"/>
-                <a:ea typeface="PingFang SC"/>
+                <a:latin typeface="Calibri"/>
+                <a:ea typeface="微软雅黑"/>
               </a:rPr>
               <a:t>●  </a:t>
             </a:r>
@@ -15975,8 +16587,8 @@
                 <a:solidFill>
                   <a:srgbClr val="333333"/>
                 </a:solidFill>
-                <a:latin typeface="PingFang SC"/>
-                <a:ea typeface="PingFang SC"/>
+                <a:latin typeface="Calibri"/>
+                <a:ea typeface="微软雅黑"/>
               </a:rPr>
               <a:t>全球数据中心突破 11800 座，2030 年数据量预计超 1000 ZB</a:t>
             </a:r>
@@ -15992,8 +16604,8 @@
                 <a:solidFill>
                   <a:srgbClr val="333333"/>
                 </a:solidFill>
-                <a:latin typeface="PingFang SC"/>
-                <a:ea typeface="PingFang SC"/>
+                <a:latin typeface="Calibri"/>
+                <a:ea typeface="微软雅黑"/>
               </a:rPr>
               <a:t>●  </a:t>
             </a:r>
@@ -16002,8 +16614,8 @@
                 <a:solidFill>
                   <a:srgbClr val="333333"/>
                 </a:solidFill>
-                <a:latin typeface="PingFang SC"/>
-                <a:ea typeface="PingFang SC"/>
+                <a:latin typeface="Calibri"/>
+                <a:ea typeface="微软雅黑"/>
               </a:rPr>
               <a:t>SSD 年化故障率约 2.5%，故障致业务中断与数据不可逆丢失</a:t>
             </a:r>
@@ -16019,8 +16631,8 @@
                 <a:solidFill>
                   <a:srgbClr val="333333"/>
                 </a:solidFill>
-                <a:latin typeface="PingFang SC"/>
-                <a:ea typeface="PingFang SC"/>
+                <a:latin typeface="Calibri"/>
+                <a:ea typeface="微软雅黑"/>
               </a:rPr>
               <a:t>●  </a:t>
             </a:r>
@@ -16029,8 +16641,8 @@
                 <a:solidFill>
                   <a:srgbClr val="333333"/>
                 </a:solidFill>
-                <a:latin typeface="PingFang SC"/>
-                <a:ea typeface="PingFang SC"/>
+                <a:latin typeface="Calibri"/>
+                <a:ea typeface="微软雅黑"/>
               </a:rPr>
               <a:t>被动容灾消耗大，主动预警才是降本关键</a:t>
             </a:r>
@@ -16087,8 +16699,8 @@
                 <a:solidFill>
                   <a:srgbClr val="999999"/>
                 </a:solidFill>
-                <a:latin typeface="PingFang SC"/>
-                <a:ea typeface="PingFang SC"/>
+                <a:latin typeface="Calibri"/>
+                <a:ea typeface="微软雅黑"/>
               </a:rPr>
               <a:t>全球数据中心存储规模增长趋势</a:t>
             </a:r>
@@ -16145,8 +16757,8 @@
                 <a:solidFill>
                   <a:srgbClr val="999999"/>
                 </a:solidFill>
-                <a:latin typeface="PingFang SC"/>
-                <a:ea typeface="PingFang SC"/>
+                <a:latin typeface="Calibri"/>
+                <a:ea typeface="微软雅黑"/>
               </a:rPr>
               <a:t>一银行业务中断：紧急采购存储</a:t>
             </a:r>
@@ -16203,8 +16815,8 @@
                 <a:solidFill>
                   <a:srgbClr val="999999"/>
                 </a:solidFill>
-                <a:latin typeface="PingFang SC"/>
-                <a:ea typeface="PingFang SC"/>
+                <a:latin typeface="Calibri"/>
+                <a:ea typeface="微软雅黑"/>
               </a:rPr>
               <a:t>数据中心企业级 SSD 机柜</a:t>
             </a:r>
@@ -16237,8 +16849,8 @@
                 <a:solidFill>
                   <a:srgbClr val="999999"/>
                 </a:solidFill>
-                <a:latin typeface="PingFang SC"/>
-                <a:ea typeface="PingFang SC"/>
+                <a:latin typeface="Calibri"/>
+                <a:ea typeface="微软雅黑"/>
               </a:rPr>
               <a:t>数据来源: IDC/Cloudscene 2024</a:t>
             </a:r>
@@ -16271,8 +16883,8 @@
                 <a:solidFill>
                   <a:srgbClr val="999999"/>
                 </a:solidFill>
-                <a:latin typeface="PingFang SC"/>
-                <a:ea typeface="PingFang SC"/>
+                <a:latin typeface="Calibri"/>
+                <a:ea typeface="微软雅黑"/>
               </a:rPr>
               <a:t>3</a:t>
             </a:r>
@@ -16366,8 +16978,8 @@
                 <a:solidFill>
                   <a:srgbClr val="0A1A3E"/>
                 </a:solidFill>
-                <a:latin typeface="PingFang SC"/>
-                <a:ea typeface="PingFang SC"/>
+                <a:latin typeface="Calibri"/>
+                <a:ea typeface="微软雅黑"/>
               </a:rPr>
               <a:t>第五章：原型系统落地</a:t>
             </a:r>
@@ -16400,8 +17012,8 @@
                 <a:solidFill>
                   <a:srgbClr val="666666"/>
                 </a:solidFill>
-                <a:latin typeface="PingFang SC"/>
-                <a:ea typeface="PingFang SC"/>
+                <a:latin typeface="Calibri"/>
+                <a:ea typeface="微软雅黑"/>
               </a:rPr>
               <a:t>智慧 SSD 运维软件 — 数据接入→预警→处置全流程闭环</a:t>
             </a:r>
@@ -16495,8 +17107,8 @@
                 <a:solidFill>
                   <a:srgbClr val="0A1A3E"/>
                 </a:solidFill>
-                <a:latin typeface="PingFang SC"/>
-                <a:ea typeface="PingFang SC"/>
+                <a:latin typeface="Calibri"/>
+                <a:ea typeface="微软雅黑"/>
               </a:rPr>
               <a:t>四层架构与用例设计：业务层→服务层→数据层→基础层打通闭环</a:t>
             </a:r>
@@ -16596,8 +17208,8 @@
                 <a:solidFill>
                   <a:srgbClr val="999999"/>
                 </a:solidFill>
-                <a:latin typeface="PingFang SC"/>
-                <a:ea typeface="PingFang SC"/>
+                <a:latin typeface="Calibri"/>
+                <a:ea typeface="微软雅黑"/>
               </a:rPr>
               <a:t>四层架构设计</a:t>
             </a:r>
@@ -16634,8 +17246,8 @@
                 <a:solidFill>
                   <a:srgbClr val="0A1A3E"/>
                 </a:solidFill>
-                <a:latin typeface="PingFang SC"/>
-                <a:ea typeface="PingFang SC"/>
+                <a:latin typeface="Calibri"/>
+                <a:ea typeface="微软雅黑"/>
               </a:rPr>
               <a:t>系统架构</a:t>
             </a:r>
@@ -16651,8 +17263,8 @@
                 <a:solidFill>
                   <a:srgbClr val="333333"/>
                 </a:solidFill>
-                <a:latin typeface="PingFang SC"/>
-                <a:ea typeface="PingFang SC"/>
+                <a:latin typeface="Calibri"/>
+                <a:ea typeface="微软雅黑"/>
               </a:rPr>
               <a:t>●  </a:t>
             </a:r>
@@ -16661,8 +17273,8 @@
                 <a:solidFill>
                   <a:srgbClr val="333333"/>
                 </a:solidFill>
-                <a:latin typeface="PingFang SC"/>
-                <a:ea typeface="PingFang SC"/>
+                <a:latin typeface="Calibri"/>
+                <a:ea typeface="微软雅黑"/>
               </a:rPr>
               <a:t>算法服务与业务解耦，支持热更新不影响主流程</a:t>
             </a:r>
@@ -16678,8 +17290,8 @@
                 <a:solidFill>
                   <a:srgbClr val="333333"/>
                 </a:solidFill>
-                <a:latin typeface="PingFang SC"/>
-                <a:ea typeface="PingFang SC"/>
+                <a:latin typeface="Calibri"/>
+                <a:ea typeface="微软雅黑"/>
               </a:rPr>
               <a:t>●  </a:t>
             </a:r>
@@ -16688,8 +17300,8 @@
                 <a:solidFill>
                   <a:srgbClr val="333333"/>
                 </a:solidFill>
-                <a:latin typeface="PingFang SC"/>
-                <a:ea typeface="PingFang SC"/>
+                <a:latin typeface="Calibri"/>
+                <a:ea typeface="微软雅黑"/>
               </a:rPr>
               <a:t>定时调度 + 手动触发双模式</a:t>
             </a:r>
@@ -16746,8 +17358,8 @@
                 <a:solidFill>
                   <a:srgbClr val="999999"/>
                 </a:solidFill>
-                <a:latin typeface="PingFang SC"/>
-                <a:ea typeface="PingFang SC"/>
+                <a:latin typeface="Calibri"/>
+                <a:ea typeface="微软雅黑"/>
               </a:rPr>
               <a:t>用例分析图</a:t>
             </a:r>
@@ -16784,8 +17396,8 @@
                 <a:solidFill>
                   <a:srgbClr val="0A1A3E"/>
                 </a:solidFill>
-                <a:latin typeface="PingFang SC"/>
-                <a:ea typeface="PingFang SC"/>
+                <a:latin typeface="Calibri"/>
+                <a:ea typeface="微软雅黑"/>
               </a:rPr>
               <a:t>用例分析</a:t>
             </a:r>
@@ -16801,8 +17413,8 @@
                 <a:solidFill>
                   <a:srgbClr val="333333"/>
                 </a:solidFill>
-                <a:latin typeface="PingFang SC"/>
-                <a:ea typeface="PingFang SC"/>
+                <a:latin typeface="Calibri"/>
+                <a:ea typeface="微软雅黑"/>
               </a:rPr>
               <a:t>●  </a:t>
             </a:r>
@@ -16811,8 +17423,8 @@
                 <a:solidFill>
                   <a:srgbClr val="333333"/>
                 </a:solidFill>
-                <a:latin typeface="PingFang SC"/>
-                <a:ea typeface="PingFang SC"/>
+                <a:latin typeface="Calibri"/>
+                <a:ea typeface="微软雅黑"/>
               </a:rPr>
               <a:t>管理侧：盘资产/日志/故障记录 CRUD</a:t>
             </a:r>
@@ -16828,8 +17440,8 @@
                 <a:solidFill>
                   <a:srgbClr val="333333"/>
                 </a:solidFill>
-                <a:latin typeface="PingFang SC"/>
-                <a:ea typeface="PingFang SC"/>
+                <a:latin typeface="Calibri"/>
+                <a:ea typeface="微软雅黑"/>
               </a:rPr>
               <a:t>●  </a:t>
             </a:r>
@@ -16838,8 +17450,8 @@
                 <a:solidFill>
                   <a:srgbClr val="333333"/>
                 </a:solidFill>
-                <a:latin typeface="PingFang SC"/>
-                <a:ea typeface="PingFang SC"/>
+                <a:latin typeface="Calibri"/>
+                <a:ea typeface="微软雅黑"/>
               </a:rPr>
               <a:t>预警侧：生成/处置/确认/忽略全流程</a:t>
             </a:r>
@@ -16855,8 +17467,8 @@
                 <a:solidFill>
                   <a:srgbClr val="333333"/>
                 </a:solidFill>
-                <a:latin typeface="PingFang SC"/>
-                <a:ea typeface="PingFang SC"/>
+                <a:latin typeface="Calibri"/>
+                <a:ea typeface="微软雅黑"/>
               </a:rPr>
               <a:t>●  </a:t>
             </a:r>
@@ -16865,8 +17477,8 @@
                 <a:solidFill>
                   <a:srgbClr val="333333"/>
                 </a:solidFill>
-                <a:latin typeface="PingFang SC"/>
-                <a:ea typeface="PingFang SC"/>
+                <a:latin typeface="Calibri"/>
+                <a:ea typeface="微软雅黑"/>
               </a:rPr>
               <a:t>功能测试覆盖采集—推理—预警全链路</a:t>
             </a:r>
@@ -16899,8 +17511,8 @@
                 <a:solidFill>
                   <a:srgbClr val="999999"/>
                 </a:solidFill>
-                <a:latin typeface="PingFang SC"/>
-                <a:ea typeface="PingFang SC"/>
+                <a:latin typeface="Calibri"/>
+                <a:ea typeface="微软雅黑"/>
               </a:rPr>
               <a:t>31</a:t>
             </a:r>
@@ -16994,8 +17606,8 @@
                 <a:solidFill>
                   <a:srgbClr val="0A1A3E"/>
                 </a:solidFill>
-                <a:latin typeface="PingFang SC"/>
-                <a:ea typeface="PingFang SC"/>
+                <a:latin typeface="Calibri"/>
+                <a:ea typeface="微软雅黑"/>
               </a:rPr>
               <a:t>预警处置形成完整业务闭环，状态终态不可逆</a:t>
             </a:r>
@@ -17095,8 +17707,8 @@
                 <a:solidFill>
                   <a:srgbClr val="999999"/>
                 </a:solidFill>
-                <a:latin typeface="PingFang SC"/>
-                <a:ea typeface="PingFang SC"/>
+                <a:latin typeface="Calibri"/>
+                <a:ea typeface="微软雅黑"/>
               </a:rPr>
               <a:t>预警处置交互顺序</a:t>
             </a:r>
@@ -17133,8 +17745,8 @@
                 <a:solidFill>
                   <a:srgbClr val="0A1A3E"/>
                 </a:solidFill>
-                <a:latin typeface="PingFang SC"/>
-                <a:ea typeface="PingFang SC"/>
+                <a:latin typeface="Calibri"/>
+                <a:ea typeface="微软雅黑"/>
               </a:rPr>
               <a:t>分析要点</a:t>
             </a:r>
@@ -17150,8 +17762,8 @@
                 <a:solidFill>
                   <a:srgbClr val="333333"/>
                 </a:solidFill>
-                <a:latin typeface="PingFang SC"/>
-                <a:ea typeface="PingFang SC"/>
+                <a:latin typeface="Calibri"/>
+                <a:ea typeface="微软雅黑"/>
               </a:rPr>
               <a:t>●  </a:t>
             </a:r>
@@ -17160,8 +17772,8 @@
                 <a:solidFill>
                   <a:srgbClr val="333333"/>
                 </a:solidFill>
-                <a:latin typeface="PingFang SC"/>
-                <a:ea typeface="PingFang SC"/>
+                <a:latin typeface="Calibri"/>
+                <a:ea typeface="微软雅黑"/>
               </a:rPr>
               <a:t>预警管理支持确认和忽略操作，故障处置跟踪换盘流程</a:t>
             </a:r>
@@ -17177,8 +17789,8 @@
                 <a:solidFill>
                   <a:srgbClr val="333333"/>
                 </a:solidFill>
-                <a:latin typeface="PingFang SC"/>
-                <a:ea typeface="PingFang SC"/>
+                <a:latin typeface="Calibri"/>
+                <a:ea typeface="微软雅黑"/>
               </a:rPr>
               <a:t>●  </a:t>
             </a:r>
@@ -17187,8 +17799,8 @@
                 <a:solidFill>
                   <a:srgbClr val="333333"/>
                 </a:solidFill>
-                <a:latin typeface="PingFang SC"/>
-                <a:ea typeface="PingFang SC"/>
+                <a:latin typeface="Calibri"/>
+                <a:ea typeface="微软雅黑"/>
               </a:rPr>
               <a:t>状态流转：pending→confirmed/ignored，终态不可重复处置</a:t>
             </a:r>
@@ -17204,8 +17816,8 @@
                 <a:solidFill>
                   <a:srgbClr val="333333"/>
                 </a:solidFill>
-                <a:latin typeface="PingFang SC"/>
-                <a:ea typeface="PingFang SC"/>
+                <a:latin typeface="Calibri"/>
+                <a:ea typeface="微软雅黑"/>
               </a:rPr>
               <a:t>●  </a:t>
             </a:r>
@@ -17214,8 +17826,8 @@
                 <a:solidFill>
                   <a:srgbClr val="333333"/>
                 </a:solidFill>
-                <a:latin typeface="PingFang SC"/>
-                <a:ea typeface="PingFang SC"/>
+                <a:latin typeface="Calibri"/>
+                <a:ea typeface="微软雅黑"/>
               </a:rPr>
               <a:t>前端 Vue3+TypeScript，后端 Java+Python 算法服务，REST 接口</a:t>
             </a:r>
@@ -17248,8 +17860,8 @@
                 <a:solidFill>
                   <a:srgbClr val="999999"/>
                 </a:solidFill>
-                <a:latin typeface="PingFang SC"/>
-                <a:ea typeface="PingFang SC"/>
+                <a:latin typeface="Calibri"/>
+                <a:ea typeface="微软雅黑"/>
               </a:rPr>
               <a:t>32</a:t>
             </a:r>
@@ -17343,8 +17955,8 @@
                 <a:solidFill>
                   <a:srgbClr val="0A1A3E"/>
                 </a:solidFill>
-                <a:latin typeface="PingFang SC"/>
-                <a:ea typeface="PingFang SC"/>
+                <a:latin typeface="Calibri"/>
+                <a:ea typeface="微软雅黑"/>
               </a:rPr>
               <a:t>总结：低误报约束贯穿两大任务，三项核心贡献</a:t>
             </a:r>
@@ -17424,8 +18036,8 @@
                 <a:solidFill>
                   <a:srgbClr val="333333"/>
                 </a:solidFill>
-                <a:latin typeface="PingFang SC"/>
-                <a:ea typeface="PingFang SC"/>
+                <a:latin typeface="Calibri"/>
+                <a:ea typeface="微软雅黑"/>
               </a:rPr>
               <a:t>①  近端突变标注 + 短期突变特征</a:t>
             </a:r>
@@ -17441,8 +18053,8 @@
                 <a:solidFill>
                   <a:srgbClr val="666666"/>
                 </a:solidFill>
-                <a:latin typeface="PingFang SC"/>
-                <a:ea typeface="PingFang SC"/>
+                <a:latin typeface="Calibri"/>
+                <a:ea typeface="微软雅黑"/>
               </a:rPr>
               <a:t>混合标注消除长窗稀释，B 组 r</a:t>
             </a:r>
@@ -17451,8 +18063,8 @@
                 <a:solidFill>
                   <a:srgbClr val="666666"/>
                 </a:solidFill>
-                <a:latin typeface="PingFang SC"/>
-                <a:ea typeface="PingFang SC"/>
+                <a:latin typeface="Calibri"/>
+                <a:ea typeface="微软雅黑"/>
               </a:rPr>
               <a:t>k</a:t>
             </a:r>
@@ -17461,8 +18073,8 @@
                 <a:solidFill>
                   <a:srgbClr val="666666"/>
                 </a:solidFill>
-                <a:latin typeface="PingFang SC"/>
-                <a:ea typeface="PingFang SC"/>
+                <a:latin typeface="Calibri"/>
+                <a:ea typeface="微软雅黑"/>
               </a:rPr>
               <a:t>|Δ| 捕捉 1-3 天突变信号，F</a:t>
             </a:r>
@@ -17471,8 +18083,8 @@
                 <a:solidFill>
                   <a:srgbClr val="666666"/>
                 </a:solidFill>
-                <a:latin typeface="PingFang SC"/>
-                <a:ea typeface="PingFang SC"/>
+                <a:latin typeface="Calibri"/>
+                <a:ea typeface="微软雅黑"/>
               </a:rPr>
               <a:t>0.5</a:t>
             </a:r>
@@ -17481,8 +18093,8 @@
                 <a:solidFill>
                   <a:srgbClr val="666666"/>
                 </a:solidFill>
-                <a:latin typeface="PingFang SC"/>
-                <a:ea typeface="PingFang SC"/>
+                <a:latin typeface="Calibri"/>
+                <a:ea typeface="微软雅黑"/>
               </a:rPr>
               <a:t> 从基线多数未达 0.9 突破至 0.919，与最强基线并列最优</a:t>
             </a:r>
@@ -17498,8 +18110,8 @@
                 <a:solidFill>
                   <a:srgbClr val="333333"/>
                 </a:solidFill>
-                <a:latin typeface="PingFang SC"/>
-                <a:ea typeface="PingFang SC"/>
+                <a:latin typeface="Calibri"/>
+                <a:ea typeface="微软雅黑"/>
               </a:rPr>
               <a:t>②  异构集成预测 F</a:t>
             </a:r>
@@ -17508,8 +18120,8 @@
                 <a:solidFill>
                   <a:srgbClr val="333333"/>
                 </a:solidFill>
-                <a:latin typeface="PingFang SC"/>
-                <a:ea typeface="PingFang SC"/>
+                <a:latin typeface="Calibri"/>
+                <a:ea typeface="微软雅黑"/>
               </a:rPr>
               <a:t>0.5</a:t>
             </a:r>
@@ -17518,8 +18130,8 @@
                 <a:solidFill>
                   <a:srgbClr val="333333"/>
                 </a:solidFill>
-                <a:latin typeface="PingFang SC"/>
-                <a:ea typeface="PingFang SC"/>
+                <a:latin typeface="Calibri"/>
+                <a:ea typeface="微软雅黑"/>
               </a:rPr>
               <a:t>=0.919，FPR 降低 40%</a:t>
             </a:r>
@@ -17535,8 +18147,8 @@
                 <a:solidFill>
                   <a:srgbClr val="666666"/>
                 </a:solidFill>
-                <a:latin typeface="PingFang SC"/>
-                <a:ea typeface="PingFang SC"/>
+                <a:latin typeface="Calibri"/>
+                <a:ea typeface="微软雅黑"/>
               </a:rPr>
               <a:t>Attention 融合 F</a:t>
             </a:r>
@@ -17545,8 +18157,8 @@
                 <a:solidFill>
                   <a:srgbClr val="666666"/>
                 </a:solidFill>
-                <a:latin typeface="PingFang SC"/>
-                <a:ea typeface="PingFang SC"/>
+                <a:latin typeface="Calibri"/>
+                <a:ea typeface="微软雅黑"/>
               </a:rPr>
               <a:t>0.5</a:t>
             </a:r>
@@ -17555,8 +18167,8 @@
                 <a:solidFill>
                   <a:srgbClr val="666666"/>
                 </a:solidFill>
-                <a:latin typeface="PingFang SC"/>
-                <a:ea typeface="PingFang SC"/>
+                <a:latin typeface="Calibri"/>
+                <a:ea typeface="微软雅黑"/>
               </a:rPr>
               <a:t>=0.919 并列最优，FPR 从 4.53×10</a:t>
             </a:r>
@@ -17565,8 +18177,8 @@
                 <a:solidFill>
                   <a:srgbClr val="666666"/>
                 </a:solidFill>
-                <a:latin typeface="PingFang SC"/>
-                <a:ea typeface="PingFang SC"/>
+                <a:latin typeface="Calibri"/>
+                <a:ea typeface="微软雅黑"/>
               </a:rPr>
               <a:t>-5</a:t>
             </a:r>
@@ -17575,8 +18187,8 @@
                 <a:solidFill>
                   <a:srgbClr val="666666"/>
                 </a:solidFill>
-                <a:latin typeface="PingFang SC"/>
-                <a:ea typeface="PingFang SC"/>
+                <a:latin typeface="Calibri"/>
+                <a:ea typeface="微软雅黑"/>
               </a:rPr>
               <a:t> 压至 2.71×10</a:t>
             </a:r>
@@ -17585,8 +18197,8 @@
                 <a:solidFill>
                   <a:srgbClr val="666666"/>
                 </a:solidFill>
-                <a:latin typeface="PingFang SC"/>
-                <a:ea typeface="PingFang SC"/>
+                <a:latin typeface="Calibri"/>
+                <a:ea typeface="微软雅黑"/>
               </a:rPr>
               <a:t>-5</a:t>
             </a:r>
@@ -17595,8 +18207,8 @@
                 <a:solidFill>
                   <a:srgbClr val="666666"/>
                 </a:solidFill>
-                <a:latin typeface="PingFang SC"/>
-                <a:ea typeface="PingFang SC"/>
+                <a:latin typeface="Calibri"/>
+                <a:ea typeface="微软雅黑"/>
               </a:rPr>
               <a:t>，Precision 达 0.981，大规模部署虚假告警显著减少</a:t>
             </a:r>
@@ -17612,8 +18224,8 @@
                 <a:solidFill>
                   <a:srgbClr val="333333"/>
                 </a:solidFill>
-                <a:latin typeface="PingFang SC"/>
-                <a:ea typeface="PingFang SC"/>
+                <a:latin typeface="Calibri"/>
+                <a:ea typeface="微软雅黑"/>
               </a:rPr>
               <a:t>③  差异化 PE 写入量提升约 17%（策略测算值）</a:t>
             </a:r>
@@ -17629,8 +18241,8 @@
                 <a:solidFill>
                   <a:srgbClr val="666666"/>
                 </a:solidFill>
-                <a:latin typeface="PingFang SC"/>
-                <a:ea typeface="PingFang SC"/>
+                <a:latin typeface="Calibri"/>
+                <a:ea typeface="微软雅黑"/>
               </a:rPr>
               <a:t>强/弱块分类后差异化擦写上限，DefaultRead 单次读取保留增益。测试集为小样本点估计，统计可靠性有限</a:t>
             </a:r>
@@ -17663,8 +18275,8 @@
                 <a:solidFill>
                   <a:srgbClr val="999999"/>
                 </a:solidFill>
-                <a:latin typeface="PingFang SC"/>
-                <a:ea typeface="PingFang SC"/>
+                <a:latin typeface="Calibri"/>
+                <a:ea typeface="微软雅黑"/>
               </a:rPr>
               <a:t>33</a:t>
             </a:r>
@@ -17758,8 +18370,8 @@
                 <a:solidFill>
                   <a:srgbClr val="0A1A3E"/>
                 </a:solidFill>
-                <a:latin typeface="PingFang SC"/>
-                <a:ea typeface="PingFang SC"/>
+                <a:latin typeface="Calibri"/>
+                <a:ea typeface="微软雅黑"/>
               </a:rPr>
               <a:t>未来方向：跨型号泛化、在线学习与边缘部署</a:t>
             </a:r>
@@ -17839,8 +18451,8 @@
                 <a:solidFill>
                   <a:srgbClr val="333333"/>
                 </a:solidFill>
-                <a:latin typeface="PingFang SC"/>
-                <a:ea typeface="PingFang SC"/>
+                <a:latin typeface="Calibri"/>
+                <a:ea typeface="微软雅黑"/>
               </a:rPr>
               <a:t>●  </a:t>
             </a:r>
@@ -17849,8 +18461,8 @@
                 <a:solidFill>
                   <a:srgbClr val="333333"/>
                 </a:solidFill>
-                <a:latin typeface="PingFang SC"/>
-                <a:ea typeface="PingFang SC"/>
+                <a:latin typeface="Calibri"/>
+                <a:ea typeface="微软雅黑"/>
               </a:rPr>
               <a:t>跨厂商/跨型号泛化验证，包括 QLC/PLC 新型闪存</a:t>
             </a:r>
@@ -17866,8 +18478,8 @@
                 <a:solidFill>
                   <a:srgbClr val="666666"/>
                 </a:solidFill>
-                <a:latin typeface="PingFang SC"/>
-                <a:ea typeface="PingFang SC"/>
+                <a:latin typeface="Calibri"/>
+                <a:ea typeface="微软雅黑"/>
               </a:rPr>
               <a:t>◦  </a:t>
             </a:r>
@@ -17876,8 +18488,8 @@
                 <a:solidFill>
                   <a:srgbClr val="666666"/>
                 </a:solidFill>
-                <a:latin typeface="PingFang SC"/>
-                <a:ea typeface="PingFang SC"/>
+                <a:latin typeface="Calibri"/>
+                <a:ea typeface="微软雅黑"/>
               </a:rPr>
               <a:t>MB2 TPR 仅约 0.19，弱信号故障盘仍难检出，是低误报约束下固有代价</a:t>
             </a:r>
@@ -17893,8 +18505,8 @@
                 <a:solidFill>
                   <a:srgbClr val="333333"/>
                 </a:solidFill>
-                <a:latin typeface="PingFang SC"/>
-                <a:ea typeface="PingFang SC"/>
+                <a:latin typeface="Calibri"/>
+                <a:ea typeface="微软雅黑"/>
               </a:rPr>
               <a:t>●  </a:t>
             </a:r>
@@ -17903,8 +18515,8 @@
                 <a:solidFill>
                   <a:srgbClr val="333333"/>
                 </a:solidFill>
-                <a:latin typeface="PingFang SC"/>
-                <a:ea typeface="PingFang SC"/>
+                <a:latin typeface="Calibri"/>
+                <a:ea typeface="微软雅黑"/>
               </a:rPr>
               <a:t>在线增量学习应对概念漂移，持续迭代模型</a:t>
             </a:r>
@@ -17920,8 +18532,8 @@
                 <a:solidFill>
                   <a:srgbClr val="666666"/>
                 </a:solidFill>
-                <a:latin typeface="PingFang SC"/>
-                <a:ea typeface="PingFang SC"/>
+                <a:latin typeface="Calibri"/>
+                <a:ea typeface="微软雅黑"/>
               </a:rPr>
               <a:t>◦  </a:t>
             </a:r>
@@ -17930,8 +18542,8 @@
                 <a:solidFill>
                   <a:srgbClr val="666666"/>
                 </a:solidFill>
-                <a:latin typeface="PingFang SC"/>
-                <a:ea typeface="PingFang SC"/>
+                <a:latin typeface="Calibri"/>
+                <a:ea typeface="微软雅黑"/>
               </a:rPr>
               <a:t>256 个逻辑块样本偏小，块级结论仍需扩大验证</a:t>
             </a:r>
@@ -17947,8 +18559,8 @@
                 <a:solidFill>
                   <a:srgbClr val="333333"/>
                 </a:solidFill>
-                <a:latin typeface="PingFang SC"/>
-                <a:ea typeface="PingFang SC"/>
+                <a:latin typeface="Calibri"/>
+                <a:ea typeface="微软雅黑"/>
               </a:rPr>
               <a:t>●  </a:t>
             </a:r>
@@ -17957,8 +18569,8 @@
                 <a:solidFill>
                   <a:srgbClr val="333333"/>
                 </a:solidFill>
-                <a:latin typeface="PingFang SC"/>
-                <a:ea typeface="PingFang SC"/>
+                <a:latin typeface="Calibri"/>
+                <a:ea typeface="微软雅黑"/>
               </a:rPr>
               <a:t>模型剪枝量化后部署到 TPU 或 FPGA 边缘端加速推理</a:t>
             </a:r>
@@ -17974,8 +18586,8 @@
                 <a:solidFill>
                   <a:srgbClr val="333333"/>
                 </a:solidFill>
-                <a:latin typeface="PingFang SC"/>
-                <a:ea typeface="PingFang SC"/>
+                <a:latin typeface="Calibri"/>
+                <a:ea typeface="微软雅黑"/>
               </a:rPr>
               <a:t>●  </a:t>
             </a:r>
@@ -17984,8 +18596,8 @@
                 <a:solidFill>
                   <a:srgbClr val="333333"/>
                 </a:solidFill>
-                <a:latin typeface="PingFang SC"/>
-                <a:ea typeface="PingFang SC"/>
+                <a:latin typeface="Calibri"/>
+                <a:ea typeface="微软雅黑"/>
               </a:rPr>
               <a:t>结合特征重要性做故障归因，增强可解释性</a:t>
             </a:r>
@@ -18018,8 +18630,8 @@
                 <a:solidFill>
                   <a:srgbClr val="999999"/>
                 </a:solidFill>
-                <a:latin typeface="PingFang SC"/>
-                <a:ea typeface="PingFang SC"/>
+                <a:latin typeface="Calibri"/>
+                <a:ea typeface="微软雅黑"/>
               </a:rPr>
               <a:t>34</a:t>
             </a:r>
@@ -18113,8 +18725,8 @@
                 <a:solidFill>
                   <a:srgbClr val="FFFFFF"/>
                 </a:solidFill>
-                <a:latin typeface="PingFang SC"/>
-                <a:ea typeface="PingFang SC"/>
+                <a:latin typeface="Calibri"/>
+                <a:ea typeface="微软雅黑"/>
               </a:rPr>
               <a:t>浙江大学硕士学位论文答辩</a:t>
             </a:r>
@@ -18171,8 +18783,8 @@
                 <a:solidFill>
                   <a:srgbClr val="0A1A3E"/>
                 </a:solidFill>
-                <a:latin typeface="PingFang SC"/>
-                <a:ea typeface="PingFang SC"/>
+                <a:latin typeface="Calibri"/>
+                <a:ea typeface="微软雅黑"/>
               </a:rPr>
               <a:t>感谢各位专家评审！</a:t>
             </a:r>
@@ -18205,8 +18817,8 @@
                 <a:solidFill>
                   <a:srgbClr val="666666"/>
                 </a:solidFill>
-                <a:latin typeface="PingFang SC"/>
-                <a:ea typeface="PingFang SC"/>
+                <a:latin typeface="Calibri"/>
+                <a:ea typeface="微软雅黑"/>
               </a:rPr>
               <a:t>敬请批评指正</a:t>
             </a:r>
@@ -18343,8 +18955,8 @@
                 <a:solidFill>
                   <a:srgbClr val="0A1A3E"/>
                 </a:solidFill>
-                <a:latin typeface="PingFang SC"/>
-                <a:ea typeface="PingFang SC"/>
+                <a:latin typeface="Calibri"/>
+                <a:ea typeface="微软雅黑"/>
               </a:rPr>
               <a:t>盘级预测与块级寿命管理两条主线已有丰富积累，但各有缺口</a:t>
             </a:r>
@@ -18424,8 +19036,8 @@
                 <a:solidFill>
                   <a:srgbClr val="0A1A3E"/>
                 </a:solidFill>
-                <a:latin typeface="PingFang SC"/>
-                <a:ea typeface="PingFang SC"/>
+                <a:latin typeface="Calibri"/>
+                <a:ea typeface="微软雅黑"/>
               </a:rPr>
               <a:t>盘级故障预测代表性工作</a:t>
             </a:r>
@@ -18441,8 +19053,8 @@
                 <a:solidFill>
                   <a:srgbClr val="333333"/>
                 </a:solidFill>
-                <a:latin typeface="PingFang SC"/>
-                <a:ea typeface="PingFang SC"/>
+                <a:latin typeface="Calibri"/>
+                <a:ea typeface="微软雅黑"/>
               </a:rPr>
               <a:t>●  </a:t>
             </a:r>
@@ -18451,8 +19063,8 @@
                 <a:solidFill>
                   <a:srgbClr val="333333"/>
                 </a:solidFill>
-                <a:latin typeface="PingFang SC"/>
-                <a:ea typeface="PingFang SC"/>
+                <a:latin typeface="Calibri"/>
+                <a:ea typeface="微软雅黑"/>
               </a:rPr>
               <a:t>Xu+21 [阿里] GBDT/RF 通用基线，开源 9.3 万盘 SMART 数据集</a:t>
             </a:r>
@@ -18468,8 +19080,8 @@
                 <a:solidFill>
                   <a:srgbClr val="333333"/>
                 </a:solidFill>
-                <a:latin typeface="PingFang SC"/>
-                <a:ea typeface="PingFang SC"/>
+                <a:latin typeface="Calibri"/>
+                <a:ea typeface="微软雅黑"/>
               </a:rPr>
               <a:t>●  </a:t>
             </a:r>
@@ -18478,8 +19090,8 @@
                 <a:solidFill>
                   <a:srgbClr val="333333"/>
                 </a:solidFill>
-                <a:latin typeface="PingFang SC"/>
-                <a:ea typeface="PingFang SC"/>
+                <a:latin typeface="Calibri"/>
+                <a:ea typeface="微软雅黑"/>
               </a:rPr>
               <a:t>Zhang+23 MVT-RF [腾讯] 多视图多任务随机森林，最强 F</a:t>
             </a:r>
@@ -18488,8 +19100,8 @@
                 <a:solidFill>
                   <a:srgbClr val="333333"/>
                 </a:solidFill>
-                <a:latin typeface="PingFang SC"/>
-                <a:ea typeface="PingFang SC"/>
+                <a:latin typeface="Calibri"/>
+                <a:ea typeface="微软雅黑"/>
               </a:rPr>
               <a:t>0.5</a:t>
             </a:r>
@@ -18498,8 +19110,8 @@
                 <a:solidFill>
                   <a:srgbClr val="333333"/>
                 </a:solidFill>
-                <a:latin typeface="PingFang SC"/>
-                <a:ea typeface="PingFang SC"/>
+                <a:latin typeface="Calibri"/>
+                <a:ea typeface="微软雅黑"/>
               </a:rPr>
               <a:t> 基线</a:t>
             </a:r>
@@ -18515,8 +19127,8 @@
                 <a:solidFill>
                   <a:srgbClr val="333333"/>
                 </a:solidFill>
-                <a:latin typeface="PingFang SC"/>
-                <a:ea typeface="PingFang SC"/>
+                <a:latin typeface="Calibri"/>
+                <a:ea typeface="微软雅黑"/>
               </a:rPr>
               <a:t>●  </a:t>
             </a:r>
@@ -18525,8 +19137,8 @@
                 <a:solidFill>
                   <a:srgbClr val="333333"/>
                 </a:solidFill>
-                <a:latin typeface="PingFang SC"/>
-                <a:ea typeface="PingFang SC"/>
+                <a:latin typeface="Calibri"/>
+                <a:ea typeface="微软雅黑"/>
               </a:rPr>
               <a:t>Koh+24 TCAN [腾讯] LSTM+交叉注意力网络，68% TPR / 70% F1</a:t>
             </a:r>
@@ -18542,8 +19154,8 @@
                 <a:solidFill>
                   <a:srgbClr val="333333"/>
                 </a:solidFill>
-                <a:latin typeface="PingFang SC"/>
-                <a:ea typeface="PingFang SC"/>
+                <a:latin typeface="Calibri"/>
+                <a:ea typeface="微软雅黑"/>
               </a:rPr>
               <a:t>●  </a:t>
             </a:r>
@@ -18552,8 +19164,8 @@
                 <a:solidFill>
                   <a:srgbClr val="333333"/>
                 </a:solidFill>
-                <a:latin typeface="PingFang SC"/>
-                <a:ea typeface="PingFang SC"/>
+                <a:latin typeface="Calibri"/>
+                <a:ea typeface="微软雅黑"/>
               </a:rPr>
               <a:t>Zhang+24 MSFRD [字节] 突变相似度+半监督 Informer，61% F</a:t>
             </a:r>
@@ -18562,8 +19174,8 @@
                 <a:solidFill>
                   <a:srgbClr val="333333"/>
                 </a:solidFill>
-                <a:latin typeface="PingFang SC"/>
-                <a:ea typeface="PingFang SC"/>
+                <a:latin typeface="Calibri"/>
+                <a:ea typeface="微软雅黑"/>
               </a:rPr>
               <a:t>0.5</a:t>
             </a:r>
@@ -18579,8 +19191,8 @@
                 <a:solidFill>
                   <a:srgbClr val="333333"/>
                 </a:solidFill>
-                <a:latin typeface="PingFang SC"/>
-                <a:ea typeface="PingFang SC"/>
+                <a:latin typeface="Calibri"/>
+                <a:ea typeface="微软雅黑"/>
               </a:rPr>
               <a:t>●  </a:t>
             </a:r>
@@ -18589,8 +19201,8 @@
                 <a:solidFill>
                   <a:srgbClr val="333333"/>
                 </a:solidFill>
-                <a:latin typeface="PingFang SC"/>
-                <a:ea typeface="PingFang SC"/>
+                <a:latin typeface="Calibri"/>
+                <a:ea typeface="微软雅黑"/>
               </a:rPr>
               <a:t>Chen+22 [阿里] Precision 优先多树投票，100% Precision / 21% TPR</a:t>
             </a:r>
@@ -18627,8 +19239,8 @@
                 <a:solidFill>
                   <a:srgbClr val="0A1A3E"/>
                 </a:solidFill>
-                <a:latin typeface="PingFang SC"/>
-                <a:ea typeface="PingFang SC"/>
+                <a:latin typeface="Calibri"/>
+                <a:ea typeface="微软雅黑"/>
               </a:rPr>
               <a:t>块级寿命管理代表性工作</a:t>
             </a:r>
@@ -18644,8 +19256,8 @@
                 <a:solidFill>
                   <a:srgbClr val="333333"/>
                 </a:solidFill>
-                <a:latin typeface="PingFang SC"/>
-                <a:ea typeface="PingFang SC"/>
+                <a:latin typeface="Calibri"/>
+                <a:ea typeface="微软雅黑"/>
               </a:rPr>
               <a:t>●  </a:t>
             </a:r>
@@ -18654,8 +19266,8 @@
                 <a:solidFill>
                   <a:srgbClr val="333333"/>
                 </a:solidFill>
-                <a:latin typeface="PingFang SC"/>
-                <a:ea typeface="PingFang SC"/>
+                <a:latin typeface="Calibri"/>
+                <a:ea typeface="微软雅黑"/>
               </a:rPr>
               <a:t>传统方案：统一 PE 阈值全局管控，不区分块间耐久差异</a:t>
             </a:r>
@@ -18671,8 +19283,8 @@
                 <a:solidFill>
                   <a:srgbClr val="333333"/>
                 </a:solidFill>
-                <a:latin typeface="PingFang SC"/>
-                <a:ea typeface="PingFang SC"/>
+                <a:latin typeface="Calibri"/>
+                <a:ea typeface="微软雅黑"/>
               </a:rPr>
               <a:t>●  </a:t>
             </a:r>
@@ -18681,8 +19293,8 @@
                 <a:solidFill>
                   <a:srgbClr val="333333"/>
                 </a:solidFill>
-                <a:latin typeface="PingFang SC"/>
-                <a:ea typeface="PingFang SC"/>
+                <a:latin typeface="Calibri"/>
+                <a:ea typeface="微软雅黑"/>
               </a:rPr>
               <a:t>FBC 特征驱动块寿命预测：已有实验室验证，但缺工程闭环</a:t>
             </a:r>
@@ -18698,8 +19310,8 @@
                 <a:solidFill>
                   <a:srgbClr val="333333"/>
                 </a:solidFill>
-                <a:latin typeface="PingFang SC"/>
-                <a:ea typeface="PingFang SC"/>
+                <a:latin typeface="Calibri"/>
+                <a:ea typeface="微软雅黑"/>
               </a:rPr>
               <a:t>●  </a:t>
             </a:r>
@@ -18708,8 +19320,8 @@
                 <a:solidFill>
                   <a:srgbClr val="333333"/>
                 </a:solidFill>
-                <a:latin typeface="PingFang SC"/>
-                <a:ea typeface="PingFang SC"/>
+                <a:latin typeface="Calibri"/>
+                <a:ea typeface="微软雅黑"/>
               </a:rPr>
               <a:t>自适应磨损均衡：控制器层面已有探索，但无 预测→调度 联动</a:t>
             </a:r>
@@ -18725,8 +19337,8 @@
                 <a:solidFill>
                   <a:srgbClr val="333333"/>
                 </a:solidFill>
-                <a:latin typeface="PingFang SC"/>
-                <a:ea typeface="PingFang SC"/>
+                <a:latin typeface="Calibri"/>
+                <a:ea typeface="微软雅黑"/>
               </a:rPr>
               <a:t>●  </a:t>
             </a:r>
@@ -18735,8 +19347,8 @@
                 <a:solidFill>
                   <a:srgbClr val="333333"/>
                 </a:solidFill>
-                <a:latin typeface="PingFang SC"/>
-                <a:ea typeface="PingFang SC"/>
+                <a:latin typeface="Calibri"/>
+                <a:ea typeface="微软雅黑"/>
               </a:rPr>
               <a:t>缺口：缺乏从早期分类到差异化擦写的完整策略测算与验证</a:t>
             </a:r>
@@ -18769,8 +19381,8 @@
                 <a:solidFill>
                   <a:srgbClr val="999999"/>
                 </a:solidFill>
-                <a:latin typeface="PingFang SC"/>
-                <a:ea typeface="PingFang SC"/>
+                <a:latin typeface="Calibri"/>
+                <a:ea typeface="微软雅黑"/>
               </a:rPr>
               <a:t>4</a:t>
             </a:r>
@@ -18864,8 +19476,8 @@
                 <a:solidFill>
                   <a:srgbClr val="0A1A3E"/>
                 </a:solidFill>
-                <a:latin typeface="PingFang SC"/>
-                <a:ea typeface="PingFang SC"/>
+                <a:latin typeface="Calibri"/>
+                <a:ea typeface="微软雅黑"/>
               </a:rPr>
               <a:t>现有方法在近端突变建模与块间差异利用上存在不足</a:t>
             </a:r>
@@ -18945,8 +19557,8 @@
                 <a:solidFill>
                   <a:srgbClr val="0A1A3E"/>
                 </a:solidFill>
-                <a:latin typeface="PingFang SC"/>
-                <a:ea typeface="PingFang SC"/>
+                <a:latin typeface="Calibri"/>
+                <a:ea typeface="微软雅黑"/>
               </a:rPr>
               <a:t>盘级故障预测不足</a:t>
             </a:r>
@@ -18962,8 +19574,8 @@
                 <a:solidFill>
                   <a:srgbClr val="333333"/>
                 </a:solidFill>
-                <a:latin typeface="PingFang SC"/>
-                <a:ea typeface="PingFang SC"/>
+                <a:latin typeface="Calibri"/>
+                <a:ea typeface="微软雅黑"/>
               </a:rPr>
               <a:t>●  </a:t>
             </a:r>
@@ -18972,8 +19584,8 @@
                 <a:solidFill>
                   <a:srgbClr val="333333"/>
                 </a:solidFill>
-                <a:latin typeface="PingFang SC"/>
-                <a:ea typeface="PingFang SC"/>
+                <a:latin typeface="Calibri"/>
+                <a:ea typeface="微软雅黑"/>
               </a:rPr>
               <a:t>长窗特征稀释近端突变信号，标签噪声混入静默段</a:t>
             </a:r>
@@ -18989,8 +19601,8 @@
                 <a:solidFill>
                   <a:srgbClr val="333333"/>
                 </a:solidFill>
-                <a:latin typeface="PingFang SC"/>
-                <a:ea typeface="PingFang SC"/>
+                <a:latin typeface="Calibri"/>
+                <a:ea typeface="微软雅黑"/>
               </a:rPr>
               <a:t>●  </a:t>
             </a:r>
@@ -18999,8 +19611,8 @@
                 <a:solidFill>
                   <a:srgbClr val="333333"/>
                 </a:solidFill>
-                <a:latin typeface="PingFang SC"/>
-                <a:ea typeface="PingFang SC"/>
+                <a:latin typeface="Calibri"/>
+                <a:ea typeface="微软雅黑"/>
               </a:rPr>
               <a:t>多数方法 F</a:t>
             </a:r>
@@ -19009,8 +19621,8 @@
                 <a:solidFill>
                   <a:srgbClr val="333333"/>
                 </a:solidFill>
-                <a:latin typeface="PingFang SC"/>
-                <a:ea typeface="PingFang SC"/>
+                <a:latin typeface="Calibri"/>
+                <a:ea typeface="微软雅黑"/>
               </a:rPr>
               <a:t>0.5</a:t>
             </a:r>
@@ -19019,8 +19631,8 @@
                 <a:solidFill>
                   <a:srgbClr val="333333"/>
                 </a:solidFill>
-                <a:latin typeface="PingFang SC"/>
-                <a:ea typeface="PingFang SC"/>
+                <a:latin typeface="Calibri"/>
+                <a:ea typeface="微软雅黑"/>
               </a:rPr>
               <a:t> 未达 0.9，最强基线 MVT-RF 的 FPR=4.53×10</a:t>
             </a:r>
@@ -19029,8 +19641,8 @@
                 <a:solidFill>
                   <a:srgbClr val="333333"/>
                 </a:solidFill>
-                <a:latin typeface="PingFang SC"/>
-                <a:ea typeface="PingFang SC"/>
+                <a:latin typeface="Calibri"/>
+                <a:ea typeface="微软雅黑"/>
               </a:rPr>
               <a:t>-5</a:t>
             </a:r>
@@ -19046,8 +19658,8 @@
                 <a:solidFill>
                   <a:srgbClr val="333333"/>
                 </a:solidFill>
-                <a:latin typeface="PingFang SC"/>
-                <a:ea typeface="PingFang SC"/>
+                <a:latin typeface="Calibri"/>
+                <a:ea typeface="微软雅黑"/>
               </a:rPr>
               <a:t>●  </a:t>
             </a:r>
@@ -19056,8 +19668,8 @@
                 <a:solidFill>
                   <a:srgbClr val="333333"/>
                 </a:solidFill>
-                <a:latin typeface="PingFang SC"/>
-                <a:ea typeface="PingFang SC"/>
+                <a:latin typeface="Calibri"/>
+                <a:ea typeface="微软雅黑"/>
               </a:rPr>
               <a:t>大规模部署下 FPR 偏高致虚假告警，每次误报即一次换盘操作</a:t>
             </a:r>
@@ -19073,8 +19685,8 @@
                 <a:solidFill>
                   <a:srgbClr val="333333"/>
                 </a:solidFill>
-                <a:latin typeface="PingFang SC"/>
-                <a:ea typeface="PingFang SC"/>
+                <a:latin typeface="Calibri"/>
+                <a:ea typeface="微软雅黑"/>
               </a:rPr>
               <a:t>●  </a:t>
             </a:r>
@@ -19083,8 +19695,8 @@
                 <a:solidFill>
                   <a:srgbClr val="333333"/>
                 </a:solidFill>
-                <a:latin typeface="PingFang SC"/>
-                <a:ea typeface="PingFang SC"/>
+                <a:latin typeface="Calibri"/>
+                <a:ea typeface="微软雅黑"/>
               </a:rPr>
               <a:t>数据中心万盘规模下，FPR 每降 10</a:t>
             </a:r>
@@ -19093,8 +19705,8 @@
                 <a:solidFill>
                   <a:srgbClr val="333333"/>
                 </a:solidFill>
-                <a:latin typeface="PingFang SC"/>
-                <a:ea typeface="PingFang SC"/>
+                <a:latin typeface="Calibri"/>
+                <a:ea typeface="微软雅黑"/>
               </a:rPr>
               <a:t>-5</a:t>
             </a:r>
@@ -19103,8 +19715,8 @@
                 <a:solidFill>
                   <a:srgbClr val="333333"/>
                 </a:solidFill>
-                <a:latin typeface="PingFang SC"/>
-                <a:ea typeface="PingFang SC"/>
+                <a:latin typeface="Calibri"/>
+                <a:ea typeface="微软雅黑"/>
               </a:rPr>
               <a:t> 即减少约 1 次/万次假阳性</a:t>
             </a:r>
@@ -19141,8 +19753,8 @@
                 <a:solidFill>
                   <a:srgbClr val="0A1A3E"/>
                 </a:solidFill>
-                <a:latin typeface="PingFang SC"/>
-                <a:ea typeface="PingFang SC"/>
+                <a:latin typeface="Calibri"/>
+                <a:ea typeface="微软雅黑"/>
               </a:rPr>
               <a:t>块粒度寿命管理不足</a:t>
             </a:r>
@@ -19158,8 +19770,8 @@
                 <a:solidFill>
                   <a:srgbClr val="333333"/>
                 </a:solidFill>
-                <a:latin typeface="PingFang SC"/>
-                <a:ea typeface="PingFang SC"/>
+                <a:latin typeface="Calibri"/>
+                <a:ea typeface="微软雅黑"/>
               </a:rPr>
               <a:t>●  </a:t>
             </a:r>
@@ -19168,8 +19780,8 @@
                 <a:solidFill>
                   <a:srgbClr val="333333"/>
                 </a:solidFill>
-                <a:latin typeface="PingFang SC"/>
-                <a:ea typeface="PingFang SC"/>
+                <a:latin typeface="Calibri"/>
+                <a:ea typeface="微软雅黑"/>
               </a:rPr>
               <a:t>统一 PE 阈值致弱块过早淘汰、强块耐久余量被浪费</a:t>
             </a:r>
@@ -19185,8 +19797,8 @@
                 <a:solidFill>
                   <a:srgbClr val="333333"/>
                 </a:solidFill>
-                <a:latin typeface="PingFang SC"/>
-                <a:ea typeface="PingFang SC"/>
+                <a:latin typeface="Calibri"/>
+                <a:ea typeface="微软雅黑"/>
               </a:rPr>
               <a:t>●  </a:t>
             </a:r>
@@ -19195,8 +19807,8 @@
                 <a:solidFill>
                   <a:srgbClr val="333333"/>
                 </a:solidFill>
-                <a:latin typeface="PingFang SC"/>
-                <a:ea typeface="PingFang SC"/>
+                <a:latin typeface="Calibri"/>
+                <a:ea typeface="微软雅黑"/>
               </a:rPr>
               <a:t>仅限健康度/寿命预测建模，缺乏预测→调度工程闭环</a:t>
             </a:r>
@@ -19212,8 +19824,8 @@
                 <a:solidFill>
                   <a:srgbClr val="333333"/>
                 </a:solidFill>
-                <a:latin typeface="PingFang SC"/>
-                <a:ea typeface="PingFang SC"/>
+                <a:latin typeface="Calibri"/>
+                <a:ea typeface="微软雅黑"/>
               </a:rPr>
               <a:t>●  </a:t>
             </a:r>
@@ -19222,8 +19834,8 @@
                 <a:solidFill>
                   <a:srgbClr val="333333"/>
                 </a:solidFill>
-                <a:latin typeface="PingFang SC"/>
-                <a:ea typeface="PingFang SC"/>
+                <a:latin typeface="Calibri"/>
+                <a:ea typeface="微软雅黑"/>
               </a:rPr>
               <a:t>未测算差异化 PE 策略的实际收益</a:t>
             </a:r>
@@ -19256,8 +19868,8 @@
                 <a:solidFill>
                   <a:srgbClr val="999999"/>
                 </a:solidFill>
-                <a:latin typeface="PingFang SC"/>
-                <a:ea typeface="PingFang SC"/>
+                <a:latin typeface="Calibri"/>
+                <a:ea typeface="微软雅黑"/>
               </a:rPr>
               <a:t>5</a:t>
             </a:r>
@@ -19351,8 +19963,8 @@
                 <a:solidFill>
                   <a:srgbClr val="0A1A3E"/>
                 </a:solidFill>
-                <a:latin typeface="PingFang SC"/>
-                <a:ea typeface="PingFang SC"/>
+                <a:latin typeface="Calibri"/>
+                <a:ea typeface="微软雅黑"/>
               </a:rPr>
               <a:t>本文目标：F</a:t>
             </a:r>
@@ -19361,8 +19973,8 @@
                 <a:solidFill>
                   <a:srgbClr val="0A1A3E"/>
                 </a:solidFill>
-                <a:latin typeface="PingFang SC"/>
-                <a:ea typeface="PingFang SC"/>
+                <a:latin typeface="Calibri"/>
+                <a:ea typeface="微软雅黑"/>
               </a:rPr>
               <a:t>0.5</a:t>
             </a:r>
@@ -19371,8 +19983,8 @@
                 <a:solidFill>
                   <a:srgbClr val="0A1A3E"/>
                 </a:solidFill>
-                <a:latin typeface="PingFang SC"/>
-                <a:ea typeface="PingFang SC"/>
+                <a:latin typeface="Calibri"/>
+                <a:ea typeface="微软雅黑"/>
               </a:rPr>
               <a:t>≥0.9 低误报预警  写入量提升≥15% + 原型闭环</a:t>
             </a:r>
@@ -19452,8 +20064,8 @@
                 <a:solidFill>
                   <a:srgbClr val="333333"/>
                 </a:solidFill>
-                <a:latin typeface="PingFang SC"/>
-                <a:ea typeface="PingFang SC"/>
+                <a:latin typeface="Calibri"/>
+                <a:ea typeface="微软雅黑"/>
               </a:rPr>
               <a:t>●  </a:t>
             </a:r>
@@ -19462,8 +20074,8 @@
                 <a:solidFill>
                   <a:srgbClr val="333333"/>
                 </a:solidFill>
-                <a:latin typeface="PingFang SC"/>
-                <a:ea typeface="PingFang SC"/>
+                <a:latin typeface="Calibri"/>
+                <a:ea typeface="微软雅黑"/>
               </a:rPr>
               <a:t>F</a:t>
             </a:r>
@@ -19472,8 +20084,8 @@
                 <a:solidFill>
                   <a:srgbClr val="333333"/>
                 </a:solidFill>
-                <a:latin typeface="PingFang SC"/>
-                <a:ea typeface="PingFang SC"/>
+                <a:latin typeface="Calibri"/>
+                <a:ea typeface="微软雅黑"/>
               </a:rPr>
               <a:t>0.5</a:t>
             </a:r>
@@ -19482,8 +20094,8 @@
                 <a:solidFill>
                   <a:srgbClr val="333333"/>
                 </a:solidFill>
-                <a:latin typeface="PingFang SC"/>
-                <a:ea typeface="PingFang SC"/>
+                <a:latin typeface="Calibri"/>
+                <a:ea typeface="微软雅黑"/>
               </a:rPr>
               <a:t> ≥ 0.9，30 天预测窗口内低误报预警</a:t>
             </a:r>
@@ -19499,8 +20111,8 @@
                 <a:solidFill>
                   <a:srgbClr val="666666"/>
                 </a:solidFill>
-                <a:latin typeface="PingFang SC"/>
-                <a:ea typeface="PingFang SC"/>
+                <a:latin typeface="Calibri"/>
+                <a:ea typeface="微软雅黑"/>
               </a:rPr>
               <a:t>◦  </a:t>
             </a:r>
@@ -19509,8 +20121,8 @@
                 <a:solidFill>
                   <a:srgbClr val="666666"/>
                 </a:solidFill>
-                <a:latin typeface="PingFang SC"/>
-                <a:ea typeface="PingFang SC"/>
+                <a:latin typeface="Calibri"/>
+                <a:ea typeface="微软雅黑"/>
               </a:rPr>
               <a:t>30 天为建模窗口长度，实际主力检出集中在故障前 1-2 天</a:t>
             </a:r>
@@ -19526,8 +20138,8 @@
                 <a:solidFill>
                   <a:srgbClr val="666666"/>
                 </a:solidFill>
-                <a:latin typeface="PingFang SC"/>
-                <a:ea typeface="PingFang SC"/>
+                <a:latin typeface="Calibri"/>
+                <a:ea typeface="微软雅黑"/>
               </a:rPr>
               <a:t>◦  </a:t>
             </a:r>
@@ -19536,8 +20148,8 @@
                 <a:solidFill>
                   <a:srgbClr val="666666"/>
                 </a:solidFill>
-                <a:latin typeface="PingFang SC"/>
-                <a:ea typeface="PingFang SC"/>
+                <a:latin typeface="Calibri"/>
+                <a:ea typeface="微软雅黑"/>
               </a:rPr>
               <a:t>核心主线：低误报约束贯穿盘级 FPR 控制与块级误判率控制</a:t>
             </a:r>
@@ -19553,8 +20165,8 @@
                 <a:solidFill>
                   <a:srgbClr val="333333"/>
                 </a:solidFill>
-                <a:latin typeface="PingFang SC"/>
-                <a:ea typeface="PingFang SC"/>
+                <a:latin typeface="Calibri"/>
+                <a:ea typeface="微软雅黑"/>
               </a:rPr>
               <a:t>●  </a:t>
             </a:r>
@@ -19563,8 +20175,8 @@
                 <a:solidFill>
                   <a:srgbClr val="333333"/>
                 </a:solidFill>
-                <a:latin typeface="PingFang SC"/>
-                <a:ea typeface="PingFang SC"/>
+                <a:latin typeface="Calibri"/>
+                <a:ea typeface="微软雅黑"/>
               </a:rPr>
               <a:t>差异化 PE 使累计写入量提升 ≥ 15%</a:t>
             </a:r>
@@ -19580,8 +20192,8 @@
                 <a:solidFill>
                   <a:srgbClr val="666666"/>
                 </a:solidFill>
-                <a:latin typeface="PingFang SC"/>
-                <a:ea typeface="PingFang SC"/>
+                <a:latin typeface="Calibri"/>
+                <a:ea typeface="微软雅黑"/>
               </a:rPr>
               <a:t>◦  </a:t>
             </a:r>
@@ -19590,8 +20202,8 @@
                 <a:solidFill>
                   <a:srgbClr val="666666"/>
                 </a:solidFill>
-                <a:latin typeface="PingFang SC"/>
-                <a:ea typeface="PingFang SC"/>
+                <a:latin typeface="Calibri"/>
+                <a:ea typeface="微软雅黑"/>
               </a:rPr>
               <a:t>基于强/弱块分类的差异化擦写上限策略</a:t>
             </a:r>
@@ -19607,8 +20219,8 @@
                 <a:solidFill>
                   <a:srgbClr val="333333"/>
                 </a:solidFill>
-                <a:latin typeface="PingFang SC"/>
-                <a:ea typeface="PingFang SC"/>
+                <a:latin typeface="Calibri"/>
+                <a:ea typeface="微软雅黑"/>
               </a:rPr>
               <a:t>●  </a:t>
             </a:r>
@@ -19617,8 +20229,8 @@
                 <a:solidFill>
                   <a:srgbClr val="333333"/>
                 </a:solidFill>
-                <a:latin typeface="PingFang SC"/>
-                <a:ea typeface="PingFang SC"/>
+                <a:latin typeface="Calibri"/>
+                <a:ea typeface="微软雅黑"/>
               </a:rPr>
               <a:t>原型软件打通全闭环</a:t>
             </a:r>
@@ -19634,8 +20246,8 @@
                 <a:solidFill>
                   <a:srgbClr val="666666"/>
                 </a:solidFill>
-                <a:latin typeface="PingFang SC"/>
-                <a:ea typeface="PingFang SC"/>
+                <a:latin typeface="Calibri"/>
+                <a:ea typeface="微软雅黑"/>
               </a:rPr>
               <a:t>◦  </a:t>
             </a:r>
@@ -19644,8 +20256,8 @@
                 <a:solidFill>
                   <a:srgbClr val="666666"/>
                 </a:solidFill>
-                <a:latin typeface="PingFang SC"/>
-                <a:ea typeface="PingFang SC"/>
+                <a:latin typeface="Calibri"/>
+                <a:ea typeface="微软雅黑"/>
               </a:rPr>
               <a:t>数据接入—模型预警—人工处置—数据沉淀完整闭环</a:t>
             </a:r>
@@ -19678,8 +20290,8 @@
                 <a:solidFill>
                   <a:srgbClr val="999999"/>
                 </a:solidFill>
-                <a:latin typeface="PingFang SC"/>
-                <a:ea typeface="PingFang SC"/>
+                <a:latin typeface="Calibri"/>
+                <a:ea typeface="微软雅黑"/>
               </a:rPr>
               <a:t>6</a:t>
             </a:r>
@@ -19773,8 +20385,8 @@
                 <a:solidFill>
                   <a:srgbClr val="0A1A3E"/>
                 </a:solidFill>
-                <a:latin typeface="PingFang SC"/>
-                <a:ea typeface="PingFang SC"/>
+                <a:latin typeface="Calibri"/>
+                <a:ea typeface="微软雅黑"/>
               </a:rPr>
               <a:t>三章递进：盘级预测 → 块级优化 → 系统落地形成数据驱动闭环</a:t>
             </a:r>
@@ -19874,8 +20486,8 @@
                 <a:solidFill>
                   <a:srgbClr val="666666"/>
                 </a:solidFill>
-                <a:latin typeface="PingFang SC"/>
-                <a:ea typeface="PingFang SC"/>
+                <a:latin typeface="Calibri"/>
+                <a:ea typeface="微软雅黑"/>
               </a:rPr>
               <a:t>研究框架：三章递进，数据驱动闭环</a:t>
             </a:r>
@@ -19908,8 +20520,8 @@
                 <a:solidFill>
                   <a:srgbClr val="999999"/>
                 </a:solidFill>
-                <a:latin typeface="PingFang SC"/>
-                <a:ea typeface="PingFang SC"/>
+                <a:latin typeface="Calibri"/>
+                <a:ea typeface="微软雅黑"/>
               </a:rPr>
               <a:t>第三章做盘级预测 → 第四章下沉到块级 → 第五章集成进运维软件</a:t>
             </a:r>
@@ -19942,8 +20554,8 @@
                 <a:solidFill>
                   <a:srgbClr val="999999"/>
                 </a:solidFill>
-                <a:latin typeface="PingFang SC"/>
-                <a:ea typeface="PingFang SC"/>
+                <a:latin typeface="Calibri"/>
+                <a:ea typeface="微软雅黑"/>
               </a:rPr>
               <a:t>7</a:t>
             </a:r>
@@ -20037,8 +20649,8 @@
                 <a:solidFill>
                   <a:srgbClr val="0A1A3E"/>
                 </a:solidFill>
-                <a:latin typeface="PingFang SC"/>
-                <a:ea typeface="PingFang SC"/>
+                <a:latin typeface="Calibri"/>
+                <a:ea typeface="微软雅黑"/>
               </a:rPr>
               <a:t>技术基础</a:t>
             </a:r>
@@ -20071,8 +20683,8 @@
                 <a:solidFill>
                   <a:srgbClr val="666666"/>
                 </a:solidFill>
-                <a:latin typeface="PingFang SC"/>
-                <a:ea typeface="PingFang SC"/>
+                <a:latin typeface="Calibri"/>
+                <a:ea typeface="微软雅黑"/>
               </a:rPr>
               <a:t>NAND 闪存退化机理 · SMART 监测数据 · 集成学习方法</a:t>
             </a:r>
@@ -20166,8 +20778,8 @@
                 <a:solidFill>
                   <a:srgbClr val="0A1A3E"/>
                 </a:solidFill>
-                <a:latin typeface="PingFang SC"/>
-                <a:ea typeface="PingFang SC"/>
+                <a:latin typeface="Calibri"/>
+                <a:ea typeface="微软雅黑"/>
               </a:rPr>
               <a:t>电荷泄漏致阈值电压下降，TLC 状态间距最窄最先越界</a:t>
             </a:r>
@@ -20247,8 +20859,8 @@
                 <a:solidFill>
                   <a:srgbClr val="0A1A3E"/>
                 </a:solidFill>
-                <a:latin typeface="PingFang SC"/>
-                <a:ea typeface="PingFang SC"/>
+                <a:latin typeface="Calibri"/>
+                <a:ea typeface="微软雅黑"/>
               </a:rPr>
               <a:t>分析要点</a:t>
             </a:r>
@@ -20264,8 +20876,8 @@
                 <a:solidFill>
                   <a:srgbClr val="333333"/>
                 </a:solidFill>
-                <a:latin typeface="PingFang SC"/>
-                <a:ea typeface="PingFang SC"/>
+                <a:latin typeface="Calibri"/>
+                <a:ea typeface="微软雅黑"/>
               </a:rPr>
               <a:t>●  </a:t>
             </a:r>
@@ -20274,8 +20886,8 @@
                 <a:solidFill>
                   <a:srgbClr val="333333"/>
                 </a:solidFill>
-                <a:latin typeface="PingFang SC"/>
-                <a:ea typeface="PingFang SC"/>
+                <a:latin typeface="Calibri"/>
+                <a:ea typeface="微软雅黑"/>
               </a:rPr>
               <a:t>编程向浮栅注入电子抬高阈值电压，擦除反之</a:t>
             </a:r>
@@ -20291,8 +20903,8 @@
                 <a:solidFill>
                   <a:srgbClr val="333333"/>
                 </a:solidFill>
-                <a:latin typeface="PingFang SC"/>
-                <a:ea typeface="PingFang SC"/>
+                <a:latin typeface="Calibri"/>
+                <a:ea typeface="微软雅黑"/>
               </a:rPr>
               <a:t>●  </a:t>
             </a:r>
@@ -20301,8 +20913,8 @@
                 <a:solidFill>
                   <a:srgbClr val="333333"/>
                 </a:solidFill>
-                <a:latin typeface="PingFang SC"/>
-                <a:ea typeface="PingFang SC"/>
+                <a:latin typeface="Calibri"/>
+                <a:ea typeface="微软雅黑"/>
               </a:rPr>
               <a:t>长期静置电荷经隧道氧化层泄漏，阈值电压下降</a:t>
             </a:r>
@@ -20318,8 +20930,8 @@
                 <a:solidFill>
                   <a:srgbClr val="333333"/>
                 </a:solidFill>
-                <a:latin typeface="PingFang SC"/>
-                <a:ea typeface="PingFang SC"/>
+                <a:latin typeface="Calibri"/>
+                <a:ea typeface="微软雅黑"/>
               </a:rPr>
               <a:t>●  </a:t>
             </a:r>
@@ -20328,8 +20940,8 @@
                 <a:solidFill>
                   <a:srgbClr val="333333"/>
                 </a:solidFill>
-                <a:latin typeface="PingFang SC"/>
-                <a:ea typeface="PingFang SC"/>
+                <a:latin typeface="Calibri"/>
+                <a:ea typeface="微软雅黑"/>
               </a:rPr>
               <a:t>P/E 老化致界面陷阱增多、电压窗口变窄</a:t>
             </a:r>
@@ -20345,8 +20957,8 @@
                 <a:solidFill>
                   <a:srgbClr val="333333"/>
                 </a:solidFill>
-                <a:latin typeface="PingFang SC"/>
-                <a:ea typeface="PingFang SC"/>
+                <a:latin typeface="Calibri"/>
+                <a:ea typeface="微软雅黑"/>
               </a:rPr>
               <a:t>●  </a:t>
             </a:r>
@@ -20355,8 +20967,8 @@
                 <a:solidFill>
                   <a:srgbClr val="333333"/>
                 </a:solidFill>
-                <a:latin typeface="PingFang SC"/>
-                <a:ea typeface="PingFang SC"/>
+                <a:latin typeface="Calibri"/>
+                <a:ea typeface="微软雅黑"/>
               </a:rPr>
               <a:t>TLC 状态间距最窄，相同漂移下最先越界</a:t>
             </a:r>
@@ -20372,8 +20984,8 @@
                 <a:solidFill>
                   <a:srgbClr val="333333"/>
                 </a:solidFill>
-                <a:latin typeface="PingFang SC"/>
-                <a:ea typeface="PingFang SC"/>
+                <a:latin typeface="Calibri"/>
+                <a:ea typeface="微软雅黑"/>
               </a:rPr>
               <a:t>●  </a:t>
             </a:r>
@@ -20382,8 +20994,8 @@
                 <a:solidFill>
                   <a:srgbClr val="333333"/>
                 </a:solidFill>
-                <a:latin typeface="PingFang SC"/>
-                <a:ea typeface="PingFang SC"/>
+                <a:latin typeface="Calibri"/>
+                <a:ea typeface="微软雅黑"/>
               </a:rPr>
               <a:t>FBC 超 LDPC 纠错上限即标记坏块，冗余有限</a:t>
             </a:r>
@@ -20440,8 +21052,8 @@
                 <a:solidFill>
                   <a:srgbClr val="999999"/>
                 </a:solidFill>
-                <a:latin typeface="PingFang SC"/>
-                <a:ea typeface="PingFang SC"/>
+                <a:latin typeface="Calibri"/>
+                <a:ea typeface="微软雅黑"/>
               </a:rPr>
               <a:t>电荷泄漏后阈值电压分布左移</a:t>
             </a:r>
@@ -20498,8 +21110,8 @@
                 <a:solidFill>
                   <a:srgbClr val="999999"/>
                 </a:solidFill>
-                <a:latin typeface="PingFang SC"/>
-                <a:ea typeface="PingFang SC"/>
+                <a:latin typeface="Calibri"/>
+                <a:ea typeface="微软雅黑"/>
               </a:rPr>
               <a:t>NAND 分层结构：LUN / Plane / Block / Page</a:t>
             </a:r>
@@ -20556,8 +21168,8 @@
                 <a:solidFill>
                   <a:srgbClr val="999999"/>
                 </a:solidFill>
-                <a:latin typeface="PingFang SC"/>
-                <a:ea typeface="PingFang SC"/>
+                <a:latin typeface="Calibri"/>
+                <a:ea typeface="微软雅黑"/>
               </a:rPr>
               <a:t>浮栅 MOSFET 写 / 擦原理</a:t>
             </a:r>
@@ -20590,8 +21202,8 @@
                 <a:solidFill>
                   <a:srgbClr val="999999"/>
                 </a:solidFill>
-                <a:latin typeface="PingFang SC"/>
-                <a:ea typeface="PingFang SC"/>
+                <a:latin typeface="Calibri"/>
+                <a:ea typeface="微软雅黑"/>
               </a:rPr>
               <a:t>9</a:t>
             </a:r>
